--- a/projet6_presentation_seattle_complete.pptx
+++ b/projet6_presentation_seattle_complete.pptx
@@ -5,28 +5,30 @@
     <p:sldMasterId id="2147483648" r:id="rId1"/>
   </p:sldMasterIdLst>
   <p:notesMasterIdLst>
-    <p:notesMasterId r:id="rId21"/>
+    <p:notesMasterId r:id="rId23"/>
   </p:notesMasterIdLst>
   <p:sldIdLst>
     <p:sldId id="256" r:id="rId2"/>
     <p:sldId id="257" r:id="rId3"/>
-    <p:sldId id="258" r:id="rId4"/>
-    <p:sldId id="259" r:id="rId5"/>
-    <p:sldId id="260" r:id="rId6"/>
-    <p:sldId id="261" r:id="rId7"/>
-    <p:sldId id="262" r:id="rId8"/>
-    <p:sldId id="263" r:id="rId9"/>
-    <p:sldId id="264" r:id="rId10"/>
-    <p:sldId id="265" r:id="rId11"/>
-    <p:sldId id="266" r:id="rId12"/>
-    <p:sldId id="267" r:id="rId13"/>
-    <p:sldId id="268" r:id="rId14"/>
-    <p:sldId id="270" r:id="rId15"/>
-    <p:sldId id="271" r:id="rId16"/>
-    <p:sldId id="272" r:id="rId17"/>
-    <p:sldId id="273" r:id="rId18"/>
-    <p:sldId id="274" r:id="rId19"/>
-    <p:sldId id="269" r:id="rId20"/>
+    <p:sldId id="277" r:id="rId4"/>
+    <p:sldId id="258" r:id="rId5"/>
+    <p:sldId id="259" r:id="rId6"/>
+    <p:sldId id="260" r:id="rId7"/>
+    <p:sldId id="261" r:id="rId8"/>
+    <p:sldId id="262" r:id="rId9"/>
+    <p:sldId id="263" r:id="rId10"/>
+    <p:sldId id="264" r:id="rId11"/>
+    <p:sldId id="265" r:id="rId12"/>
+    <p:sldId id="266" r:id="rId13"/>
+    <p:sldId id="267" r:id="rId14"/>
+    <p:sldId id="268" r:id="rId15"/>
+    <p:sldId id="276" r:id="rId16"/>
+    <p:sldId id="270" r:id="rId17"/>
+    <p:sldId id="271" r:id="rId18"/>
+    <p:sldId id="272" r:id="rId19"/>
+    <p:sldId id="273" r:id="rId20"/>
+    <p:sldId id="274" r:id="rId21"/>
+    <p:sldId id="269" r:id="rId22"/>
   </p:sldIdLst>
   <p:sldSz cx="9144000" cy="5143500" type="screen16x9"/>
   <p:notesSz cx="5143500" cy="9144000"/>
@@ -129,6 +131,7 @@
           <p14:sldIdLst>
             <p14:sldId id="256"/>
             <p14:sldId id="257"/>
+            <p14:sldId id="277"/>
           </p14:sldIdLst>
         </p14:section>
         <p14:section name="Analyse exploratoire" id="{AD611829-5D1E-A9A1-8B53-6ABEBE2A551E}">
@@ -148,6 +151,7 @@
             <p14:sldId id="266"/>
             <p14:sldId id="267"/>
             <p14:sldId id="268"/>
+            <p14:sldId id="276"/>
             <p14:sldId id="270"/>
             <p14:sldId id="271"/>
             <p14:sldId id="272"/>
@@ -332,7 +336,7 @@
                 <a:latin typeface="+mn-lt"/>
               </a:defRPr>
             </a:pPr>
-            <a:endParaRPr lang="en-US"/>
+            <a:endParaRPr lang="fr-FR"/>
           </a:p>
         </c:txPr>
         <c:crossAx val="2094734552"/>
@@ -557,7 +561,7 @@
                 <a:latin typeface="+mn-lt"/>
               </a:defRPr>
             </a:pPr>
-            <a:endParaRPr lang="en-US"/>
+            <a:endParaRPr lang="fr-FR"/>
           </a:p>
         </c:txPr>
         <c:crossAx val="2094734552"/>
@@ -782,7 +786,7 @@
                 <a:latin typeface="+mn-lt"/>
               </a:defRPr>
             </a:pPr>
-            <a:endParaRPr lang="en-US"/>
+            <a:endParaRPr lang="fr-FR"/>
           </a:p>
         </c:txPr>
         <c:crossAx val="2094734552"/>
@@ -1484,7 +1488,189 @@
           <a:p>
             <a:fld id="{F7021451-1387-4CA6-816F-3879F97B5CBC}" type="slidenum">
               <a:rPr lang="en-US"/>
-              <a:t>19</a:t>
+              <a:t>14</a:t>
+            </a:fld>
+            <a:endParaRPr lang="en-US"/>
+          </a:p>
+        </p:txBody>
+      </p:sp>
+    </p:spTree>
+    <p:extLst>
+      <p:ext uri="{BB962C8B-B14F-4D97-AF65-F5344CB8AC3E}">
+        <p14:creationId xmlns:p14="http://schemas.microsoft.com/office/powerpoint/2010/main" val="1024086991"/>
+      </p:ext>
+    </p:extLst>
+  </p:cSld>
+  <p:clrMapOvr>
+    <a:masterClrMapping/>
+  </p:clrMapOvr>
+</p:notes>
+</file>
+
+<file path=ppt/notesSlides/notesSlide15.xml><?xml version="1.0" encoding="utf-8"?>
+<p:notes xmlns:a="http://schemas.openxmlformats.org/drawingml/2006/main" xmlns:r="http://schemas.openxmlformats.org/officeDocument/2006/relationships" xmlns:p="http://schemas.openxmlformats.org/presentationml/2006/main">
+  <p:cSld>
+    <p:spTree>
+      <p:nvGrpSpPr>
+        <p:cNvPr id="1" name=""/>
+        <p:cNvGrpSpPr/>
+        <p:nvPr/>
+      </p:nvGrpSpPr>
+      <p:grpSpPr>
+        <a:xfrm>
+          <a:off x="0" y="0"/>
+          <a:ext cx="0" cy="0"/>
+          <a:chOff x="0" y="0"/>
+          <a:chExt cx="0" cy="0"/>
+        </a:xfrm>
+      </p:grpSpPr>
+      <p:sp>
+        <p:nvSpPr>
+          <p:cNvPr id="2" name="Slide Image Placeholder 1"/>
+          <p:cNvSpPr>
+            <a:spLocks noGrp="1" noRot="1" noChangeAspect="1"/>
+          </p:cNvSpPr>
+          <p:nvPr>
+            <p:ph type="sldImg"/>
+          </p:nvPr>
+        </p:nvSpPr>
+        <p:spPr/>
+        <p:txBody>
+          <a:bodyPr/>
+          <a:lstStyle/>
+          <a:p>
+            <a:endParaRPr lang="fr-FR"/>
+          </a:p>
+        </p:txBody>
+      </p:sp>
+      <p:sp>
+        <p:nvSpPr>
+          <p:cNvPr id="3" name="Notes Placeholder 2"/>
+          <p:cNvSpPr>
+            <a:spLocks noGrp="1"/>
+          </p:cNvSpPr>
+          <p:nvPr>
+            <p:ph type="body" idx="1"/>
+          </p:nvPr>
+        </p:nvSpPr>
+        <p:spPr/>
+        <p:txBody>
+          <a:bodyPr/>
+          <a:lstStyle/>
+          <a:p>
+            <a:endParaRPr lang="en-US" dirty="0"/>
+          </a:p>
+        </p:txBody>
+      </p:sp>
+      <p:sp>
+        <p:nvSpPr>
+          <p:cNvPr id="4" name="Slide Number Placeholder 3"/>
+          <p:cNvSpPr>
+            <a:spLocks noGrp="1"/>
+          </p:cNvSpPr>
+          <p:nvPr>
+            <p:ph type="sldNum" sz="quarter" idx="10"/>
+          </p:nvPr>
+        </p:nvSpPr>
+        <p:spPr/>
+        <p:txBody>
+          <a:bodyPr/>
+          <a:lstStyle/>
+          <a:p>
+            <a:fld id="{F7021451-1387-4CA6-816F-3879F97B5CBC}" type="slidenum">
+              <a:rPr lang="en-US"/>
+              <a:t>15</a:t>
+            </a:fld>
+            <a:endParaRPr lang="en-US"/>
+          </a:p>
+        </p:txBody>
+      </p:sp>
+    </p:spTree>
+    <p:extLst>
+      <p:ext uri="{BB962C8B-B14F-4D97-AF65-F5344CB8AC3E}">
+        <p14:creationId xmlns:p14="http://schemas.microsoft.com/office/powerpoint/2010/main" val="245001928"/>
+      </p:ext>
+    </p:extLst>
+  </p:cSld>
+  <p:clrMapOvr>
+    <a:masterClrMapping/>
+  </p:clrMapOvr>
+</p:notes>
+</file>
+
+<file path=ppt/notesSlides/notesSlide16.xml><?xml version="1.0" encoding="utf-8"?>
+<p:notes xmlns:a="http://schemas.openxmlformats.org/drawingml/2006/main" xmlns:r="http://schemas.openxmlformats.org/officeDocument/2006/relationships" xmlns:p="http://schemas.openxmlformats.org/presentationml/2006/main">
+  <p:cSld>
+    <p:spTree>
+      <p:nvGrpSpPr>
+        <p:cNvPr id="1" name=""/>
+        <p:cNvGrpSpPr/>
+        <p:nvPr/>
+      </p:nvGrpSpPr>
+      <p:grpSpPr>
+        <a:xfrm>
+          <a:off x="0" y="0"/>
+          <a:ext cx="0" cy="0"/>
+          <a:chOff x="0" y="0"/>
+          <a:chExt cx="0" cy="0"/>
+        </a:xfrm>
+      </p:grpSpPr>
+      <p:sp>
+        <p:nvSpPr>
+          <p:cNvPr id="2" name="Slide Image Placeholder 1"/>
+          <p:cNvSpPr>
+            <a:spLocks noGrp="1" noRot="1" noChangeAspect="1"/>
+          </p:cNvSpPr>
+          <p:nvPr>
+            <p:ph type="sldImg"/>
+          </p:nvPr>
+        </p:nvSpPr>
+        <p:spPr/>
+        <p:txBody>
+          <a:bodyPr/>
+          <a:lstStyle/>
+          <a:p>
+            <a:endParaRPr lang="fr-FR"/>
+          </a:p>
+        </p:txBody>
+      </p:sp>
+      <p:sp>
+        <p:nvSpPr>
+          <p:cNvPr id="3" name="Notes Placeholder 2"/>
+          <p:cNvSpPr>
+            <a:spLocks noGrp="1"/>
+          </p:cNvSpPr>
+          <p:nvPr>
+            <p:ph type="body" idx="1"/>
+          </p:nvPr>
+        </p:nvSpPr>
+        <p:spPr/>
+        <p:txBody>
+          <a:bodyPr/>
+          <a:lstStyle/>
+          <a:p>
+            <a:endParaRPr lang="en-US" dirty="0"/>
+          </a:p>
+        </p:txBody>
+      </p:sp>
+      <p:sp>
+        <p:nvSpPr>
+          <p:cNvPr id="4" name="Slide Number Placeholder 3"/>
+          <p:cNvSpPr>
+            <a:spLocks noGrp="1"/>
+          </p:cNvSpPr>
+          <p:nvPr>
+            <p:ph type="sldNum" sz="quarter" idx="10"/>
+          </p:nvPr>
+        </p:nvSpPr>
+        <p:spPr/>
+        <p:txBody>
+          <a:bodyPr/>
+          <a:lstStyle/>
+          <a:p>
+            <a:fld id="{F7021451-1387-4CA6-816F-3879F97B5CBC}" type="slidenum">
+              <a:rPr lang="en-US"/>
+              <a:t>21</a:t>
             </a:fld>
             <a:endParaRPr lang="en-US"/>
           </a:p>
@@ -1675,7 +1861,7 @@
     </p:spTree>
     <p:extLst>
       <p:ext uri="{BB962C8B-B14F-4D97-AF65-F5344CB8AC3E}">
-        <p14:creationId xmlns:p14="http://schemas.microsoft.com/office/powerpoint/2010/main" val="1024086991"/>
+        <p14:creationId xmlns:p14="http://schemas.microsoft.com/office/powerpoint/2010/main" val="3073667016"/>
       </p:ext>
     </p:extLst>
   </p:cSld>
@@ -2402,7 +2588,7 @@
           </a:prstGeom>
           <a:extLst>
             <a:ext uri="{C572A759-6A51-4108-AA02-DFA0A04FC94B}">
-              <ma14:wrappingTextBoxFlag xmlns:ma14="http://schemas.microsoft.com/office/mac/drawingml/2011/main" xmlns="" val="0"/>
+              <ma14:wrappingTextBoxFlag xmlns="" xmlns:ma14="http://schemas.microsoft.com/office/mac/drawingml/2011/main" val="0"/>
             </a:ext>
           </a:extLst>
         </p:spPr>
@@ -2477,7 +2663,7 @@
           </a:prstGeom>
           <a:extLst>
             <a:ext uri="{C572A759-6A51-4108-AA02-DFA0A04FC94B}">
-              <ma14:wrappingTextBoxFlag xmlns:ma14="http://schemas.microsoft.com/office/mac/drawingml/2011/main" xmlns="" val="0"/>
+              <ma14:wrappingTextBoxFlag xmlns="" xmlns:ma14="http://schemas.microsoft.com/office/mac/drawingml/2011/main" val="0"/>
             </a:ext>
           </a:extLst>
         </p:spPr>
@@ -2902,6 +3088,732 @@
 
 <file path=ppt/slides/slide10.xml><?xml version="1.0" encoding="utf-8"?>
 <p:sld xmlns:a="http://schemas.openxmlformats.org/drawingml/2006/main" xmlns:r="http://schemas.openxmlformats.org/officeDocument/2006/relationships" xmlns:p="http://schemas.openxmlformats.org/presentationml/2006/main">
+  <p:cSld name="Slide 9">
+    <p:spTree>
+      <p:nvGrpSpPr>
+        <p:cNvPr id="1" name=""/>
+        <p:cNvGrpSpPr/>
+        <p:nvPr/>
+      </p:nvGrpSpPr>
+      <p:grpSpPr>
+        <a:xfrm>
+          <a:off x="0" y="0"/>
+          <a:ext cx="0" cy="0"/>
+          <a:chOff x="0" y="0"/>
+          <a:chExt cx="0" cy="0"/>
+        </a:xfrm>
+      </p:grpSpPr>
+      <p:sp>
+        <p:nvSpPr>
+          <p:cNvPr id="2" name="Titre"/>
+          <p:cNvSpPr txBox="1"/>
+          <p:nvPr/>
+        </p:nvSpPr>
+        <p:spPr>
+          <a:xfrm>
+            <a:off x="457200" y="228600"/>
+            <a:ext cx="8229600" cy="777240"/>
+          </a:xfrm>
+          <a:prstGeom prst="rect">
+            <a:avLst/>
+          </a:prstGeom>
+          <a:noFill/>
+          <a:ln/>
+        </p:spPr>
+        <p:txBody>
+          <a:bodyPr wrap="square" lIns="0" tIns="0" rIns="0" bIns="0" rtlCol="0" anchor="ctr"/>
+          <a:lstStyle/>
+          <a:p>
+            <a:pPr marL="0" indent="0">
+              <a:buNone/>
+            </a:pPr>
+            <a:r>
+              <a:rPr lang="en-US" sz="2400" b="1" dirty="0">
+                <a:solidFill>
+                  <a:schemeClr val="tx1"/>
+                </a:solidFill>
+                <a:latin typeface="Georgia" pitchFamily="34" charset="0"/>
+                <a:ea typeface="Georgia" pitchFamily="34" charset="-122"/>
+                <a:cs typeface="Georgia" pitchFamily="34" charset="-120"/>
+              </a:rPr>
+              <a:t>Une démarche de test identique pour chaque modèle et chaque cible</a:t>
+            </a:r>
+            <a:endParaRPr lang="en-US" sz="2400" dirty="0"/>
+          </a:p>
+        </p:txBody>
+      </p:sp>
+      <p:sp>
+        <p:nvSpPr>
+          <p:cNvPr id="3" name="Shape 1"/>
+          <p:cNvSpPr/>
+          <p:nvPr/>
+        </p:nvSpPr>
+        <p:spPr>
+          <a:xfrm>
+            <a:off x="365760" y="1188720"/>
+            <a:ext cx="1600200" cy="1920240"/>
+          </a:xfrm>
+          <a:prstGeom prst="roundRect">
+            <a:avLst>
+              <a:gd name="adj" fmla="val 5714"/>
+            </a:avLst>
+          </a:prstGeom>
+          <a:solidFill>
+            <a:srgbClr val="E3F0EE"/>
+          </a:solidFill>
+          <a:ln w="9525">
+            <a:solidFill>
+              <a:srgbClr val="CFDDD9"/>
+            </a:solidFill>
+            <a:prstDash val="solid"/>
+          </a:ln>
+        </p:spPr>
+        <p:txBody>
+          <a:bodyPr/>
+          <a:lstStyle/>
+          <a:p>
+            <a:endParaRPr lang="fr-FR"/>
+          </a:p>
+        </p:txBody>
+      </p:sp>
+      <p:sp>
+        <p:nvSpPr>
+          <p:cNvPr id="4" name="Text 2"/>
+          <p:cNvSpPr txBox="1"/>
+          <p:nvPr/>
+        </p:nvSpPr>
+        <p:spPr>
+          <a:xfrm>
+            <a:off x="438912" y="1280160"/>
+            <a:ext cx="1463040" cy="457200"/>
+          </a:xfrm>
+          <a:prstGeom prst="rect">
+            <a:avLst/>
+          </a:prstGeom>
+          <a:noFill/>
+          <a:ln/>
+        </p:spPr>
+        <p:txBody>
+          <a:bodyPr wrap="square" lIns="0" tIns="0" rIns="0" bIns="0" rtlCol="0" anchor="ctr"/>
+          <a:lstStyle/>
+          <a:p>
+            <a:pPr marL="0" indent="0" algn="ctr">
+              <a:buNone/>
+            </a:pPr>
+            <a:r>
+              <a:rPr lang="en-US" sz="1400" b="1" dirty="0">
+                <a:solidFill>
+                  <a:srgbClr val="1B7F79"/>
+                </a:solidFill>
+              </a:rPr>
+              <a:t>Séparation</a:t>
+            </a:r>
+            <a:endParaRPr lang="en-US" sz="1400" dirty="0"/>
+          </a:p>
+        </p:txBody>
+      </p:sp>
+      <p:sp>
+        <p:nvSpPr>
+          <p:cNvPr id="5" name="Text 3"/>
+          <p:cNvSpPr txBox="1"/>
+          <p:nvPr/>
+        </p:nvSpPr>
+        <p:spPr>
+          <a:xfrm>
+            <a:off x="457200" y="1783080"/>
+            <a:ext cx="1417320" cy="1234440"/>
+          </a:xfrm>
+          <a:prstGeom prst="rect">
+            <a:avLst/>
+          </a:prstGeom>
+          <a:noFill/>
+          <a:ln/>
+        </p:spPr>
+        <p:txBody>
+          <a:bodyPr wrap="square" lIns="0" tIns="0" rIns="0" bIns="0" rtlCol="0" anchor="t"/>
+          <a:lstStyle/>
+          <a:p>
+            <a:pPr marL="0" indent="0" algn="ctr">
+              <a:buNone/>
+            </a:pPr>
+            <a:r>
+              <a:rPr lang="en-US" sz="1200" dirty="0">
+                <a:solidFill>
+                  <a:srgbClr val="5B6B7A"/>
+                </a:solidFill>
+              </a:rPr>
+              <a:t>80 % </a:t>
+            </a:r>
+            <a:r>
+              <a:rPr lang="en-US" sz="1200" dirty="0" err="1">
+                <a:solidFill>
+                  <a:srgbClr val="5B6B7A"/>
+                </a:solidFill>
+              </a:rPr>
+              <a:t>entraînement</a:t>
+            </a:r>
+            <a:r>
+              <a:rPr lang="en-US" sz="1200" dirty="0">
+                <a:solidFill>
+                  <a:srgbClr val="5B6B7A"/>
+                </a:solidFill>
+              </a:rPr>
+              <a:t> </a:t>
+            </a:r>
+          </a:p>
+          <a:p>
+            <a:pPr marL="0" indent="0" algn="ctr">
+              <a:buNone/>
+            </a:pPr>
+            <a:r>
+              <a:rPr lang="en-US" sz="1200" dirty="0">
+                <a:solidFill>
+                  <a:srgbClr val="5B6B7A"/>
+                </a:solidFill>
+              </a:rPr>
+              <a:t>(1 155 sans extrêmes) / 20 % test (296, tous conservés), graine fixée</a:t>
+            </a:r>
+            <a:endParaRPr lang="en-US" sz="1200" dirty="0"/>
+          </a:p>
+        </p:txBody>
+      </p:sp>
+      <p:sp>
+        <p:nvSpPr>
+          <p:cNvPr id="6" name="Shape 4"/>
+          <p:cNvSpPr/>
+          <p:nvPr/>
+        </p:nvSpPr>
+        <p:spPr>
+          <a:xfrm>
+            <a:off x="2084832" y="1188720"/>
+            <a:ext cx="1600200" cy="1920240"/>
+          </a:xfrm>
+          <a:prstGeom prst="roundRect">
+            <a:avLst>
+              <a:gd name="adj" fmla="val 5714"/>
+            </a:avLst>
+          </a:prstGeom>
+          <a:solidFill>
+            <a:srgbClr val="F2F6F5"/>
+          </a:solidFill>
+          <a:ln w="9525">
+            <a:solidFill>
+              <a:srgbClr val="CFDDD9"/>
+            </a:solidFill>
+            <a:prstDash val="solid"/>
+          </a:ln>
+        </p:spPr>
+        <p:txBody>
+          <a:bodyPr/>
+          <a:lstStyle/>
+          <a:p>
+            <a:endParaRPr lang="fr-FR"/>
+          </a:p>
+        </p:txBody>
+      </p:sp>
+      <p:sp>
+        <p:nvSpPr>
+          <p:cNvPr id="7" name="Text 5"/>
+          <p:cNvSpPr txBox="1"/>
+          <p:nvPr/>
+        </p:nvSpPr>
+        <p:spPr>
+          <a:xfrm>
+            <a:off x="2157984" y="1280160"/>
+            <a:ext cx="1463040" cy="457200"/>
+          </a:xfrm>
+          <a:prstGeom prst="rect">
+            <a:avLst/>
+          </a:prstGeom>
+          <a:noFill/>
+          <a:ln/>
+        </p:spPr>
+        <p:txBody>
+          <a:bodyPr wrap="square" lIns="0" tIns="0" rIns="0" bIns="0" rtlCol="0" anchor="ctr"/>
+          <a:lstStyle/>
+          <a:p>
+            <a:pPr marL="0" indent="0" algn="ctr">
+              <a:buNone/>
+            </a:pPr>
+            <a:r>
+              <a:rPr lang="en-US" sz="1400" b="1" dirty="0">
+                <a:solidFill>
+                  <a:srgbClr val="1B7F79"/>
+                </a:solidFill>
+              </a:rPr>
+              <a:t>Validation croisée</a:t>
+            </a:r>
+            <a:endParaRPr lang="en-US" sz="1400" dirty="0"/>
+          </a:p>
+        </p:txBody>
+      </p:sp>
+      <p:sp>
+        <p:nvSpPr>
+          <p:cNvPr id="8" name="Text 6"/>
+          <p:cNvSpPr txBox="1"/>
+          <p:nvPr/>
+        </p:nvSpPr>
+        <p:spPr>
+          <a:xfrm>
+            <a:off x="2176272" y="1783080"/>
+            <a:ext cx="1417320" cy="1234440"/>
+          </a:xfrm>
+          <a:prstGeom prst="rect">
+            <a:avLst/>
+          </a:prstGeom>
+          <a:noFill/>
+          <a:ln/>
+        </p:spPr>
+        <p:txBody>
+          <a:bodyPr wrap="square" lIns="0" tIns="0" rIns="0" bIns="0" rtlCol="0" anchor="t"/>
+          <a:lstStyle/>
+          <a:p>
+            <a:pPr marL="0" indent="0" algn="ctr">
+              <a:buNone/>
+            </a:pPr>
+            <a:r>
+              <a:rPr lang="en-US" sz="1200" dirty="0">
+                <a:solidFill>
+                  <a:srgbClr val="5B6B7A"/>
+                </a:solidFill>
+              </a:rPr>
+              <a:t>5 découpages sur l'entraînement pour mesurer la stabilité</a:t>
+            </a:r>
+            <a:endParaRPr lang="en-US" sz="1200" dirty="0"/>
+          </a:p>
+        </p:txBody>
+      </p:sp>
+      <p:sp>
+        <p:nvSpPr>
+          <p:cNvPr id="9" name="Shape 7"/>
+          <p:cNvSpPr/>
+          <p:nvPr/>
+        </p:nvSpPr>
+        <p:spPr>
+          <a:xfrm>
+            <a:off x="3803904" y="1188720"/>
+            <a:ext cx="1600200" cy="1920240"/>
+          </a:xfrm>
+          <a:prstGeom prst="roundRect">
+            <a:avLst>
+              <a:gd name="adj" fmla="val 5714"/>
+            </a:avLst>
+          </a:prstGeom>
+          <a:solidFill>
+            <a:srgbClr val="E3F0EE"/>
+          </a:solidFill>
+          <a:ln w="9525">
+            <a:solidFill>
+              <a:srgbClr val="CFDDD9"/>
+            </a:solidFill>
+            <a:prstDash val="solid"/>
+          </a:ln>
+        </p:spPr>
+        <p:txBody>
+          <a:bodyPr/>
+          <a:lstStyle/>
+          <a:p>
+            <a:endParaRPr lang="fr-FR"/>
+          </a:p>
+        </p:txBody>
+      </p:sp>
+      <p:sp>
+        <p:nvSpPr>
+          <p:cNvPr id="10" name="Text 8"/>
+          <p:cNvSpPr txBox="1"/>
+          <p:nvPr/>
+        </p:nvSpPr>
+        <p:spPr>
+          <a:xfrm>
+            <a:off x="3877056" y="1280160"/>
+            <a:ext cx="1463040" cy="457200"/>
+          </a:xfrm>
+          <a:prstGeom prst="rect">
+            <a:avLst/>
+          </a:prstGeom>
+          <a:noFill/>
+          <a:ln/>
+        </p:spPr>
+        <p:txBody>
+          <a:bodyPr wrap="square" lIns="0" tIns="0" rIns="0" bIns="0" rtlCol="0" anchor="ctr"/>
+          <a:lstStyle/>
+          <a:p>
+            <a:pPr marL="0" indent="0" algn="ctr">
+              <a:buNone/>
+            </a:pPr>
+            <a:r>
+              <a:rPr lang="en-US" sz="1400" b="1" dirty="0">
+                <a:solidFill>
+                  <a:srgbClr val="1B7F79"/>
+                </a:solidFill>
+              </a:rPr>
+              <a:t>4 modèles</a:t>
+            </a:r>
+            <a:endParaRPr lang="en-US" sz="1400" dirty="0"/>
+          </a:p>
+        </p:txBody>
+      </p:sp>
+      <p:sp>
+        <p:nvSpPr>
+          <p:cNvPr id="11" name="Text 9"/>
+          <p:cNvSpPr txBox="1"/>
+          <p:nvPr/>
+        </p:nvSpPr>
+        <p:spPr>
+          <a:xfrm>
+            <a:off x="3895344" y="1783080"/>
+            <a:ext cx="1417320" cy="1234440"/>
+          </a:xfrm>
+          <a:prstGeom prst="rect">
+            <a:avLst/>
+          </a:prstGeom>
+          <a:noFill/>
+          <a:ln/>
+        </p:spPr>
+        <p:txBody>
+          <a:bodyPr wrap="square" lIns="0" tIns="0" rIns="0" bIns="0" rtlCol="0" anchor="t"/>
+          <a:lstStyle/>
+          <a:p>
+            <a:pPr marL="0" indent="0" algn="ctr">
+              <a:buNone/>
+            </a:pPr>
+            <a:r>
+              <a:rPr lang="en-US" sz="1200" dirty="0">
+                <a:solidFill>
+                  <a:srgbClr val="5B6B7A"/>
+                </a:solidFill>
+              </a:rPr>
+              <a:t>Référence, linéaire, SVR, Random Forest (base puis réglé)</a:t>
+            </a:r>
+            <a:endParaRPr lang="en-US" sz="1200" dirty="0"/>
+          </a:p>
+        </p:txBody>
+      </p:sp>
+      <p:sp>
+        <p:nvSpPr>
+          <p:cNvPr id="12" name="Shape 10"/>
+          <p:cNvSpPr/>
+          <p:nvPr/>
+        </p:nvSpPr>
+        <p:spPr>
+          <a:xfrm>
+            <a:off x="5522976" y="1188720"/>
+            <a:ext cx="1600200" cy="1920240"/>
+          </a:xfrm>
+          <a:prstGeom prst="roundRect">
+            <a:avLst>
+              <a:gd name="adj" fmla="val 5714"/>
+            </a:avLst>
+          </a:prstGeom>
+          <a:solidFill>
+            <a:srgbClr val="F2F6F5"/>
+          </a:solidFill>
+          <a:ln w="9525">
+            <a:solidFill>
+              <a:srgbClr val="CFDDD9"/>
+            </a:solidFill>
+            <a:prstDash val="solid"/>
+          </a:ln>
+        </p:spPr>
+        <p:txBody>
+          <a:bodyPr/>
+          <a:lstStyle/>
+          <a:p>
+            <a:endParaRPr lang="fr-FR"/>
+          </a:p>
+        </p:txBody>
+      </p:sp>
+      <p:sp>
+        <p:nvSpPr>
+          <p:cNvPr id="13" name="Text 11"/>
+          <p:cNvSpPr txBox="1"/>
+          <p:nvPr/>
+        </p:nvSpPr>
+        <p:spPr>
+          <a:xfrm>
+            <a:off x="5596128" y="1280160"/>
+            <a:ext cx="1463040" cy="457200"/>
+          </a:xfrm>
+          <a:prstGeom prst="rect">
+            <a:avLst/>
+          </a:prstGeom>
+          <a:noFill/>
+          <a:ln/>
+        </p:spPr>
+        <p:txBody>
+          <a:bodyPr wrap="square" lIns="0" tIns="0" rIns="0" bIns="0" rtlCol="0" anchor="ctr"/>
+          <a:lstStyle/>
+          <a:p>
+            <a:pPr marL="0" indent="0" algn="ctr">
+              <a:buNone/>
+            </a:pPr>
+            <a:r>
+              <a:rPr lang="en-US" sz="1400" b="1" dirty="0">
+                <a:solidFill>
+                  <a:srgbClr val="1B7F79"/>
+                </a:solidFill>
+              </a:rPr>
+              <a:t>3 métriques</a:t>
+            </a:r>
+            <a:endParaRPr lang="en-US" sz="1400" dirty="0"/>
+          </a:p>
+        </p:txBody>
+      </p:sp>
+      <p:sp>
+        <p:nvSpPr>
+          <p:cNvPr id="14" name="Text 12"/>
+          <p:cNvSpPr txBox="1"/>
+          <p:nvPr/>
+        </p:nvSpPr>
+        <p:spPr>
+          <a:xfrm>
+            <a:off x="5614416" y="1783080"/>
+            <a:ext cx="1417320" cy="1234440"/>
+          </a:xfrm>
+          <a:prstGeom prst="rect">
+            <a:avLst/>
+          </a:prstGeom>
+          <a:noFill/>
+          <a:ln/>
+        </p:spPr>
+        <p:txBody>
+          <a:bodyPr wrap="square" lIns="0" tIns="0" rIns="0" bIns="0" rtlCol="0" anchor="t"/>
+          <a:lstStyle/>
+          <a:p>
+            <a:pPr marL="0" indent="0" algn="ctr">
+              <a:buNone/>
+            </a:pPr>
+            <a:r>
+              <a:rPr lang="en-US" sz="1200" dirty="0">
+                <a:solidFill>
+                  <a:srgbClr val="5B6B7A"/>
+                </a:solidFill>
+              </a:rPr>
+              <a:t>R², erreur moyenne (MAE), RMSE</a:t>
+            </a:r>
+            <a:endParaRPr lang="en-US" sz="1200" dirty="0"/>
+          </a:p>
+        </p:txBody>
+      </p:sp>
+      <p:sp>
+        <p:nvSpPr>
+          <p:cNvPr id="15" name="Shape 13"/>
+          <p:cNvSpPr/>
+          <p:nvPr/>
+        </p:nvSpPr>
+        <p:spPr>
+          <a:xfrm>
+            <a:off x="7242048" y="1188720"/>
+            <a:ext cx="1600200" cy="1920240"/>
+          </a:xfrm>
+          <a:prstGeom prst="roundRect">
+            <a:avLst>
+              <a:gd name="adj" fmla="val 5714"/>
+            </a:avLst>
+          </a:prstGeom>
+          <a:solidFill>
+            <a:srgbClr val="E3F0EE"/>
+          </a:solidFill>
+          <a:ln w="9525">
+            <a:solidFill>
+              <a:srgbClr val="CFDDD9"/>
+            </a:solidFill>
+            <a:prstDash val="solid"/>
+          </a:ln>
+        </p:spPr>
+        <p:txBody>
+          <a:bodyPr/>
+          <a:lstStyle/>
+          <a:p>
+            <a:endParaRPr lang="fr-FR"/>
+          </a:p>
+        </p:txBody>
+      </p:sp>
+      <p:sp>
+        <p:nvSpPr>
+          <p:cNvPr id="16" name="Text 14"/>
+          <p:cNvSpPr txBox="1"/>
+          <p:nvPr/>
+        </p:nvSpPr>
+        <p:spPr>
+          <a:xfrm>
+            <a:off x="7315200" y="1280160"/>
+            <a:ext cx="1463040" cy="457200"/>
+          </a:xfrm>
+          <a:prstGeom prst="rect">
+            <a:avLst/>
+          </a:prstGeom>
+          <a:noFill/>
+          <a:ln/>
+        </p:spPr>
+        <p:txBody>
+          <a:bodyPr wrap="square" lIns="0" tIns="0" rIns="0" bIns="0" rtlCol="0" anchor="ctr"/>
+          <a:lstStyle/>
+          <a:p>
+            <a:pPr marL="0" indent="0" algn="ctr">
+              <a:buNone/>
+            </a:pPr>
+            <a:r>
+              <a:rPr lang="en-US" sz="1400" b="1" dirty="0">
+                <a:solidFill>
+                  <a:srgbClr val="1B7F79"/>
+                </a:solidFill>
+              </a:rPr>
+              <a:t>Optimisation</a:t>
+            </a:r>
+            <a:endParaRPr lang="en-US" sz="1400" dirty="0"/>
+          </a:p>
+        </p:txBody>
+      </p:sp>
+      <p:sp>
+        <p:nvSpPr>
+          <p:cNvPr id="17" name="Text 15"/>
+          <p:cNvSpPr txBox="1"/>
+          <p:nvPr/>
+        </p:nvSpPr>
+        <p:spPr>
+          <a:xfrm>
+            <a:off x="7333488" y="1783080"/>
+            <a:ext cx="1417320" cy="1234440"/>
+          </a:xfrm>
+          <a:prstGeom prst="rect">
+            <a:avLst/>
+          </a:prstGeom>
+          <a:noFill/>
+          <a:ln/>
+        </p:spPr>
+        <p:txBody>
+          <a:bodyPr wrap="square" lIns="0" tIns="0" rIns="0" bIns="0" rtlCol="0" anchor="t"/>
+          <a:lstStyle/>
+          <a:p>
+            <a:pPr marL="0" indent="0" algn="ctr">
+              <a:buNone/>
+            </a:pPr>
+            <a:r>
+              <a:rPr lang="en-US" sz="1200" dirty="0">
+                <a:solidFill>
+                  <a:srgbClr val="5B6B7A"/>
+                </a:solidFill>
+              </a:rPr>
+              <a:t>GridSearch : 108 combinaisons, critère MAE</a:t>
+            </a:r>
+            <a:endParaRPr lang="en-US" sz="1200" dirty="0"/>
+          </a:p>
+        </p:txBody>
+      </p:sp>
+      <p:sp>
+        <p:nvSpPr>
+          <p:cNvPr id="18" name="Text 16"/>
+          <p:cNvSpPr txBox="1"/>
+          <p:nvPr/>
+        </p:nvSpPr>
+        <p:spPr>
+          <a:xfrm>
+            <a:off x="457200" y="3383280"/>
+            <a:ext cx="8229600" cy="1188720"/>
+          </a:xfrm>
+          <a:prstGeom prst="rect">
+            <a:avLst/>
+          </a:prstGeom>
+          <a:noFill/>
+          <a:ln/>
+        </p:spPr>
+        <p:txBody>
+          <a:bodyPr wrap="square" lIns="0" tIns="0" rIns="0" bIns="0" rtlCol="0" anchor="t"/>
+          <a:lstStyle/>
+          <a:p>
+            <a:pPr marL="342900" indent="-342900">
+              <a:spcAft>
+                <a:spcPts val="800"/>
+              </a:spcAft>
+              <a:buSzPct val="100000"/>
+              <a:buChar char="•"/>
+            </a:pPr>
+            <a:r>
+              <a:rPr lang="en-US" sz="1400" dirty="0">
+                <a:solidFill>
+                  <a:schemeClr val="tx1"/>
+                </a:solidFill>
+              </a:rPr>
+              <a:t>Le test garde les 7 bâtiments très gros : l'évaluation reste réaliste. Le choix du modèle repose sur la validation croisée, pas sur le test</a:t>
+            </a:r>
+            <a:endParaRPr lang="en-US" sz="1400" dirty="0"/>
+          </a:p>
+          <a:p>
+            <a:pPr marL="342900" indent="-342900">
+              <a:spcAft>
+                <a:spcPts val="800"/>
+              </a:spcAft>
+              <a:buSzPct val="100000"/>
+              <a:buChar char="•"/>
+            </a:pPr>
+            <a:r>
+              <a:rPr lang="en-US" sz="1400" dirty="0">
+                <a:solidFill>
+                  <a:schemeClr val="tx1"/>
+                </a:solidFill>
+              </a:rPr>
+              <a:t>Le modèle de référence (valeur constante) fixe le plancher : un bon modèle doit faire nettement mieux</a:t>
+            </a:r>
+            <a:endParaRPr lang="en-US" sz="1400" dirty="0"/>
+          </a:p>
+        </p:txBody>
+      </p:sp>
+      <p:sp>
+        <p:nvSpPr>
+          <p:cNvPr id="25" name="Slide Number Placeholder 0"/>
+          <p:cNvSpPr>
+            <a:spLocks noGrp="1"/>
+          </p:cNvSpPr>
+          <p:nvPr>
+            <p:ph type="sldNum" sz="quarter" idx="4294967295"/>
+          </p:nvPr>
+        </p:nvSpPr>
+        <p:spPr>
+          <a:xfrm>
+            <a:off x="8321040" y="4828032"/>
+            <a:ext cx="457200" cy="228600"/>
+          </a:xfrm>
+          <a:prstGeom prst="rect">
+            <a:avLst/>
+          </a:prstGeom>
+          <a:extLst>
+            <a:ext uri="{C572A759-6A51-4108-AA02-DFA0A04FC94B}">
+              <ma14:wrappingTextBoxFlag xmlns="" xmlns:ma14="http://schemas.microsoft.com/office/mac/drawingml/2011/main" val="0"/>
+            </a:ext>
+          </a:extLst>
+        </p:spPr>
+        <p:txBody>
+          <a:bodyPr/>
+          <a:lstStyle>
+            <a:lvl1pPr>
+              <a:defRPr sz="900">
+                <a:solidFill>
+                  <a:srgbClr val="5B6B7A"/>
+                </a:solidFill>
+              </a:defRPr>
+            </a:lvl1pPr>
+          </a:lstStyle>
+          <a:p>
+            <a:pPr algn="l"/>
+            <a:fld id="{F7021451-1387-4CA6-816F-3879F97B5CBC}" type="slidenum">
+              <a:rPr lang="en-US" b="0"/>
+              <a:t>10</a:t>
+            </a:fld>
+            <a:endParaRPr lang="en-US"/>
+          </a:p>
+        </p:txBody>
+      </p:sp>
+    </p:spTree>
+  </p:cSld>
+  <p:clrMapOvr>
+    <a:masterClrMapping/>
+  </p:clrMapOvr>
+</p:sld>
+</file>
+
+<file path=ppt/slides/slide11.xml><?xml version="1.0" encoding="utf-8"?>
+<p:sld xmlns:a="http://schemas.openxmlformats.org/drawingml/2006/main" xmlns:r="http://schemas.openxmlformats.org/officeDocument/2006/relationships" xmlns:p="http://schemas.openxmlformats.org/presentationml/2006/main">
   <p:cSld name="Slide 10">
     <p:spTree>
       <p:nvGrpSpPr>
@@ -5331,7 +6243,7 @@
           </a:prstGeom>
           <a:extLst>
             <a:ext uri="{C572A759-6A51-4108-AA02-DFA0A04FC94B}">
-              <ma14:wrappingTextBoxFlag xmlns:ma14="http://schemas.microsoft.com/office/mac/drawingml/2011/main" xmlns="" val="0"/>
+              <ma14:wrappingTextBoxFlag xmlns="" xmlns:ma14="http://schemas.microsoft.com/office/mac/drawingml/2011/main" val="0"/>
             </a:ext>
           </a:extLst>
         </p:spPr>
@@ -5350,7 +6262,7 @@
             <a:pPr algn="l"/>
             <a:fld id="{F7021451-1387-4CA6-816F-3879F97B5CBC}" type="slidenum">
               <a:rPr lang="en-US" b="0"/>
-              <a:t>10</a:t>
+              <a:t>11</a:t>
             </a:fld>
             <a:endParaRPr lang="en-US"/>
           </a:p>
@@ -7589,7 +8501,7 @@
 </p:sld>
 </file>
 
-<file path=ppt/slides/slide11.xml><?xml version="1.0" encoding="utf-8"?>
+<file path=ppt/slides/slide12.xml><?xml version="1.0" encoding="utf-8"?>
 <p:sld xmlns:a="http://schemas.openxmlformats.org/drawingml/2006/main" xmlns:r="http://schemas.openxmlformats.org/officeDocument/2006/relationships" xmlns:p="http://schemas.openxmlformats.org/presentationml/2006/main">
   <p:cSld name="Slide 11">
     <p:spTree>
@@ -7863,7 +8775,7 @@
           </a:prstGeom>
           <a:extLst>
             <a:ext uri="{C572A759-6A51-4108-AA02-DFA0A04FC94B}">
-              <ma14:wrappingTextBoxFlag xmlns:ma14="http://schemas.microsoft.com/office/mac/drawingml/2011/main" xmlns="" val="0"/>
+              <ma14:wrappingTextBoxFlag xmlns="" xmlns:ma14="http://schemas.microsoft.com/office/mac/drawingml/2011/main" val="0"/>
             </a:ext>
           </a:extLst>
         </p:spPr>
@@ -7882,7 +8794,7 @@
             <a:pPr algn="l"/>
             <a:fld id="{F7021451-1387-4CA6-816F-3879F97B5CBC}" type="slidenum">
               <a:rPr lang="en-US" b="0"/>
-              <a:t>11</a:t>
+              <a:t>12</a:t>
             </a:fld>
             <a:endParaRPr lang="en-US"/>
           </a:p>
@@ -9962,7 +10874,7 @@
 </p:sld>
 </file>
 
-<file path=ppt/slides/slide12.xml><?xml version="1.0" encoding="utf-8"?>
+<file path=ppt/slides/slide13.xml><?xml version="1.0" encoding="utf-8"?>
 <p:sld xmlns:a="http://schemas.openxmlformats.org/drawingml/2006/main" xmlns:r="http://schemas.openxmlformats.org/officeDocument/2006/relationships" xmlns:p="http://schemas.openxmlformats.org/presentationml/2006/main">
   <p:cSld name="Slide 12">
     <p:spTree>
@@ -10348,7 +11260,7 @@
           </a:prstGeom>
           <a:extLst>
             <a:ext uri="{C572A759-6A51-4108-AA02-DFA0A04FC94B}">
-              <ma14:wrappingTextBoxFlag xmlns:ma14="http://schemas.microsoft.com/office/mac/drawingml/2011/main" xmlns="" val="0"/>
+              <ma14:wrappingTextBoxFlag xmlns="" xmlns:ma14="http://schemas.microsoft.com/office/mac/drawingml/2011/main" val="0"/>
             </a:ext>
           </a:extLst>
         </p:spPr>
@@ -10367,7 +11279,7 @@
             <a:pPr algn="l"/>
             <a:fld id="{F7021451-1387-4CA6-816F-3879F97B5CBC}" type="slidenum">
               <a:rPr lang="en-US" b="0"/>
-              <a:t>12</a:t>
+              <a:t>13</a:t>
             </a:fld>
             <a:endParaRPr lang="en-US"/>
           </a:p>
@@ -10381,7 +11293,7 @@
 </p:sld>
 </file>
 
-<file path=ppt/slides/slide13.xml><?xml version="1.0" encoding="utf-8"?>
+<file path=ppt/slides/slide14.xml><?xml version="1.0" encoding="utf-8"?>
 <p:sld xmlns:a="http://schemas.openxmlformats.org/drawingml/2006/main" xmlns:r="http://schemas.openxmlformats.org/officeDocument/2006/relationships" xmlns:p="http://schemas.openxmlformats.org/presentationml/2006/main">
   <p:cSld name="Slide 13">
     <p:spTree>
@@ -10637,744 +11549,7 @@
           </a:prstGeom>
           <a:extLst>
             <a:ext uri="{C572A759-6A51-4108-AA02-DFA0A04FC94B}">
-              <ma14:wrappingTextBoxFlag xmlns:ma14="http://schemas.microsoft.com/office/mac/drawingml/2011/main" xmlns="" val="0"/>
-            </a:ext>
-          </a:extLst>
-        </p:spPr>
-        <p:txBody>
-          <a:bodyPr/>
-          <a:lstStyle>
-            <a:lvl1pPr>
-              <a:defRPr sz="900">
-                <a:solidFill>
-                  <a:srgbClr val="5B6B7A"/>
-                </a:solidFill>
-              </a:defRPr>
-            </a:lvl1pPr>
-          </a:lstStyle>
-          <a:p>
-            <a:pPr algn="l"/>
-            <a:fld id="{F7021451-1387-4CA6-816F-3879F97B5CBC}" type="slidenum">
-              <a:rPr lang="en-US" b="0"/>
-              <a:t>13</a:t>
-            </a:fld>
-            <a:endParaRPr lang="en-US"/>
-          </a:p>
-        </p:txBody>
-      </p:sp>
-    </p:spTree>
-  </p:cSld>
-  <p:clrMapOvr>
-    <a:masterClrMapping/>
-  </p:clrMapOvr>
-</p:sld>
-</file>
-
-<file path=ppt/slides/slide14.xml><?xml version="1.0" encoding="utf-8"?>
-<p:sld xmlns:a="http://schemas.openxmlformats.org/drawingml/2006/main" xmlns:r="http://schemas.openxmlformats.org/officeDocument/2006/relationships" xmlns:p="http://schemas.openxmlformats.org/presentationml/2006/main">
-  <p:cSld>
-    <p:spTree>
-      <p:nvGrpSpPr>
-        <p:cNvPr id="1" name=""/>
-        <p:cNvGrpSpPr/>
-        <p:nvPr/>
-      </p:nvGrpSpPr>
-      <p:grpSpPr>
-        <a:xfrm>
-          <a:off x="0" y="0"/>
-          <a:ext cx="0" cy="0"/>
-          <a:chOff x="0" y="0"/>
-          <a:chExt cx="0" cy="0"/>
-        </a:xfrm>
-      </p:grpSpPr>
-      <p:sp>
-        <p:nvSpPr>
-          <p:cNvPr id="2" name="Titre"/>
-          <p:cNvSpPr txBox="1"/>
-          <p:nvPr/>
-        </p:nvSpPr>
-        <p:spPr>
-          <a:xfrm>
-            <a:off x="457200" y="228600"/>
-            <a:ext cx="8229600" cy="777240"/>
-          </a:xfrm>
-          <a:prstGeom prst="rect">
-            <a:avLst/>
-          </a:prstGeom>
-          <a:noFill/>
-          <a:ln/>
-        </p:spPr>
-        <p:txBody>
-          <a:bodyPr wrap="square" lIns="0" tIns="0" rIns="0" bIns="0" rtlCol="0" anchor="ctr"/>
-          <a:lstStyle/>
-          <a:p>
-            <a:pPr marL="0" indent="0">
-              <a:buNone/>
-            </a:pPr>
-            <a:r>
-              <a:rPr lang="en-US" sz="2400" b="1" dirty="0">
-                <a:solidFill>
-                  <a:schemeClr val="tx1"/>
-                </a:solidFill>
-                <a:latin typeface="Georgia" pitchFamily="34" charset="0"/>
-                <a:ea typeface="Georgia" pitchFamily="34" charset="-122"/>
-                <a:cs typeface="Georgia" pitchFamily="34" charset="-120"/>
-              </a:rPr>
-              <a:t>L'API reçoit des données brutes et renvoie énergie et CO2 en un seul appel</a:t>
-            </a:r>
-            <a:endParaRPr lang="en-US" sz="2400" dirty="0"/>
-          </a:p>
-        </p:txBody>
-      </p:sp>
-      <p:sp>
-        <p:nvSpPr>
-          <p:cNvPr id="3" name="Shape 1"/>
-          <p:cNvSpPr/>
-          <p:nvPr/>
-        </p:nvSpPr>
-        <p:spPr>
-          <a:xfrm>
-            <a:off x="1234440" y="1143000"/>
-            <a:ext cx="457200" cy="457200"/>
-          </a:xfrm>
-          <a:prstGeom prst="ellipse">
-            <a:avLst/>
-          </a:prstGeom>
-          <a:solidFill>
-            <a:srgbClr val="1B7F79"/>
-          </a:solidFill>
-          <a:ln w="12700">
-            <a:solidFill>
-              <a:srgbClr val="1B7F79"/>
-            </a:solidFill>
-            <a:prstDash val="solid"/>
-          </a:ln>
-        </p:spPr>
-        <p:txBody>
-          <a:bodyPr/>
-          <a:lstStyle/>
-          <a:p>
-            <a:endParaRPr lang="fr-FR"/>
-          </a:p>
-        </p:txBody>
-      </p:sp>
-      <p:sp>
-        <p:nvSpPr>
-          <p:cNvPr id="4" name="Text 2"/>
-          <p:cNvSpPr txBox="1"/>
-          <p:nvPr/>
-        </p:nvSpPr>
-        <p:spPr>
-          <a:xfrm>
-            <a:off x="1234440" y="1143000"/>
-            <a:ext cx="457200" cy="457200"/>
-          </a:xfrm>
-          <a:prstGeom prst="rect">
-            <a:avLst/>
-          </a:prstGeom>
-          <a:noFill/>
-          <a:ln/>
-        </p:spPr>
-        <p:txBody>
-          <a:bodyPr wrap="square" lIns="0" tIns="0" rIns="0" bIns="0" rtlCol="0" anchor="ctr"/>
-          <a:lstStyle/>
-          <a:p>
-            <a:pPr marL="0" indent="0" algn="ctr">
-              <a:buNone/>
-            </a:pPr>
-            <a:r>
-              <a:rPr lang="en-US" sz="1600" b="1" dirty="0">
-                <a:solidFill>
-                  <a:srgbClr val="FFFFFF"/>
-                </a:solidFill>
-              </a:rPr>
-              <a:t>1</a:t>
-            </a:r>
-            <a:endParaRPr lang="en-US" sz="1600" dirty="0"/>
-          </a:p>
-        </p:txBody>
-      </p:sp>
-      <p:sp>
-        <p:nvSpPr>
-          <p:cNvPr id="5" name="Text 3"/>
-          <p:cNvSpPr txBox="1"/>
-          <p:nvPr/>
-        </p:nvSpPr>
-        <p:spPr>
-          <a:xfrm>
-            <a:off x="457200" y="1737360"/>
-            <a:ext cx="2011680" cy="320040"/>
-          </a:xfrm>
-          <a:prstGeom prst="rect">
-            <a:avLst/>
-          </a:prstGeom>
-          <a:noFill/>
-          <a:ln/>
-        </p:spPr>
-        <p:txBody>
-          <a:bodyPr wrap="square" lIns="0" tIns="0" rIns="0" bIns="0" rtlCol="0" anchor="ctr"/>
-          <a:lstStyle/>
-          <a:p>
-            <a:pPr marL="0" indent="0" algn="ctr">
-              <a:buNone/>
-            </a:pPr>
-            <a:r>
-              <a:rPr lang="en-US" sz="1400" b="1" dirty="0">
-                <a:solidFill>
-                  <a:schemeClr val="tx1"/>
-                </a:solidFill>
-              </a:rPr>
-              <a:t>Requête JSON</a:t>
-            </a:r>
-            <a:endParaRPr lang="en-US" sz="1400" dirty="0"/>
-          </a:p>
-        </p:txBody>
-      </p:sp>
-      <p:sp>
-        <p:nvSpPr>
-          <p:cNvPr id="6" name="Text 4"/>
-          <p:cNvSpPr txBox="1"/>
-          <p:nvPr/>
-        </p:nvSpPr>
-        <p:spPr>
-          <a:xfrm>
-            <a:off x="457200" y="2103120"/>
-            <a:ext cx="2011680" cy="1371600"/>
-          </a:xfrm>
-          <a:prstGeom prst="rect">
-            <a:avLst/>
-          </a:prstGeom>
-          <a:noFill/>
-          <a:ln/>
-        </p:spPr>
-        <p:txBody>
-          <a:bodyPr wrap="square" lIns="0" tIns="0" rIns="0" bIns="0" rtlCol="0" anchor="t"/>
-          <a:lstStyle/>
-          <a:p>
-            <a:pPr marL="0" indent="0" algn="ctr">
-              <a:buNone/>
-            </a:pPr>
-            <a:r>
-              <a:rPr lang="en-US" sz="1200" dirty="0">
-                <a:solidFill>
-                  <a:srgbClr val="5B6B7A"/>
-                </a:solidFill>
-              </a:rPr>
-              <a:t>Année, surface, quartier, usage… sans connaître notre pré-traitement</a:t>
-            </a:r>
-            <a:endParaRPr lang="en-US" sz="1200" dirty="0"/>
-          </a:p>
-        </p:txBody>
-      </p:sp>
-      <p:sp>
-        <p:nvSpPr>
-          <p:cNvPr id="7" name="Shape 5"/>
-          <p:cNvSpPr/>
-          <p:nvPr/>
-        </p:nvSpPr>
-        <p:spPr>
-          <a:xfrm>
-            <a:off x="3319272" y="1143000"/>
-            <a:ext cx="457200" cy="457200"/>
-          </a:xfrm>
-          <a:prstGeom prst="ellipse">
-            <a:avLst/>
-          </a:prstGeom>
-          <a:solidFill>
-            <a:srgbClr val="6C8EAD"/>
-          </a:solidFill>
-          <a:ln w="12700">
-            <a:solidFill>
-              <a:srgbClr val="6C8EAD"/>
-            </a:solidFill>
-            <a:prstDash val="solid"/>
-          </a:ln>
-        </p:spPr>
-        <p:txBody>
-          <a:bodyPr/>
-          <a:lstStyle/>
-          <a:p>
-            <a:endParaRPr lang="fr-FR"/>
-          </a:p>
-        </p:txBody>
-      </p:sp>
-      <p:sp>
-        <p:nvSpPr>
-          <p:cNvPr id="8" name="Text 6"/>
-          <p:cNvSpPr txBox="1"/>
-          <p:nvPr/>
-        </p:nvSpPr>
-        <p:spPr>
-          <a:xfrm>
-            <a:off x="3319272" y="1143000"/>
-            <a:ext cx="457200" cy="457200"/>
-          </a:xfrm>
-          <a:prstGeom prst="rect">
-            <a:avLst/>
-          </a:prstGeom>
-          <a:noFill/>
-          <a:ln/>
-        </p:spPr>
-        <p:txBody>
-          <a:bodyPr wrap="square" lIns="0" tIns="0" rIns="0" bIns="0" rtlCol="0" anchor="ctr"/>
-          <a:lstStyle/>
-          <a:p>
-            <a:pPr marL="0" indent="0" algn="ctr">
-              <a:buNone/>
-            </a:pPr>
-            <a:r>
-              <a:rPr lang="en-US" sz="1600" b="1" dirty="0">
-                <a:solidFill>
-                  <a:srgbClr val="FFFFFF"/>
-                </a:solidFill>
-              </a:rPr>
-              <a:t>2</a:t>
-            </a:r>
-            <a:endParaRPr lang="en-US" sz="1600" dirty="0"/>
-          </a:p>
-        </p:txBody>
-      </p:sp>
-      <p:sp>
-        <p:nvSpPr>
-          <p:cNvPr id="9" name="Text 7"/>
-          <p:cNvSpPr txBox="1"/>
-          <p:nvPr/>
-        </p:nvSpPr>
-        <p:spPr>
-          <a:xfrm>
-            <a:off x="2542032" y="1737360"/>
-            <a:ext cx="2011680" cy="320040"/>
-          </a:xfrm>
-          <a:prstGeom prst="rect">
-            <a:avLst/>
-          </a:prstGeom>
-          <a:noFill/>
-          <a:ln/>
-        </p:spPr>
-        <p:txBody>
-          <a:bodyPr wrap="square" lIns="0" tIns="0" rIns="0" bIns="0" rtlCol="0" anchor="ctr"/>
-          <a:lstStyle/>
-          <a:p>
-            <a:pPr marL="0" indent="0" algn="ctr">
-              <a:buNone/>
-            </a:pPr>
-            <a:r>
-              <a:rPr lang="en-US" sz="1400" b="1" dirty="0">
-                <a:solidFill>
-                  <a:schemeClr val="tx1"/>
-                </a:solidFill>
-              </a:rPr>
-              <a:t>Validation</a:t>
-            </a:r>
-            <a:endParaRPr lang="en-US" sz="1400" dirty="0"/>
-          </a:p>
-        </p:txBody>
-      </p:sp>
-      <p:sp>
-        <p:nvSpPr>
-          <p:cNvPr id="10" name="Text 8"/>
-          <p:cNvSpPr txBox="1"/>
-          <p:nvPr/>
-        </p:nvSpPr>
-        <p:spPr>
-          <a:xfrm>
-            <a:off x="2542032" y="2103120"/>
-            <a:ext cx="2011680" cy="1371600"/>
-          </a:xfrm>
-          <a:prstGeom prst="rect">
-            <a:avLst/>
-          </a:prstGeom>
-          <a:noFill/>
-          <a:ln/>
-        </p:spPr>
-        <p:txBody>
-          <a:bodyPr wrap="square" lIns="0" tIns="0" rIns="0" bIns="0" rtlCol="0" anchor="t"/>
-          <a:lstStyle/>
-          <a:p>
-            <a:pPr marL="0" indent="0" algn="ctr">
-              <a:buNone/>
-            </a:pPr>
-            <a:r>
-              <a:rPr lang="en-US" sz="1200" dirty="0">
-                <a:solidFill>
-                  <a:srgbClr val="5B6B7A"/>
-                </a:solidFill>
-              </a:rPr>
-              <a:t>Pydantic rejette les valeurs incohérentes avant qu'elles n'atteignent le modèle</a:t>
-            </a:r>
-            <a:endParaRPr lang="en-US" sz="1200" dirty="0"/>
-          </a:p>
-        </p:txBody>
-      </p:sp>
-      <p:sp>
-        <p:nvSpPr>
-          <p:cNvPr id="11" name="Shape 9"/>
-          <p:cNvSpPr/>
-          <p:nvPr/>
-        </p:nvSpPr>
-        <p:spPr>
-          <a:xfrm>
-            <a:off x="5404104" y="1143000"/>
-            <a:ext cx="457200" cy="457200"/>
-          </a:xfrm>
-          <a:prstGeom prst="ellipse">
-            <a:avLst/>
-          </a:prstGeom>
-          <a:solidFill>
-            <a:srgbClr val="F2A541"/>
-          </a:solidFill>
-          <a:ln w="12700">
-            <a:solidFill>
-              <a:srgbClr val="F2A541"/>
-            </a:solidFill>
-            <a:prstDash val="solid"/>
-          </a:ln>
-        </p:spPr>
-        <p:txBody>
-          <a:bodyPr/>
-          <a:lstStyle/>
-          <a:p>
-            <a:endParaRPr lang="fr-FR"/>
-          </a:p>
-        </p:txBody>
-      </p:sp>
-      <p:sp>
-        <p:nvSpPr>
-          <p:cNvPr id="12" name="Text 10"/>
-          <p:cNvSpPr txBox="1"/>
-          <p:nvPr/>
-        </p:nvSpPr>
-        <p:spPr>
-          <a:xfrm>
-            <a:off x="5404104" y="1143000"/>
-            <a:ext cx="457200" cy="457200"/>
-          </a:xfrm>
-          <a:prstGeom prst="rect">
-            <a:avLst/>
-          </a:prstGeom>
-          <a:noFill/>
-          <a:ln/>
-        </p:spPr>
-        <p:txBody>
-          <a:bodyPr wrap="square" lIns="0" tIns="0" rIns="0" bIns="0" rtlCol="0" anchor="ctr"/>
-          <a:lstStyle/>
-          <a:p>
-            <a:pPr marL="0" indent="0" algn="ctr">
-              <a:buNone/>
-            </a:pPr>
-            <a:r>
-              <a:rPr lang="en-US" sz="1600" b="1" dirty="0">
-                <a:solidFill>
-                  <a:srgbClr val="FFFFFF"/>
-                </a:solidFill>
-              </a:rPr>
-              <a:t>3</a:t>
-            </a:r>
-            <a:endParaRPr lang="en-US" sz="1600" dirty="0"/>
-          </a:p>
-        </p:txBody>
-      </p:sp>
-      <p:sp>
-        <p:nvSpPr>
-          <p:cNvPr id="13" name="Text 11"/>
-          <p:cNvSpPr txBox="1"/>
-          <p:nvPr/>
-        </p:nvSpPr>
-        <p:spPr>
-          <a:xfrm>
-            <a:off x="4626864" y="1737360"/>
-            <a:ext cx="2011680" cy="320040"/>
-          </a:xfrm>
-          <a:prstGeom prst="rect">
-            <a:avLst/>
-          </a:prstGeom>
-          <a:noFill/>
-          <a:ln/>
-        </p:spPr>
-        <p:txBody>
-          <a:bodyPr wrap="square" lIns="0" tIns="0" rIns="0" bIns="0" rtlCol="0" anchor="ctr"/>
-          <a:lstStyle/>
-          <a:p>
-            <a:pPr marL="0" indent="0" algn="ctr">
-              <a:buNone/>
-            </a:pPr>
-            <a:r>
-              <a:rPr lang="en-US" sz="1400" b="1" dirty="0">
-                <a:solidFill>
-                  <a:schemeClr val="tx1"/>
-                </a:solidFill>
-              </a:rPr>
-              <a:t>Variables</a:t>
-            </a:r>
-            <a:endParaRPr lang="en-US" sz="1400" dirty="0"/>
-          </a:p>
-        </p:txBody>
-      </p:sp>
-      <p:sp>
-        <p:nvSpPr>
-          <p:cNvPr id="14" name="Text 12"/>
-          <p:cNvSpPr txBox="1"/>
-          <p:nvPr/>
-        </p:nvSpPr>
-        <p:spPr>
-          <a:xfrm>
-            <a:off x="4626864" y="2103120"/>
-            <a:ext cx="2011680" cy="1371600"/>
-          </a:xfrm>
-          <a:prstGeom prst="rect">
-            <a:avLst/>
-          </a:prstGeom>
-          <a:noFill/>
-          <a:ln/>
-        </p:spPr>
-        <p:txBody>
-          <a:bodyPr wrap="square" lIns="0" tIns="0" rIns="0" bIns="0" rtlCol="0" anchor="t"/>
-          <a:lstStyle/>
-          <a:p>
-            <a:pPr marL="0" indent="0" algn="ctr">
-              <a:buNone/>
-            </a:pPr>
-            <a:r>
-              <a:rPr lang="en-US" sz="1200" dirty="0">
-                <a:solidFill>
-                  <a:srgbClr val="5B6B7A"/>
-                </a:solidFill>
-              </a:rPr>
-              <a:t>Mêmes formules que le notebook : âge, surface par étage, distance au centre-ville</a:t>
-            </a:r>
-            <a:endParaRPr lang="en-US" sz="1200" dirty="0"/>
-          </a:p>
-        </p:txBody>
-      </p:sp>
-      <p:sp>
-        <p:nvSpPr>
-          <p:cNvPr id="15" name="Shape 13"/>
-          <p:cNvSpPr/>
-          <p:nvPr/>
-        </p:nvSpPr>
-        <p:spPr>
-          <a:xfrm>
-            <a:off x="7488936" y="1143000"/>
-            <a:ext cx="457200" cy="457200"/>
-          </a:xfrm>
-          <a:prstGeom prst="ellipse">
-            <a:avLst/>
-          </a:prstGeom>
-          <a:solidFill>
-            <a:srgbClr val="D1495B"/>
-          </a:solidFill>
-          <a:ln w="12700">
-            <a:solidFill>
-              <a:srgbClr val="D1495B"/>
-            </a:solidFill>
-            <a:prstDash val="solid"/>
-          </a:ln>
-        </p:spPr>
-        <p:txBody>
-          <a:bodyPr/>
-          <a:lstStyle/>
-          <a:p>
-            <a:endParaRPr lang="fr-FR"/>
-          </a:p>
-        </p:txBody>
-      </p:sp>
-      <p:sp>
-        <p:nvSpPr>
-          <p:cNvPr id="16" name="Text 14"/>
-          <p:cNvSpPr txBox="1"/>
-          <p:nvPr/>
-        </p:nvSpPr>
-        <p:spPr>
-          <a:xfrm>
-            <a:off x="7488936" y="1143000"/>
-            <a:ext cx="457200" cy="457200"/>
-          </a:xfrm>
-          <a:prstGeom prst="rect">
-            <a:avLst/>
-          </a:prstGeom>
-          <a:noFill/>
-          <a:ln/>
-        </p:spPr>
-        <p:txBody>
-          <a:bodyPr wrap="square" lIns="0" tIns="0" rIns="0" bIns="0" rtlCol="0" anchor="ctr"/>
-          <a:lstStyle/>
-          <a:p>
-            <a:pPr marL="0" indent="0" algn="ctr">
-              <a:buNone/>
-            </a:pPr>
-            <a:r>
-              <a:rPr lang="en-US" sz="1600" b="1" dirty="0">
-                <a:solidFill>
-                  <a:srgbClr val="FFFFFF"/>
-                </a:solidFill>
-              </a:rPr>
-              <a:t>4</a:t>
-            </a:r>
-            <a:endParaRPr lang="en-US" sz="1600" dirty="0"/>
-          </a:p>
-        </p:txBody>
-      </p:sp>
-      <p:sp>
-        <p:nvSpPr>
-          <p:cNvPr id="17" name="Text 15"/>
-          <p:cNvSpPr txBox="1"/>
-          <p:nvPr/>
-        </p:nvSpPr>
-        <p:spPr>
-          <a:xfrm>
-            <a:off x="6711696" y="1737360"/>
-            <a:ext cx="2011680" cy="320040"/>
-          </a:xfrm>
-          <a:prstGeom prst="rect">
-            <a:avLst/>
-          </a:prstGeom>
-          <a:noFill/>
-          <a:ln/>
-        </p:spPr>
-        <p:txBody>
-          <a:bodyPr wrap="square" lIns="0" tIns="0" rIns="0" bIns="0" rtlCol="0" anchor="ctr"/>
-          <a:lstStyle/>
-          <a:p>
-            <a:pPr marL="0" indent="0" algn="ctr">
-              <a:buNone/>
-            </a:pPr>
-            <a:r>
-              <a:rPr lang="en-US" sz="1400" b="1" dirty="0">
-                <a:solidFill>
-                  <a:schemeClr val="tx1"/>
-                </a:solidFill>
-              </a:rPr>
-              <a:t>Deux modèles</a:t>
-            </a:r>
-            <a:endParaRPr lang="en-US" sz="1400" dirty="0"/>
-          </a:p>
-        </p:txBody>
-      </p:sp>
-      <p:sp>
-        <p:nvSpPr>
-          <p:cNvPr id="18" name="Text 16"/>
-          <p:cNvSpPr txBox="1"/>
-          <p:nvPr/>
-        </p:nvSpPr>
-        <p:spPr>
-          <a:xfrm>
-            <a:off x="6711696" y="2103120"/>
-            <a:ext cx="2011680" cy="1371600"/>
-          </a:xfrm>
-          <a:prstGeom prst="rect">
-            <a:avLst/>
-          </a:prstGeom>
-          <a:noFill/>
-          <a:ln/>
-        </p:spPr>
-        <p:txBody>
-          <a:bodyPr wrap="square" lIns="0" tIns="0" rIns="0" bIns="0" rtlCol="0" anchor="t"/>
-          <a:lstStyle/>
-          <a:p>
-            <a:pPr marL="0" indent="0" algn="ctr">
-              <a:buNone/>
-            </a:pPr>
-            <a:r>
-              <a:rPr lang="en-US" sz="1200" dirty="0">
-                <a:solidFill>
-                  <a:srgbClr val="5B6B7A"/>
-                </a:solidFill>
-              </a:rPr>
-              <a:t>Random Forest énergie et CO2 : réponse JSON en une seule requête</a:t>
-            </a:r>
-            <a:endParaRPr lang="en-US" sz="1200" dirty="0"/>
-          </a:p>
-        </p:txBody>
-      </p:sp>
-      <p:sp>
-        <p:nvSpPr>
-          <p:cNvPr id="19" name="Shape 17"/>
-          <p:cNvSpPr/>
-          <p:nvPr/>
-        </p:nvSpPr>
-        <p:spPr>
-          <a:xfrm>
-            <a:off x="457200" y="3657600"/>
-            <a:ext cx="8229600" cy="822960"/>
-          </a:xfrm>
-          <a:prstGeom prst="rect">
-            <a:avLst/>
-          </a:prstGeom>
-          <a:solidFill>
-            <a:srgbClr val="F2F6F5"/>
-          </a:solidFill>
-          <a:ln w="9525">
-            <a:solidFill>
-              <a:srgbClr val="DDE6E3"/>
-            </a:solidFill>
-            <a:prstDash val="solid"/>
-          </a:ln>
-        </p:spPr>
-        <p:txBody>
-          <a:bodyPr/>
-          <a:lstStyle/>
-          <a:p>
-            <a:endParaRPr lang="fr-FR"/>
-          </a:p>
-        </p:txBody>
-      </p:sp>
-      <p:sp>
-        <p:nvSpPr>
-          <p:cNvPr id="20" name="Text 18"/>
-          <p:cNvSpPr txBox="1"/>
-          <p:nvPr/>
-        </p:nvSpPr>
-        <p:spPr>
-          <a:xfrm>
-            <a:off x="640080" y="3703320"/>
-            <a:ext cx="7863840" cy="731520"/>
-          </a:xfrm>
-          <a:prstGeom prst="rect">
-            <a:avLst/>
-          </a:prstGeom>
-          <a:noFill/>
-          <a:ln/>
-        </p:spPr>
-        <p:txBody>
-          <a:bodyPr wrap="square" lIns="0" tIns="0" rIns="0" bIns="0" rtlCol="0" anchor="ctr"/>
-          <a:lstStyle/>
-          <a:p>
-            <a:pPr marL="0" indent="0">
-              <a:buNone/>
-            </a:pPr>
-            <a:r>
-              <a:rPr lang="en-US" sz="1300" dirty="0">
-                <a:solidFill>
-                  <a:srgbClr val="12263A"/>
-                </a:solidFill>
-              </a:rPr>
-              <a:t>Un seul endpoint POST /predict. Les modèles et l'ordre exact des variables sont sauvegardés ensemble dans le Model Store de BentoML (pas de Runner, concept archivé).</a:t>
-            </a:r>
-            <a:endParaRPr lang="en-US" sz="1300" dirty="0"/>
-          </a:p>
-        </p:txBody>
-      </p:sp>
-      <p:sp>
-        <p:nvSpPr>
-          <p:cNvPr id="25" name="Slide Number Placeholder 0"/>
-          <p:cNvSpPr>
-            <a:spLocks noGrp="1"/>
-          </p:cNvSpPr>
-          <p:nvPr>
-            <p:ph type="sldNum" sz="quarter" idx="4294967295"/>
-          </p:nvPr>
-        </p:nvSpPr>
-        <p:spPr>
-          <a:xfrm>
-            <a:off x="8321040" y="4828032"/>
-            <a:ext cx="457200" cy="228600"/>
-          </a:xfrm>
-          <a:prstGeom prst="rect">
-            <a:avLst/>
-          </a:prstGeom>
-          <a:extLst>
-            <a:ext uri="{C572A759-6A51-4108-AA02-DFA0A04FC94B}">
-              <ma14:wrappingTextBoxFlag xmlns:ma14="http://schemas.microsoft.com/office/mac/drawingml/2011/main" xmlns="" val="0"/>
+              <ma14:wrappingTextBoxFlag xmlns="" xmlns:ma14="http://schemas.microsoft.com/office/mac/drawingml/2011/main" val="0"/>
             </a:ext>
           </a:extLst>
         </p:spPr>
@@ -11426,14 +11601,14 @@
       </p:grpSpPr>
       <p:sp>
         <p:nvSpPr>
-          <p:cNvPr id="2" name="Titre"/>
+          <p:cNvPr id="2" name="Text 0"/>
           <p:cNvSpPr txBox="1"/>
           <p:nvPr/>
         </p:nvSpPr>
         <p:spPr>
           <a:xfrm>
-            <a:off x="457200" y="228600"/>
-            <a:ext cx="8229600" cy="777240"/>
+            <a:off x="640080" y="1005840"/>
+            <a:ext cx="7863840" cy="1645920"/>
           </a:xfrm>
           <a:prstGeom prst="rect">
             <a:avLst/>
@@ -11442,101 +11617,70 @@
           <a:ln/>
         </p:spPr>
         <p:txBody>
-          <a:bodyPr wrap="square" lIns="0" tIns="0" rIns="0" bIns="0" rtlCol="0" anchor="ctr"/>
+          <a:bodyPr wrap="square" lIns="0" tIns="0" rIns="0" bIns="0" rtlCol="0" anchor="t"/>
           <a:lstStyle/>
           <a:p>
             <a:pPr marL="0" indent="0">
               <a:buNone/>
             </a:pPr>
             <a:r>
-              <a:rPr lang="en-US" sz="2400" b="1" dirty="0">
-                <a:solidFill>
-                  <a:schemeClr val="tx1"/>
+              <a:rPr lang="en-US" sz="3400" b="1" dirty="0" err="1">
+                <a:solidFill>
+                  <a:srgbClr val="FFFFFF"/>
                 </a:solidFill>
                 <a:latin typeface="Georgia" pitchFamily="34" charset="0"/>
                 <a:ea typeface="Georgia" pitchFamily="34" charset="-122"/>
                 <a:cs typeface="Georgia" pitchFamily="34" charset="-120"/>
               </a:rPr>
-              <a:t>La validation Pydantic empêche d'envoyer des informations incohérentes</a:t>
-            </a:r>
-            <a:endParaRPr lang="en-US" sz="2400" dirty="0"/>
-          </a:p>
-        </p:txBody>
-      </p:sp>
-      <p:sp>
-        <p:nvSpPr>
-          <p:cNvPr id="3" name="f1 fond"/>
-          <p:cNvSpPr/>
-          <p:nvPr/>
-        </p:nvSpPr>
-        <p:spPr>
-          <a:xfrm>
-            <a:off x="457200" y="1097280"/>
-            <a:ext cx="2651760" cy="1188720"/>
-          </a:xfrm>
-          <a:prstGeom prst="rect">
-            <a:avLst/>
-          </a:prstGeom>
-          <a:solidFill>
-            <a:srgbClr val="F2F6F5"/>
-          </a:solidFill>
-          <a:ln w="9525">
-            <a:solidFill>
-              <a:srgbClr val="DDE6E3"/>
-            </a:solidFill>
-            <a:prstDash val="solid"/>
-          </a:ln>
-        </p:spPr>
-        <p:txBody>
-          <a:bodyPr/>
-          <a:lstStyle/>
-          <a:p>
-            <a:endParaRPr lang="fr-FR"/>
-          </a:p>
-        </p:txBody>
-      </p:sp>
-      <p:sp>
-        <p:nvSpPr>
-          <p:cNvPr id="4" name="f1 puce"/>
-          <p:cNvSpPr/>
-          <p:nvPr/>
-        </p:nvSpPr>
-        <p:spPr>
-          <a:xfrm>
-            <a:off x="594360" y="1234440"/>
-            <a:ext cx="128016" cy="128016"/>
-          </a:xfrm>
-          <a:prstGeom prst="ellipse">
-            <a:avLst/>
-          </a:prstGeom>
-          <a:solidFill>
-            <a:srgbClr val="1B7F79"/>
-          </a:solidFill>
-          <a:ln w="12700">
-            <a:solidFill>
-              <a:srgbClr val="1B7F79"/>
-            </a:solidFill>
-            <a:prstDash val="solid"/>
-          </a:ln>
-        </p:spPr>
-        <p:txBody>
-          <a:bodyPr/>
-          <a:lstStyle/>
-          <a:p>
-            <a:endParaRPr lang="fr-FR"/>
-          </a:p>
-        </p:txBody>
-      </p:sp>
-      <p:sp>
-        <p:nvSpPr>
-          <p:cNvPr id="5" name="Text 3"/>
+              <a:t>Partie</a:t>
+            </a:r>
+            <a:r>
+              <a:rPr lang="en-US" sz="3400" b="1" dirty="0">
+                <a:solidFill>
+                  <a:srgbClr val="FFFFFF"/>
+                </a:solidFill>
+                <a:latin typeface="Georgia" pitchFamily="34" charset="0"/>
+                <a:ea typeface="Georgia" pitchFamily="34" charset="-122"/>
+                <a:cs typeface="Georgia" pitchFamily="34" charset="-120"/>
+              </a:rPr>
+              <a:t> 2 : </a:t>
+            </a:r>
+            <a:r>
+              <a:rPr lang="fr-FR" sz="3400" b="1" dirty="0">
+                <a:solidFill>
+                  <a:srgbClr val="FFFFFF"/>
+                </a:solidFill>
+                <a:latin typeface="Georgia" pitchFamily="34" charset="0"/>
+                <a:ea typeface="Georgia" pitchFamily="34" charset="-122"/>
+                <a:cs typeface="Georgia" pitchFamily="34" charset="-120"/>
+              </a:rPr>
+              <a:t>Exposez le modèle prédictif via une API</a:t>
+            </a:r>
+            <a:r>
+              <a:rPr lang="en-US" sz="3400" b="1" dirty="0">
+                <a:solidFill>
+                  <a:srgbClr val="FFFFFF"/>
+                </a:solidFill>
+                <a:latin typeface="Georgia" pitchFamily="34" charset="0"/>
+                <a:ea typeface="Georgia" pitchFamily="34" charset="-122"/>
+                <a:cs typeface="Georgia" pitchFamily="34" charset="-120"/>
+              </a:rPr>
+              <a:t> </a:t>
+            </a:r>
+            <a:endParaRPr lang="en-US" sz="3400" dirty="0"/>
+          </a:p>
+        </p:txBody>
+      </p:sp>
+      <p:sp>
+        <p:nvSpPr>
+          <p:cNvPr id="3" name="Text 1"/>
           <p:cNvSpPr txBox="1"/>
           <p:nvPr/>
         </p:nvSpPr>
         <p:spPr>
           <a:xfrm>
-            <a:off x="804672" y="1170432"/>
-            <a:ext cx="2194560" cy="274320"/>
+            <a:off x="640080" y="2834640"/>
+            <a:ext cx="7863840" cy="457200"/>
           </a:xfrm>
           <a:prstGeom prst="rect">
             <a:avLst/>
@@ -11552,27 +11696,35 @@
               <a:buNone/>
             </a:pPr>
             <a:r>
-              <a:rPr lang="en-US" sz="1400" b="1" dirty="0">
-                <a:solidFill>
-                  <a:schemeClr val="tx1"/>
-                </a:solidFill>
-              </a:rPr>
-              <a:t>Année et étages</a:t>
-            </a:r>
-            <a:endParaRPr lang="en-US" sz="1400" dirty="0"/>
-          </a:p>
-        </p:txBody>
-      </p:sp>
-      <p:sp>
-        <p:nvSpPr>
-          <p:cNvPr id="6" name="Text 4"/>
+              <a:rPr lang="en-US" sz="1800" dirty="0" err="1">
+                <a:solidFill>
+                  <a:srgbClr val="CFE3E0"/>
+                </a:solidFill>
+              </a:rPr>
+              <a:t>BentoML</a:t>
+            </a:r>
+            <a:r>
+              <a:rPr lang="en-US" sz="1800" dirty="0">
+                <a:solidFill>
+                  <a:srgbClr val="CFE3E0"/>
+                </a:solidFill>
+              </a:rPr>
+              <a:t> déployée sur Google Cloud</a:t>
+            </a:r>
+            <a:endParaRPr lang="en-US" sz="1800" dirty="0"/>
+          </a:p>
+        </p:txBody>
+      </p:sp>
+      <p:sp>
+        <p:nvSpPr>
+          <p:cNvPr id="4" name="Text 2"/>
           <p:cNvSpPr txBox="1"/>
           <p:nvPr/>
         </p:nvSpPr>
         <p:spPr>
           <a:xfrm>
-            <a:off x="594360" y="1508760"/>
-            <a:ext cx="2377440" cy="731520"/>
+            <a:off x="640080" y="4572000"/>
+            <a:ext cx="7863840" cy="457200"/>
           </a:xfrm>
           <a:prstGeom prst="rect">
             <a:avLst/>
@@ -11581,771 +11733,30 @@
           <a:ln/>
         </p:spPr>
         <p:txBody>
-          <a:bodyPr wrap="square" lIns="0" tIns="0" rIns="0" bIns="0" rtlCol="0" anchor="t"/>
+          <a:bodyPr wrap="square" lIns="0" tIns="0" rIns="0" bIns="0" rtlCol="0" anchor="ctr"/>
           <a:lstStyle/>
           <a:p>
             <a:pPr marL="0" indent="0">
               <a:buNone/>
             </a:pPr>
             <a:r>
-              <a:rPr lang="en-US" sz="1200" dirty="0">
-                <a:solidFill>
-                  <a:srgbClr val="5B6B7A"/>
-                </a:solidFill>
-              </a:rPr>
-              <a:t>Année de 1900 à 2016 ; </a:t>
-            </a:r>
-          </a:p>
-          <a:p>
-            <a:pPr marL="0" indent="0">
-              <a:buNone/>
-            </a:pPr>
-            <a:r>
-              <a:rPr lang="en-US" sz="1200" dirty="0">
-                <a:solidFill>
-                  <a:srgbClr val="5B6B7A"/>
-                </a:solidFill>
-              </a:rPr>
-              <a:t>1 à 80 étages</a:t>
-            </a:r>
-          </a:p>
-          <a:p>
-            <a:pPr marL="0" indent="0">
-              <a:buNone/>
-            </a:pPr>
-            <a:r>
-              <a:rPr lang="en-US" sz="1200" dirty="0">
-                <a:solidFill>
-                  <a:srgbClr val="5B6B7A"/>
-                </a:solidFill>
-              </a:rPr>
-              <a:t>1 à 30 bâtiments</a:t>
-            </a:r>
-            <a:endParaRPr lang="en-US" sz="1200" dirty="0"/>
-          </a:p>
-        </p:txBody>
-      </p:sp>
-      <p:sp>
-        <p:nvSpPr>
-          <p:cNvPr id="7" name="f2 fond"/>
-          <p:cNvSpPr/>
-          <p:nvPr/>
-        </p:nvSpPr>
-        <p:spPr>
-          <a:xfrm>
-            <a:off x="3246120" y="1097280"/>
-            <a:ext cx="2651760" cy="1188720"/>
-          </a:xfrm>
-          <a:prstGeom prst="rect">
-            <a:avLst/>
-          </a:prstGeom>
-          <a:solidFill>
-            <a:srgbClr val="F2F6F5"/>
-          </a:solidFill>
-          <a:ln w="9525">
-            <a:solidFill>
-              <a:srgbClr val="DDE6E3"/>
-            </a:solidFill>
-            <a:prstDash val="solid"/>
-          </a:ln>
-        </p:spPr>
-        <p:txBody>
-          <a:bodyPr/>
-          <a:lstStyle/>
-          <a:p>
-            <a:endParaRPr lang="fr-FR"/>
-          </a:p>
-        </p:txBody>
-      </p:sp>
-      <p:sp>
-        <p:nvSpPr>
-          <p:cNvPr id="8" name="f2 puce"/>
-          <p:cNvSpPr/>
-          <p:nvPr/>
-        </p:nvSpPr>
-        <p:spPr>
-          <a:xfrm>
-            <a:off x="3383280" y="1234440"/>
-            <a:ext cx="128016" cy="128016"/>
-          </a:xfrm>
-          <a:prstGeom prst="ellipse">
-            <a:avLst/>
-          </a:prstGeom>
-          <a:solidFill>
-            <a:srgbClr val="6C8EAD"/>
-          </a:solidFill>
-          <a:ln w="12700">
-            <a:solidFill>
-              <a:srgbClr val="6C8EAD"/>
-            </a:solidFill>
-            <a:prstDash val="solid"/>
-          </a:ln>
-        </p:spPr>
-        <p:txBody>
-          <a:bodyPr/>
-          <a:lstStyle/>
-          <a:p>
-            <a:endParaRPr lang="fr-FR"/>
-          </a:p>
-        </p:txBody>
-      </p:sp>
-      <p:sp>
-        <p:nvSpPr>
-          <p:cNvPr id="9" name="Text 7"/>
-          <p:cNvSpPr txBox="1"/>
-          <p:nvPr/>
-        </p:nvSpPr>
-        <p:spPr>
-          <a:xfrm>
-            <a:off x="3593592" y="1170432"/>
-            <a:ext cx="2194560" cy="274320"/>
-          </a:xfrm>
-          <a:prstGeom prst="rect">
-            <a:avLst/>
-          </a:prstGeom>
-          <a:noFill/>
-          <a:ln/>
-        </p:spPr>
-        <p:txBody>
-          <a:bodyPr wrap="square" lIns="0" tIns="0" rIns="0" bIns="0" rtlCol="0" anchor="ctr"/>
-          <a:lstStyle/>
-          <a:p>
-            <a:pPr marL="0" indent="0">
-              <a:buNone/>
-            </a:pPr>
-            <a:r>
-              <a:rPr lang="en-US" sz="1400" b="1" dirty="0">
-                <a:solidFill>
-                  <a:schemeClr val="tx1"/>
-                </a:solidFill>
-              </a:rPr>
-              <a:t>Surfaces</a:t>
+              <a:rPr lang="en-US" sz="1400" dirty="0">
+                <a:solidFill>
+                  <a:srgbClr val="FFFFFF"/>
+                </a:solidFill>
+              </a:rPr>
+              <a:t>Projet 6  |  Objectif ville neutre en carbone en 2050</a:t>
             </a:r>
             <a:endParaRPr lang="en-US" sz="1400" dirty="0"/>
           </a:p>
         </p:txBody>
       </p:sp>
-      <p:sp>
-        <p:nvSpPr>
-          <p:cNvPr id="10" name="Text 8"/>
-          <p:cNvSpPr txBox="1"/>
-          <p:nvPr/>
-        </p:nvSpPr>
-        <p:spPr>
-          <a:xfrm>
-            <a:off x="3383280" y="1508760"/>
-            <a:ext cx="2377440" cy="731520"/>
-          </a:xfrm>
-          <a:prstGeom prst="rect">
-            <a:avLst/>
-          </a:prstGeom>
-          <a:noFill/>
-          <a:ln/>
-        </p:spPr>
-        <p:txBody>
-          <a:bodyPr wrap="square" lIns="0" tIns="0" rIns="0" bIns="0" rtlCol="0" anchor="t"/>
-          <a:lstStyle/>
-          <a:p>
-            <a:pPr marL="0" indent="0">
-              <a:buNone/>
-            </a:pPr>
-            <a:r>
-              <a:rPr lang="en-US" sz="1200" dirty="0">
-                <a:solidFill>
-                  <a:srgbClr val="5B6B7A"/>
-                </a:solidFill>
-              </a:rPr>
-              <a:t>10 000 à 2,5 M de sq ft</a:t>
-            </a:r>
-          </a:p>
-          <a:p>
-            <a:pPr marL="0" indent="0">
-              <a:buNone/>
-            </a:pPr>
-            <a:r>
-              <a:rPr lang="en-US" sz="1200" dirty="0">
-                <a:solidFill>
-                  <a:srgbClr val="5B6B7A"/>
-                </a:solidFill>
-              </a:rPr>
-              <a:t>parking inférieur à la surface totale</a:t>
-            </a:r>
-            <a:endParaRPr lang="en-US" sz="1200" dirty="0"/>
-          </a:p>
-        </p:txBody>
-      </p:sp>
-      <p:sp>
-        <p:nvSpPr>
-          <p:cNvPr id="11" name="f3 fond"/>
-          <p:cNvSpPr/>
-          <p:nvPr/>
-        </p:nvSpPr>
-        <p:spPr>
-          <a:xfrm>
-            <a:off x="6035040" y="1097280"/>
-            <a:ext cx="2651760" cy="1188720"/>
-          </a:xfrm>
-          <a:prstGeom prst="rect">
-            <a:avLst/>
-          </a:prstGeom>
-          <a:solidFill>
-            <a:srgbClr val="F2F6F5"/>
-          </a:solidFill>
-          <a:ln w="9525">
-            <a:solidFill>
-              <a:srgbClr val="DDE6E3"/>
-            </a:solidFill>
-            <a:prstDash val="solid"/>
-          </a:ln>
-        </p:spPr>
-        <p:txBody>
-          <a:bodyPr/>
-          <a:lstStyle/>
-          <a:p>
-            <a:endParaRPr lang="fr-FR"/>
-          </a:p>
-        </p:txBody>
-      </p:sp>
-      <p:sp>
-        <p:nvSpPr>
-          <p:cNvPr id="12" name="f3 puce"/>
-          <p:cNvSpPr/>
-          <p:nvPr/>
-        </p:nvSpPr>
-        <p:spPr>
-          <a:xfrm>
-            <a:off x="6172200" y="1234440"/>
-            <a:ext cx="128016" cy="128016"/>
-          </a:xfrm>
-          <a:prstGeom prst="ellipse">
-            <a:avLst/>
-          </a:prstGeom>
-          <a:solidFill>
-            <a:srgbClr val="F2A541"/>
-          </a:solidFill>
-          <a:ln w="12700">
-            <a:solidFill>
-              <a:srgbClr val="F2A541"/>
-            </a:solidFill>
-            <a:prstDash val="solid"/>
-          </a:ln>
-        </p:spPr>
-        <p:txBody>
-          <a:bodyPr/>
-          <a:lstStyle/>
-          <a:p>
-            <a:endParaRPr lang="fr-FR"/>
-          </a:p>
-        </p:txBody>
-      </p:sp>
-      <p:sp>
-        <p:nvSpPr>
-          <p:cNvPr id="13" name="Text 11"/>
-          <p:cNvSpPr txBox="1"/>
-          <p:nvPr/>
-        </p:nvSpPr>
-        <p:spPr>
-          <a:xfrm>
-            <a:off x="6382512" y="1170432"/>
-            <a:ext cx="2194560" cy="274320"/>
-          </a:xfrm>
-          <a:prstGeom prst="rect">
-            <a:avLst/>
-          </a:prstGeom>
-          <a:noFill/>
-          <a:ln/>
-        </p:spPr>
-        <p:txBody>
-          <a:bodyPr wrap="square" lIns="0" tIns="0" rIns="0" bIns="0" rtlCol="0" anchor="ctr"/>
-          <a:lstStyle/>
-          <a:p>
-            <a:pPr marL="0" indent="0">
-              <a:buNone/>
-            </a:pPr>
-            <a:r>
-              <a:rPr lang="en-US" sz="1400" b="1" dirty="0">
-                <a:solidFill>
-                  <a:schemeClr val="tx1"/>
-                </a:solidFill>
-              </a:rPr>
-              <a:t>Usages</a:t>
-            </a:r>
-            <a:endParaRPr lang="en-US" sz="1400" dirty="0"/>
-          </a:p>
-        </p:txBody>
-      </p:sp>
-      <p:sp>
-        <p:nvSpPr>
-          <p:cNvPr id="14" name="Text 12"/>
-          <p:cNvSpPr txBox="1"/>
-          <p:nvPr/>
-        </p:nvSpPr>
-        <p:spPr>
-          <a:xfrm>
-            <a:off x="6172200" y="1508760"/>
-            <a:ext cx="2377440" cy="731520"/>
-          </a:xfrm>
-          <a:prstGeom prst="rect">
-            <a:avLst/>
-          </a:prstGeom>
-          <a:noFill/>
-          <a:ln/>
-        </p:spPr>
-        <p:txBody>
-          <a:bodyPr wrap="square" lIns="0" tIns="0" rIns="0" bIns="0" rtlCol="0" anchor="t"/>
-          <a:lstStyle/>
-          <a:p>
-            <a:pPr marL="0" indent="0">
-              <a:buNone/>
-            </a:pPr>
-            <a:r>
-              <a:rPr lang="en-US" sz="1200" dirty="0">
-                <a:solidFill>
-                  <a:srgbClr val="5B6B7A"/>
-                </a:solidFill>
-              </a:rPr>
-              <a:t>1 à 3 usages différents (le jeu de données n'en décrit pas plus)</a:t>
-            </a:r>
-            <a:endParaRPr lang="en-US" sz="1200" dirty="0"/>
-          </a:p>
-        </p:txBody>
-      </p:sp>
-      <p:sp>
-        <p:nvSpPr>
-          <p:cNvPr id="15" name="f4 fond"/>
-          <p:cNvSpPr/>
-          <p:nvPr/>
-        </p:nvSpPr>
-        <p:spPr>
-          <a:xfrm>
-            <a:off x="457200" y="2423160"/>
-            <a:ext cx="2651760" cy="1188720"/>
-          </a:xfrm>
-          <a:prstGeom prst="rect">
-            <a:avLst/>
-          </a:prstGeom>
-          <a:solidFill>
-            <a:srgbClr val="F2F6F5"/>
-          </a:solidFill>
-          <a:ln w="9525">
-            <a:solidFill>
-              <a:srgbClr val="DDE6E3"/>
-            </a:solidFill>
-            <a:prstDash val="solid"/>
-          </a:ln>
-        </p:spPr>
-        <p:txBody>
-          <a:bodyPr/>
-          <a:lstStyle/>
-          <a:p>
-            <a:endParaRPr lang="fr-FR"/>
-          </a:p>
-        </p:txBody>
-      </p:sp>
-      <p:sp>
-        <p:nvSpPr>
-          <p:cNvPr id="16" name="f4 puce"/>
-          <p:cNvSpPr/>
-          <p:nvPr/>
-        </p:nvSpPr>
-        <p:spPr>
-          <a:xfrm>
-            <a:off x="594360" y="2560320"/>
-            <a:ext cx="128016" cy="128016"/>
-          </a:xfrm>
-          <a:prstGeom prst="ellipse">
-            <a:avLst/>
-          </a:prstGeom>
-          <a:solidFill>
-            <a:srgbClr val="D1495B"/>
-          </a:solidFill>
-          <a:ln w="12700">
-            <a:solidFill>
-              <a:srgbClr val="D1495B"/>
-            </a:solidFill>
-            <a:prstDash val="solid"/>
-          </a:ln>
-        </p:spPr>
-        <p:txBody>
-          <a:bodyPr/>
-          <a:lstStyle/>
-          <a:p>
-            <a:endParaRPr lang="fr-FR"/>
-          </a:p>
-        </p:txBody>
-      </p:sp>
-      <p:sp>
-        <p:nvSpPr>
-          <p:cNvPr id="17" name="Text 15"/>
-          <p:cNvSpPr txBox="1"/>
-          <p:nvPr/>
-        </p:nvSpPr>
-        <p:spPr>
-          <a:xfrm>
-            <a:off x="804672" y="2496312"/>
-            <a:ext cx="2194560" cy="274320"/>
-          </a:xfrm>
-          <a:prstGeom prst="rect">
-            <a:avLst/>
-          </a:prstGeom>
-          <a:noFill/>
-          <a:ln/>
-        </p:spPr>
-        <p:txBody>
-          <a:bodyPr wrap="square" lIns="0" tIns="0" rIns="0" bIns="0" rtlCol="0" anchor="ctr"/>
-          <a:lstStyle/>
-          <a:p>
-            <a:pPr marL="0" indent="0">
-              <a:buNone/>
-            </a:pPr>
-            <a:r>
-              <a:rPr lang="en-US" sz="1400" b="1" dirty="0">
-                <a:solidFill>
-                  <a:schemeClr val="tx1"/>
-                </a:solidFill>
-              </a:rPr>
-              <a:t>Position</a:t>
-            </a:r>
-            <a:endParaRPr lang="en-US" sz="1400" dirty="0"/>
-          </a:p>
-        </p:txBody>
-      </p:sp>
-      <p:sp>
-        <p:nvSpPr>
-          <p:cNvPr id="18" name="Text 16"/>
-          <p:cNvSpPr txBox="1"/>
-          <p:nvPr/>
-        </p:nvSpPr>
-        <p:spPr>
-          <a:xfrm>
-            <a:off x="594360" y="2834640"/>
-            <a:ext cx="2377440" cy="731520"/>
-          </a:xfrm>
-          <a:prstGeom prst="rect">
-            <a:avLst/>
-          </a:prstGeom>
-          <a:noFill/>
-          <a:ln/>
-        </p:spPr>
-        <p:txBody>
-          <a:bodyPr wrap="square" lIns="0" tIns="0" rIns="0" bIns="0" rtlCol="0" anchor="t"/>
-          <a:lstStyle/>
-          <a:p>
-            <a:pPr marL="0" indent="0">
-              <a:buNone/>
-            </a:pPr>
-            <a:r>
-              <a:rPr lang="en-US" sz="1200" dirty="0">
-                <a:solidFill>
-                  <a:srgbClr val="5B6B7A"/>
-                </a:solidFill>
-              </a:rPr>
-              <a:t>Latitude et longitude comprises dans les limites de Seattle</a:t>
-            </a:r>
-            <a:endParaRPr lang="en-US" sz="1200" dirty="0"/>
-          </a:p>
-        </p:txBody>
-      </p:sp>
-      <p:sp>
-        <p:nvSpPr>
-          <p:cNvPr id="19" name="f5 fond"/>
-          <p:cNvSpPr/>
-          <p:nvPr/>
-        </p:nvSpPr>
-        <p:spPr>
-          <a:xfrm>
-            <a:off x="3246120" y="2423160"/>
-            <a:ext cx="2651760" cy="1188720"/>
-          </a:xfrm>
-          <a:prstGeom prst="rect">
-            <a:avLst/>
-          </a:prstGeom>
-          <a:solidFill>
-            <a:srgbClr val="F2F6F5"/>
-          </a:solidFill>
-          <a:ln w="9525">
-            <a:solidFill>
-              <a:srgbClr val="DDE6E3"/>
-            </a:solidFill>
-            <a:prstDash val="solid"/>
-          </a:ln>
-        </p:spPr>
-        <p:txBody>
-          <a:bodyPr/>
-          <a:lstStyle/>
-          <a:p>
-            <a:endParaRPr lang="fr-FR"/>
-          </a:p>
-        </p:txBody>
-      </p:sp>
-      <p:sp>
-        <p:nvSpPr>
-          <p:cNvPr id="20" name="f5 puce"/>
-          <p:cNvSpPr/>
-          <p:nvPr/>
-        </p:nvSpPr>
-        <p:spPr>
-          <a:xfrm>
-            <a:off x="3383280" y="2560320"/>
-            <a:ext cx="128016" cy="128016"/>
-          </a:xfrm>
-          <a:prstGeom prst="ellipse">
-            <a:avLst/>
-          </a:prstGeom>
-          <a:solidFill>
-            <a:srgbClr val="1B7F79"/>
-          </a:solidFill>
-          <a:ln w="12700">
-            <a:solidFill>
-              <a:srgbClr val="1B7F79"/>
-            </a:solidFill>
-            <a:prstDash val="solid"/>
-          </a:ln>
-        </p:spPr>
-        <p:txBody>
-          <a:bodyPr/>
-          <a:lstStyle/>
-          <a:p>
-            <a:endParaRPr lang="fr-FR"/>
-          </a:p>
-        </p:txBody>
-      </p:sp>
-      <p:sp>
-        <p:nvSpPr>
-          <p:cNvPr id="21" name="Text 19"/>
-          <p:cNvSpPr txBox="1"/>
-          <p:nvPr/>
-        </p:nvSpPr>
-        <p:spPr>
-          <a:xfrm>
-            <a:off x="3593592" y="2496312"/>
-            <a:ext cx="2194560" cy="274320"/>
-          </a:xfrm>
-          <a:prstGeom prst="rect">
-            <a:avLst/>
-          </a:prstGeom>
-          <a:noFill/>
-          <a:ln/>
-        </p:spPr>
-        <p:txBody>
-          <a:bodyPr wrap="square" lIns="0" tIns="0" rIns="0" bIns="0" rtlCol="0" anchor="ctr"/>
-          <a:lstStyle/>
-          <a:p>
-            <a:pPr marL="0" indent="0">
-              <a:buNone/>
-            </a:pPr>
-            <a:r>
-              <a:rPr lang="en-US" sz="1400" b="1" dirty="0">
-                <a:solidFill>
-                  <a:schemeClr val="tx1"/>
-                </a:solidFill>
-              </a:rPr>
-              <a:t>Listes fermées</a:t>
-            </a:r>
-            <a:endParaRPr lang="en-US" sz="1400" dirty="0"/>
-          </a:p>
-        </p:txBody>
-      </p:sp>
-      <p:sp>
-        <p:nvSpPr>
-          <p:cNvPr id="22" name="Text 20"/>
-          <p:cNvSpPr txBox="1"/>
-          <p:nvPr/>
-        </p:nvSpPr>
-        <p:spPr>
-          <a:xfrm>
-            <a:off x="3383280" y="2834640"/>
-            <a:ext cx="2377440" cy="731520"/>
-          </a:xfrm>
-          <a:prstGeom prst="rect">
-            <a:avLst/>
-          </a:prstGeom>
-          <a:noFill/>
-          <a:ln/>
-        </p:spPr>
-        <p:txBody>
-          <a:bodyPr wrap="square" lIns="0" tIns="0" rIns="0" bIns="0" rtlCol="0" anchor="t"/>
-          <a:lstStyle/>
-          <a:p>
-            <a:pPr marL="0" indent="0">
-              <a:buNone/>
-            </a:pPr>
-            <a:r>
-              <a:rPr lang="en-US" sz="1200" dirty="0">
-                <a:solidFill>
-                  <a:srgbClr val="5B6B7A"/>
-                </a:solidFill>
-              </a:rPr>
-              <a:t>Usage principal, type de bâtiment et quartier : valeurs vues à l'entraînement</a:t>
-            </a:r>
-            <a:endParaRPr lang="en-US" sz="1200" dirty="0"/>
-          </a:p>
-        </p:txBody>
-      </p:sp>
-      <p:sp>
-        <p:nvSpPr>
-          <p:cNvPr id="23" name="Shape 21"/>
-          <p:cNvSpPr/>
-          <p:nvPr/>
-        </p:nvSpPr>
-        <p:spPr>
-          <a:xfrm>
-            <a:off x="6035040" y="2423160"/>
-            <a:ext cx="2651760" cy="1188720"/>
-          </a:xfrm>
-          <a:prstGeom prst="rect">
-            <a:avLst/>
-          </a:prstGeom>
-          <a:solidFill>
-            <a:srgbClr val="12263A"/>
-          </a:solidFill>
-          <a:ln w="12700">
-            <a:solidFill>
-              <a:srgbClr val="12263A"/>
-            </a:solidFill>
-            <a:prstDash val="solid"/>
-          </a:ln>
-        </p:spPr>
-        <p:txBody>
-          <a:bodyPr/>
-          <a:lstStyle/>
-          <a:p>
-            <a:endParaRPr lang="fr-FR"/>
-          </a:p>
-        </p:txBody>
-      </p:sp>
-      <p:sp>
-        <p:nvSpPr>
-          <p:cNvPr id="24" name="Text 22"/>
-          <p:cNvSpPr txBox="1"/>
-          <p:nvPr/>
-        </p:nvSpPr>
-        <p:spPr>
-          <a:xfrm>
-            <a:off x="6172200" y="2514600"/>
-            <a:ext cx="2377440" cy="1005840"/>
-          </a:xfrm>
-          <a:prstGeom prst="rect">
-            <a:avLst/>
-          </a:prstGeom>
-          <a:noFill/>
-          <a:ln/>
-        </p:spPr>
-        <p:txBody>
-          <a:bodyPr wrap="square" lIns="0" tIns="0" rIns="0" bIns="0" rtlCol="0" anchor="t"/>
-          <a:lstStyle/>
-          <a:p>
-            <a:pPr marL="0" indent="0">
-              <a:buNone/>
-            </a:pPr>
-            <a:r>
-              <a:rPr lang="en-US" sz="1400" b="1" dirty="0">
-                <a:solidFill>
-                  <a:srgbClr val="FFFFFF"/>
-                </a:solidFill>
-              </a:rPr>
-              <a:t>Erreur 400 explicite</a:t>
-            </a:r>
-            <a:endParaRPr lang="en-US" sz="1400" dirty="0"/>
-          </a:p>
-          <a:p>
-            <a:pPr marL="0" indent="0">
-              <a:buNone/>
-            </a:pPr>
-            <a:r>
-              <a:rPr lang="en-US" sz="1200" dirty="0">
-                <a:solidFill>
-                  <a:srgbClr val="FFFFFF"/>
-                </a:solidFill>
-              </a:rPr>
-              <a:t>Surface par étage d'au moins 500 sq ft ; le champ fautif est indiqué à l'utilisateur</a:t>
-            </a:r>
-            <a:endParaRPr lang="en-US" sz="1400" dirty="0"/>
-          </a:p>
-        </p:txBody>
-      </p:sp>
-      <p:sp>
-        <p:nvSpPr>
-          <p:cNvPr id="25" name="Text 23"/>
-          <p:cNvSpPr txBox="1"/>
-          <p:nvPr/>
-        </p:nvSpPr>
-        <p:spPr>
-          <a:xfrm>
-            <a:off x="457200" y="3840480"/>
-            <a:ext cx="8229600" cy="640080"/>
-          </a:xfrm>
-          <a:prstGeom prst="rect">
-            <a:avLst/>
-          </a:prstGeom>
-          <a:noFill/>
-          <a:ln/>
-        </p:spPr>
-        <p:txBody>
-          <a:bodyPr wrap="square" lIns="0" tIns="0" rIns="0" bIns="0" rtlCol="0" anchor="t"/>
-          <a:lstStyle/>
-          <a:p>
-            <a:pPr marL="0" indent="0">
-              <a:buNone/>
-            </a:pPr>
-            <a:r>
-              <a:rPr lang="en-US" sz="1300" i="1" dirty="0">
-                <a:solidFill>
-                  <a:srgbClr val="12263A"/>
-                </a:solidFill>
-              </a:rPr>
-              <a:t>Un Random Forest répond toujours, même à une entrée absurde : la validation protège la qualité des prédictions. Les plages reprennent celles vues à l'entraînement.</a:t>
-            </a:r>
-            <a:endParaRPr lang="en-US" sz="1300" dirty="0"/>
-          </a:p>
-        </p:txBody>
-      </p:sp>
-      <p:sp>
-        <p:nvSpPr>
-          <p:cNvPr id="26" name="Slide Number Placeholder 0"/>
-          <p:cNvSpPr>
-            <a:spLocks noGrp="1"/>
-          </p:cNvSpPr>
-          <p:nvPr>
-            <p:ph type="sldNum" sz="quarter" idx="4294967295"/>
-          </p:nvPr>
-        </p:nvSpPr>
-        <p:spPr>
-          <a:xfrm>
-            <a:off x="8321040" y="4828032"/>
-            <a:ext cx="457200" cy="228600"/>
-          </a:xfrm>
-          <a:prstGeom prst="rect">
-            <a:avLst/>
-          </a:prstGeom>
-          <a:extLst>
-            <a:ext uri="{C572A759-6A51-4108-AA02-DFA0A04FC94B}">
-              <ma14:wrappingTextBoxFlag xmlns:ma14="http://schemas.microsoft.com/office/mac/drawingml/2011/main" xmlns="" val="0"/>
-            </a:ext>
-          </a:extLst>
-        </p:spPr>
-        <p:txBody>
-          <a:bodyPr/>
-          <a:lstStyle>
-            <a:lvl1pPr>
-              <a:defRPr sz="900">
-                <a:solidFill>
-                  <a:srgbClr val="5B6B7A"/>
-                </a:solidFill>
-              </a:defRPr>
-            </a:lvl1pPr>
-          </a:lstStyle>
-          <a:p>
-            <a:pPr algn="l"/>
-            <a:fld id="{F7021451-1387-4CA6-816F-3879F97B5CBC}" type="slidenum">
-              <a:rPr lang="en-US" b="0"/>
-              <a:t>15</a:t>
-            </a:fld>
-            <a:endParaRPr lang="en-US"/>
-          </a:p>
-        </p:txBody>
-      </p:sp>
     </p:spTree>
+    <p:extLst>
+      <p:ext uri="{BB962C8B-B14F-4D97-AF65-F5344CB8AC3E}">
+        <p14:creationId xmlns:p14="http://schemas.microsoft.com/office/powerpoint/2010/main" val="4163876730"/>
+      </p:ext>
+    </p:extLst>
   </p:cSld>
   <p:clrMapOvr>
     <a:masterClrMapping/>
@@ -12403,7 +11814,7 @@
                 <a:ea typeface="Georgia" pitchFamily="34" charset="-122"/>
                 <a:cs typeface="Georgia" pitchFamily="34" charset="-120"/>
               </a:rPr>
-              <a:t>En local, bentoml serve expose l'API, testée par Swagger et par requêtes</a:t>
+              <a:t>L'API reçoit des données brutes et renvoie énergie et CO2 en un seul appel</a:t>
             </a:r>
             <a:endParaRPr lang="en-US" sz="2400" dirty="0"/>
           </a:p>
@@ -12417,20 +11828,18 @@
         </p:nvSpPr>
         <p:spPr>
           <a:xfrm>
-            <a:off x="365760" y="1188720"/>
-            <a:ext cx="1600200" cy="1920240"/>
-          </a:xfrm>
-          <a:prstGeom prst="roundRect">
-            <a:avLst>
-              <a:gd name="adj" fmla="val 5714"/>
-            </a:avLst>
+            <a:off x="1234440" y="1143000"/>
+            <a:ext cx="457200" cy="457200"/>
+          </a:xfrm>
+          <a:prstGeom prst="ellipse">
+            <a:avLst/>
           </a:prstGeom>
           <a:solidFill>
-            <a:srgbClr val="E3F0EE"/>
+            <a:srgbClr val="1B7F79"/>
           </a:solidFill>
-          <a:ln w="9525">
+          <a:ln w="12700">
             <a:solidFill>
-              <a:srgbClr val="CFDDD9"/>
+              <a:srgbClr val="1B7F79"/>
             </a:solidFill>
             <a:prstDash val="solid"/>
           </a:ln>
@@ -12451,8 +11860,8 @@
         </p:nvSpPr>
         <p:spPr>
           <a:xfrm>
-            <a:off x="438912" y="1280160"/>
-            <a:ext cx="1463040" cy="457200"/>
+            <a:off x="1234440" y="1143000"/>
+            <a:ext cx="457200" cy="457200"/>
           </a:xfrm>
           <a:prstGeom prst="rect">
             <a:avLst/>
@@ -12468,14 +11877,14 @@
               <a:buNone/>
             </a:pPr>
             <a:r>
-              <a:rPr lang="en-US" sz="1400" b="1" dirty="0">
-                <a:solidFill>
-                  <a:srgbClr val="1B7F79"/>
-                </a:solidFill>
-              </a:rPr>
-              <a:t>Sauvegarde</a:t>
-            </a:r>
-            <a:endParaRPr lang="en-US" sz="1400" dirty="0"/>
+              <a:rPr lang="en-US" sz="1600" b="1" dirty="0">
+                <a:solidFill>
+                  <a:srgbClr val="FFFFFF"/>
+                </a:solidFill>
+              </a:rPr>
+              <a:t>1</a:t>
+            </a:r>
+            <a:endParaRPr lang="en-US" sz="1600" dirty="0"/>
           </a:p>
         </p:txBody>
       </p:sp>
@@ -12487,8 +11896,8 @@
         </p:nvSpPr>
         <p:spPr>
           <a:xfrm>
-            <a:off x="457200" y="1783080"/>
-            <a:ext cx="1417320" cy="1234440"/>
+            <a:off x="457200" y="1737360"/>
+            <a:ext cx="2011680" cy="320040"/>
           </a:xfrm>
           <a:prstGeom prst="rect">
             <a:avLst/>
@@ -12497,19 +11906,55 @@
           <a:ln/>
         </p:spPr>
         <p:txBody>
-          <a:bodyPr wrap="square" lIns="0" tIns="0" rIns="0" bIns="0" rtlCol="0" anchor="t"/>
+          <a:bodyPr wrap="square" lIns="0" tIns="0" rIns="0" bIns="0" rtlCol="0" anchor="ctr"/>
           <a:lstStyle/>
           <a:p>
             <a:pPr marL="0" indent="0" algn="ctr">
               <a:buNone/>
             </a:pPr>
             <a:r>
+              <a:rPr lang="en-US" sz="1400" b="1" dirty="0">
+                <a:solidFill>
+                  <a:schemeClr val="tx1"/>
+                </a:solidFill>
+              </a:rPr>
+              <a:t>Requête JSON</a:t>
+            </a:r>
+            <a:endParaRPr lang="en-US" sz="1400" dirty="0"/>
+          </a:p>
+        </p:txBody>
+      </p:sp>
+      <p:sp>
+        <p:nvSpPr>
+          <p:cNvPr id="6" name="Text 4"/>
+          <p:cNvSpPr txBox="1"/>
+          <p:nvPr/>
+        </p:nvSpPr>
+        <p:spPr>
+          <a:xfrm>
+            <a:off x="457200" y="2103120"/>
+            <a:ext cx="2011680" cy="1371600"/>
+          </a:xfrm>
+          <a:prstGeom prst="rect">
+            <a:avLst/>
+          </a:prstGeom>
+          <a:noFill/>
+          <a:ln/>
+        </p:spPr>
+        <p:txBody>
+          <a:bodyPr wrap="square" lIns="0" tIns="0" rIns="0" bIns="0" rtlCol="0" anchor="t"/>
+          <a:lstStyle/>
+          <a:p>
+            <a:pPr marL="0" indent="0" algn="ctr">
+              <a:buNone/>
+            </a:pPr>
+            <a:r>
               <a:rPr lang="en-US" sz="1200" dirty="0">
                 <a:solidFill>
                   <a:srgbClr val="5B6B7A"/>
                 </a:solidFill>
               </a:rPr>
-              <a:t>Les 2 modèles et la liste ordonnée des variables entrent dans le Model Store</a:t>
+              <a:t>Année, surface, quartier, usage… sans connaître notre pré-traitement</a:t>
             </a:r>
             <a:endParaRPr lang="en-US" sz="1200" dirty="0"/>
           </a:p>
@@ -12517,26 +11962,444 @@
       </p:sp>
       <p:sp>
         <p:nvSpPr>
-          <p:cNvPr id="6" name="Shape 4"/>
+          <p:cNvPr id="7" name="Shape 5"/>
           <p:cNvSpPr/>
           <p:nvPr/>
         </p:nvSpPr>
         <p:spPr>
           <a:xfrm>
-            <a:off x="2084832" y="1188720"/>
-            <a:ext cx="1600200" cy="1920240"/>
-          </a:xfrm>
-          <a:prstGeom prst="roundRect">
-            <a:avLst>
-              <a:gd name="adj" fmla="val 5714"/>
-            </a:avLst>
+            <a:off x="3319272" y="1143000"/>
+            <a:ext cx="457200" cy="457200"/>
+          </a:xfrm>
+          <a:prstGeom prst="ellipse">
+            <a:avLst/>
+          </a:prstGeom>
+          <a:solidFill>
+            <a:srgbClr val="6C8EAD"/>
+          </a:solidFill>
+          <a:ln w="12700">
+            <a:solidFill>
+              <a:srgbClr val="6C8EAD"/>
+            </a:solidFill>
+            <a:prstDash val="solid"/>
+          </a:ln>
+        </p:spPr>
+        <p:txBody>
+          <a:bodyPr/>
+          <a:lstStyle/>
+          <a:p>
+            <a:endParaRPr lang="fr-FR"/>
+          </a:p>
+        </p:txBody>
+      </p:sp>
+      <p:sp>
+        <p:nvSpPr>
+          <p:cNvPr id="8" name="Text 6"/>
+          <p:cNvSpPr txBox="1"/>
+          <p:nvPr/>
+        </p:nvSpPr>
+        <p:spPr>
+          <a:xfrm>
+            <a:off x="3319272" y="1143000"/>
+            <a:ext cx="457200" cy="457200"/>
+          </a:xfrm>
+          <a:prstGeom prst="rect">
+            <a:avLst/>
+          </a:prstGeom>
+          <a:noFill/>
+          <a:ln/>
+        </p:spPr>
+        <p:txBody>
+          <a:bodyPr wrap="square" lIns="0" tIns="0" rIns="0" bIns="0" rtlCol="0" anchor="ctr"/>
+          <a:lstStyle/>
+          <a:p>
+            <a:pPr marL="0" indent="0" algn="ctr">
+              <a:buNone/>
+            </a:pPr>
+            <a:r>
+              <a:rPr lang="en-US" sz="1600" b="1" dirty="0">
+                <a:solidFill>
+                  <a:srgbClr val="FFFFFF"/>
+                </a:solidFill>
+              </a:rPr>
+              <a:t>2</a:t>
+            </a:r>
+            <a:endParaRPr lang="en-US" sz="1600" dirty="0"/>
+          </a:p>
+        </p:txBody>
+      </p:sp>
+      <p:sp>
+        <p:nvSpPr>
+          <p:cNvPr id="9" name="Text 7"/>
+          <p:cNvSpPr txBox="1"/>
+          <p:nvPr/>
+        </p:nvSpPr>
+        <p:spPr>
+          <a:xfrm>
+            <a:off x="2542032" y="1737360"/>
+            <a:ext cx="2011680" cy="320040"/>
+          </a:xfrm>
+          <a:prstGeom prst="rect">
+            <a:avLst/>
+          </a:prstGeom>
+          <a:noFill/>
+          <a:ln/>
+        </p:spPr>
+        <p:txBody>
+          <a:bodyPr wrap="square" lIns="0" tIns="0" rIns="0" bIns="0" rtlCol="0" anchor="ctr"/>
+          <a:lstStyle/>
+          <a:p>
+            <a:pPr marL="0" indent="0" algn="ctr">
+              <a:buNone/>
+            </a:pPr>
+            <a:r>
+              <a:rPr lang="en-US" sz="1400" b="1" dirty="0">
+                <a:solidFill>
+                  <a:schemeClr val="tx1"/>
+                </a:solidFill>
+              </a:rPr>
+              <a:t>Validation</a:t>
+            </a:r>
+            <a:endParaRPr lang="en-US" sz="1400" dirty="0"/>
+          </a:p>
+        </p:txBody>
+      </p:sp>
+      <p:sp>
+        <p:nvSpPr>
+          <p:cNvPr id="10" name="Text 8"/>
+          <p:cNvSpPr txBox="1"/>
+          <p:nvPr/>
+        </p:nvSpPr>
+        <p:spPr>
+          <a:xfrm>
+            <a:off x="2542032" y="2103120"/>
+            <a:ext cx="2011680" cy="1371600"/>
+          </a:xfrm>
+          <a:prstGeom prst="rect">
+            <a:avLst/>
+          </a:prstGeom>
+          <a:noFill/>
+          <a:ln/>
+        </p:spPr>
+        <p:txBody>
+          <a:bodyPr wrap="square" lIns="0" tIns="0" rIns="0" bIns="0" rtlCol="0" anchor="t"/>
+          <a:lstStyle/>
+          <a:p>
+            <a:pPr marL="0" indent="0" algn="ctr">
+              <a:buNone/>
+            </a:pPr>
+            <a:r>
+              <a:rPr lang="en-US" sz="1200" dirty="0">
+                <a:solidFill>
+                  <a:srgbClr val="5B6B7A"/>
+                </a:solidFill>
+              </a:rPr>
+              <a:t>Pydantic rejette les valeurs incohérentes avant qu'elles n'atteignent le modèle</a:t>
+            </a:r>
+            <a:endParaRPr lang="en-US" sz="1200" dirty="0"/>
+          </a:p>
+        </p:txBody>
+      </p:sp>
+      <p:sp>
+        <p:nvSpPr>
+          <p:cNvPr id="11" name="Shape 9"/>
+          <p:cNvSpPr/>
+          <p:nvPr/>
+        </p:nvSpPr>
+        <p:spPr>
+          <a:xfrm>
+            <a:off x="5404104" y="1143000"/>
+            <a:ext cx="457200" cy="457200"/>
+          </a:xfrm>
+          <a:prstGeom prst="ellipse">
+            <a:avLst/>
+          </a:prstGeom>
+          <a:solidFill>
+            <a:srgbClr val="F2A541"/>
+          </a:solidFill>
+          <a:ln w="12700">
+            <a:solidFill>
+              <a:srgbClr val="F2A541"/>
+            </a:solidFill>
+            <a:prstDash val="solid"/>
+          </a:ln>
+        </p:spPr>
+        <p:txBody>
+          <a:bodyPr/>
+          <a:lstStyle/>
+          <a:p>
+            <a:endParaRPr lang="fr-FR"/>
+          </a:p>
+        </p:txBody>
+      </p:sp>
+      <p:sp>
+        <p:nvSpPr>
+          <p:cNvPr id="12" name="Text 10"/>
+          <p:cNvSpPr txBox="1"/>
+          <p:nvPr/>
+        </p:nvSpPr>
+        <p:spPr>
+          <a:xfrm>
+            <a:off x="5404104" y="1143000"/>
+            <a:ext cx="457200" cy="457200"/>
+          </a:xfrm>
+          <a:prstGeom prst="rect">
+            <a:avLst/>
+          </a:prstGeom>
+          <a:noFill/>
+          <a:ln/>
+        </p:spPr>
+        <p:txBody>
+          <a:bodyPr wrap="square" lIns="0" tIns="0" rIns="0" bIns="0" rtlCol="0" anchor="ctr"/>
+          <a:lstStyle/>
+          <a:p>
+            <a:pPr marL="0" indent="0" algn="ctr">
+              <a:buNone/>
+            </a:pPr>
+            <a:r>
+              <a:rPr lang="en-US" sz="1600" b="1" dirty="0">
+                <a:solidFill>
+                  <a:srgbClr val="FFFFFF"/>
+                </a:solidFill>
+              </a:rPr>
+              <a:t>3</a:t>
+            </a:r>
+            <a:endParaRPr lang="en-US" sz="1600" dirty="0"/>
+          </a:p>
+        </p:txBody>
+      </p:sp>
+      <p:sp>
+        <p:nvSpPr>
+          <p:cNvPr id="13" name="Text 11"/>
+          <p:cNvSpPr txBox="1"/>
+          <p:nvPr/>
+        </p:nvSpPr>
+        <p:spPr>
+          <a:xfrm>
+            <a:off x="4626864" y="1737360"/>
+            <a:ext cx="2011680" cy="320040"/>
+          </a:xfrm>
+          <a:prstGeom prst="rect">
+            <a:avLst/>
+          </a:prstGeom>
+          <a:noFill/>
+          <a:ln/>
+        </p:spPr>
+        <p:txBody>
+          <a:bodyPr wrap="square" lIns="0" tIns="0" rIns="0" bIns="0" rtlCol="0" anchor="ctr"/>
+          <a:lstStyle/>
+          <a:p>
+            <a:pPr marL="0" indent="0" algn="ctr">
+              <a:buNone/>
+            </a:pPr>
+            <a:r>
+              <a:rPr lang="en-US" sz="1400" b="1" dirty="0">
+                <a:solidFill>
+                  <a:schemeClr val="tx1"/>
+                </a:solidFill>
+              </a:rPr>
+              <a:t>Variables</a:t>
+            </a:r>
+            <a:endParaRPr lang="en-US" sz="1400" dirty="0"/>
+          </a:p>
+        </p:txBody>
+      </p:sp>
+      <p:sp>
+        <p:nvSpPr>
+          <p:cNvPr id="14" name="Text 12"/>
+          <p:cNvSpPr txBox="1"/>
+          <p:nvPr/>
+        </p:nvSpPr>
+        <p:spPr>
+          <a:xfrm>
+            <a:off x="4626864" y="2103120"/>
+            <a:ext cx="2011680" cy="1371600"/>
+          </a:xfrm>
+          <a:prstGeom prst="rect">
+            <a:avLst/>
+          </a:prstGeom>
+          <a:noFill/>
+          <a:ln/>
+        </p:spPr>
+        <p:txBody>
+          <a:bodyPr wrap="square" lIns="0" tIns="0" rIns="0" bIns="0" rtlCol="0" anchor="t"/>
+          <a:lstStyle/>
+          <a:p>
+            <a:pPr marL="0" indent="0" algn="ctr">
+              <a:buNone/>
+            </a:pPr>
+            <a:r>
+              <a:rPr lang="en-US" sz="1200" dirty="0">
+                <a:solidFill>
+                  <a:srgbClr val="5B6B7A"/>
+                </a:solidFill>
+              </a:rPr>
+              <a:t>Mêmes formules que le notebook : âge, surface par étage, distance au centre-ville</a:t>
+            </a:r>
+            <a:endParaRPr lang="en-US" sz="1200" dirty="0"/>
+          </a:p>
+        </p:txBody>
+      </p:sp>
+      <p:sp>
+        <p:nvSpPr>
+          <p:cNvPr id="15" name="Shape 13"/>
+          <p:cNvSpPr/>
+          <p:nvPr/>
+        </p:nvSpPr>
+        <p:spPr>
+          <a:xfrm>
+            <a:off x="7488936" y="1143000"/>
+            <a:ext cx="457200" cy="457200"/>
+          </a:xfrm>
+          <a:prstGeom prst="ellipse">
+            <a:avLst/>
+          </a:prstGeom>
+          <a:solidFill>
+            <a:srgbClr val="D1495B"/>
+          </a:solidFill>
+          <a:ln w="12700">
+            <a:solidFill>
+              <a:srgbClr val="D1495B"/>
+            </a:solidFill>
+            <a:prstDash val="solid"/>
+          </a:ln>
+        </p:spPr>
+        <p:txBody>
+          <a:bodyPr/>
+          <a:lstStyle/>
+          <a:p>
+            <a:endParaRPr lang="fr-FR"/>
+          </a:p>
+        </p:txBody>
+      </p:sp>
+      <p:sp>
+        <p:nvSpPr>
+          <p:cNvPr id="16" name="Text 14"/>
+          <p:cNvSpPr txBox="1"/>
+          <p:nvPr/>
+        </p:nvSpPr>
+        <p:spPr>
+          <a:xfrm>
+            <a:off x="7488936" y="1143000"/>
+            <a:ext cx="457200" cy="457200"/>
+          </a:xfrm>
+          <a:prstGeom prst="rect">
+            <a:avLst/>
+          </a:prstGeom>
+          <a:noFill/>
+          <a:ln/>
+        </p:spPr>
+        <p:txBody>
+          <a:bodyPr wrap="square" lIns="0" tIns="0" rIns="0" bIns="0" rtlCol="0" anchor="ctr"/>
+          <a:lstStyle/>
+          <a:p>
+            <a:pPr marL="0" indent="0" algn="ctr">
+              <a:buNone/>
+            </a:pPr>
+            <a:r>
+              <a:rPr lang="en-US" sz="1600" b="1" dirty="0">
+                <a:solidFill>
+                  <a:srgbClr val="FFFFFF"/>
+                </a:solidFill>
+              </a:rPr>
+              <a:t>4</a:t>
+            </a:r>
+            <a:endParaRPr lang="en-US" sz="1600" dirty="0"/>
+          </a:p>
+        </p:txBody>
+      </p:sp>
+      <p:sp>
+        <p:nvSpPr>
+          <p:cNvPr id="17" name="Text 15"/>
+          <p:cNvSpPr txBox="1"/>
+          <p:nvPr/>
+        </p:nvSpPr>
+        <p:spPr>
+          <a:xfrm>
+            <a:off x="6711696" y="1737360"/>
+            <a:ext cx="2011680" cy="320040"/>
+          </a:xfrm>
+          <a:prstGeom prst="rect">
+            <a:avLst/>
+          </a:prstGeom>
+          <a:noFill/>
+          <a:ln/>
+        </p:spPr>
+        <p:txBody>
+          <a:bodyPr wrap="square" lIns="0" tIns="0" rIns="0" bIns="0" rtlCol="0" anchor="ctr"/>
+          <a:lstStyle/>
+          <a:p>
+            <a:pPr marL="0" indent="0" algn="ctr">
+              <a:buNone/>
+            </a:pPr>
+            <a:r>
+              <a:rPr lang="en-US" sz="1400" b="1" dirty="0">
+                <a:solidFill>
+                  <a:schemeClr val="tx1"/>
+                </a:solidFill>
+              </a:rPr>
+              <a:t>Deux modèles</a:t>
+            </a:r>
+            <a:endParaRPr lang="en-US" sz="1400" dirty="0"/>
+          </a:p>
+        </p:txBody>
+      </p:sp>
+      <p:sp>
+        <p:nvSpPr>
+          <p:cNvPr id="18" name="Text 16"/>
+          <p:cNvSpPr txBox="1"/>
+          <p:nvPr/>
+        </p:nvSpPr>
+        <p:spPr>
+          <a:xfrm>
+            <a:off x="6711696" y="2103120"/>
+            <a:ext cx="2011680" cy="1371600"/>
+          </a:xfrm>
+          <a:prstGeom prst="rect">
+            <a:avLst/>
+          </a:prstGeom>
+          <a:noFill/>
+          <a:ln/>
+        </p:spPr>
+        <p:txBody>
+          <a:bodyPr wrap="square" lIns="0" tIns="0" rIns="0" bIns="0" rtlCol="0" anchor="t"/>
+          <a:lstStyle/>
+          <a:p>
+            <a:pPr marL="0" indent="0" algn="ctr">
+              <a:buNone/>
+            </a:pPr>
+            <a:r>
+              <a:rPr lang="en-US" sz="1200" dirty="0">
+                <a:solidFill>
+                  <a:srgbClr val="5B6B7A"/>
+                </a:solidFill>
+              </a:rPr>
+              <a:t>Random Forest énergie et CO2 : réponse JSON en une seule requête</a:t>
+            </a:r>
+            <a:endParaRPr lang="en-US" sz="1200" dirty="0"/>
+          </a:p>
+        </p:txBody>
+      </p:sp>
+      <p:sp>
+        <p:nvSpPr>
+          <p:cNvPr id="19" name="Shape 17"/>
+          <p:cNvSpPr/>
+          <p:nvPr/>
+        </p:nvSpPr>
+        <p:spPr>
+          <a:xfrm>
+            <a:off x="457200" y="3657600"/>
+            <a:ext cx="8229600" cy="822960"/>
+          </a:xfrm>
+          <a:prstGeom prst="rect">
+            <a:avLst/>
           </a:prstGeom>
           <a:solidFill>
             <a:srgbClr val="F2F6F5"/>
           </a:solidFill>
           <a:ln w="9525">
             <a:solidFill>
-              <a:srgbClr val="CFDDD9"/>
+              <a:srgbClr val="DDE6E3"/>
             </a:solidFill>
             <a:prstDash val="solid"/>
           </a:ln>
@@ -12551,14 +12414,14 @@
       </p:sp>
       <p:sp>
         <p:nvSpPr>
-          <p:cNvPr id="7" name="Text 5"/>
+          <p:cNvPr id="20" name="Text 18"/>
           <p:cNvSpPr txBox="1"/>
           <p:nvPr/>
         </p:nvSpPr>
         <p:spPr>
           <a:xfrm>
-            <a:off x="2157984" y="1280160"/>
-            <a:ext cx="1463040" cy="457200"/>
+            <a:off x="640080" y="3703320"/>
+            <a:ext cx="7863840" cy="731520"/>
           </a:xfrm>
           <a:prstGeom prst="rect">
             <a:avLst/>
@@ -12570,430 +12433,18 @@
           <a:bodyPr wrap="square" lIns="0" tIns="0" rIns="0" bIns="0" rtlCol="0" anchor="ctr"/>
           <a:lstStyle/>
           <a:p>
-            <a:pPr marL="0" indent="0" algn="ctr">
+            <a:pPr marL="0" indent="0">
               <a:buNone/>
             </a:pPr>
             <a:r>
-              <a:rPr lang="en-US" sz="1400" b="1" dirty="0">
-                <a:solidFill>
-                  <a:srgbClr val="1B7F79"/>
-                </a:solidFill>
-              </a:rPr>
-              <a:t>Service</a:t>
-            </a:r>
-            <a:endParaRPr lang="en-US" sz="1400" dirty="0"/>
-          </a:p>
-        </p:txBody>
-      </p:sp>
-      <p:sp>
-        <p:nvSpPr>
-          <p:cNvPr id="8" name="Text 6"/>
-          <p:cNvSpPr txBox="1"/>
-          <p:nvPr/>
-        </p:nvSpPr>
-        <p:spPr>
-          <a:xfrm>
-            <a:off x="2176272" y="1783080"/>
-            <a:ext cx="1417320" cy="1234440"/>
-          </a:xfrm>
-          <a:prstGeom prst="rect">
-            <a:avLst/>
-          </a:prstGeom>
-          <a:noFill/>
-          <a:ln/>
-        </p:spPr>
-        <p:txBody>
-          <a:bodyPr wrap="square" lIns="0" tIns="0" rIns="0" bIns="0" rtlCol="0" anchor="t"/>
-          <a:lstStyle/>
-          <a:p>
-            <a:pPr marL="0" indent="0" algn="ctr">
-              <a:buNone/>
-            </a:pPr>
-            <a:r>
-              <a:rPr lang="en-US" sz="1200" dirty="0">
-                <a:solidFill>
-                  <a:srgbClr val="5B6B7A"/>
-                </a:solidFill>
-              </a:rPr>
-              <a:t>service.py : classe BentoML, endpoint /predict, validation Pydantic</a:t>
-            </a:r>
-            <a:endParaRPr lang="en-US" sz="1200" dirty="0"/>
-          </a:p>
-        </p:txBody>
-      </p:sp>
-      <p:sp>
-        <p:nvSpPr>
-          <p:cNvPr id="9" name="Shape 7"/>
-          <p:cNvSpPr/>
-          <p:nvPr/>
-        </p:nvSpPr>
-        <p:spPr>
-          <a:xfrm>
-            <a:off x="3803904" y="1188720"/>
-            <a:ext cx="1600200" cy="1920240"/>
-          </a:xfrm>
-          <a:prstGeom prst="roundRect">
-            <a:avLst>
-              <a:gd name="adj" fmla="val 5714"/>
-            </a:avLst>
-          </a:prstGeom>
-          <a:solidFill>
-            <a:srgbClr val="E3F0EE"/>
-          </a:solidFill>
-          <a:ln w="9525">
-            <a:solidFill>
-              <a:srgbClr val="CFDDD9"/>
-            </a:solidFill>
-            <a:prstDash val="solid"/>
-          </a:ln>
-        </p:spPr>
-        <p:txBody>
-          <a:bodyPr/>
-          <a:lstStyle/>
-          <a:p>
-            <a:endParaRPr lang="fr-FR"/>
-          </a:p>
-        </p:txBody>
-      </p:sp>
-      <p:sp>
-        <p:nvSpPr>
-          <p:cNvPr id="10" name="Text 8"/>
-          <p:cNvSpPr txBox="1"/>
-          <p:nvPr/>
-        </p:nvSpPr>
-        <p:spPr>
-          <a:xfrm>
-            <a:off x="3877056" y="1280160"/>
-            <a:ext cx="1463040" cy="457200"/>
-          </a:xfrm>
-          <a:prstGeom prst="rect">
-            <a:avLst/>
-          </a:prstGeom>
-          <a:noFill/>
-          <a:ln/>
-        </p:spPr>
-        <p:txBody>
-          <a:bodyPr wrap="square" lIns="0" tIns="0" rIns="0" bIns="0" rtlCol="0" anchor="ctr"/>
-          <a:lstStyle/>
-          <a:p>
-            <a:pPr marL="0" indent="0" algn="ctr">
-              <a:buNone/>
-            </a:pPr>
-            <a:r>
-              <a:rPr lang="en-US" sz="1400" b="1" dirty="0">
-                <a:solidFill>
-                  <a:srgbClr val="1B7F79"/>
-                </a:solidFill>
-              </a:rPr>
-              <a:t>Lancement</a:t>
-            </a:r>
-            <a:endParaRPr lang="en-US" sz="1400" dirty="0"/>
-          </a:p>
-        </p:txBody>
-      </p:sp>
-      <p:sp>
-        <p:nvSpPr>
-          <p:cNvPr id="11" name="Text 9"/>
-          <p:cNvSpPr txBox="1"/>
-          <p:nvPr/>
-        </p:nvSpPr>
-        <p:spPr>
-          <a:xfrm>
-            <a:off x="3895344" y="1783080"/>
-            <a:ext cx="1417320" cy="1234440"/>
-          </a:xfrm>
-          <a:prstGeom prst="rect">
-            <a:avLst/>
-          </a:prstGeom>
-          <a:noFill/>
-          <a:ln/>
-        </p:spPr>
-        <p:txBody>
-          <a:bodyPr wrap="square" lIns="0" tIns="0" rIns="0" bIns="0" rtlCol="0" anchor="t"/>
-          <a:lstStyle/>
-          <a:p>
-            <a:pPr marL="0" indent="0" algn="ctr">
-              <a:buNone/>
-            </a:pPr>
-            <a:r>
-              <a:rPr lang="en-US" sz="1200" dirty="0">
-                <a:solidFill>
-                  <a:srgbClr val="5B6B7A"/>
-                </a:solidFill>
-              </a:rPr>
-              <a:t>bentoml serve : API sur le port 3000, Swagger à la racine</a:t>
-            </a:r>
-            <a:endParaRPr lang="en-US" sz="1200" dirty="0"/>
-          </a:p>
-        </p:txBody>
-      </p:sp>
-      <p:sp>
-        <p:nvSpPr>
-          <p:cNvPr id="12" name="Shape 10"/>
-          <p:cNvSpPr/>
-          <p:nvPr/>
-        </p:nvSpPr>
-        <p:spPr>
-          <a:xfrm>
-            <a:off x="5522976" y="1188720"/>
-            <a:ext cx="1600200" cy="1920240"/>
-          </a:xfrm>
-          <a:prstGeom prst="roundRect">
-            <a:avLst>
-              <a:gd name="adj" fmla="val 5714"/>
-            </a:avLst>
-          </a:prstGeom>
-          <a:solidFill>
-            <a:srgbClr val="F2F6F5"/>
-          </a:solidFill>
-          <a:ln w="9525">
-            <a:solidFill>
-              <a:srgbClr val="CFDDD9"/>
-            </a:solidFill>
-            <a:prstDash val="solid"/>
-          </a:ln>
-        </p:spPr>
-        <p:txBody>
-          <a:bodyPr/>
-          <a:lstStyle/>
-          <a:p>
-            <a:endParaRPr lang="fr-FR"/>
-          </a:p>
-        </p:txBody>
-      </p:sp>
-      <p:sp>
-        <p:nvSpPr>
-          <p:cNvPr id="13" name="Text 11"/>
-          <p:cNvSpPr txBox="1"/>
-          <p:nvPr/>
-        </p:nvSpPr>
-        <p:spPr>
-          <a:xfrm>
-            <a:off x="5596128" y="1280160"/>
-            <a:ext cx="1463040" cy="457200"/>
-          </a:xfrm>
-          <a:prstGeom prst="rect">
-            <a:avLst/>
-          </a:prstGeom>
-          <a:noFill/>
-          <a:ln/>
-        </p:spPr>
-        <p:txBody>
-          <a:bodyPr wrap="square" lIns="0" tIns="0" rIns="0" bIns="0" rtlCol="0" anchor="ctr"/>
-          <a:lstStyle/>
-          <a:p>
-            <a:pPr marL="0" indent="0" algn="ctr">
-              <a:buNone/>
-            </a:pPr>
-            <a:r>
-              <a:rPr lang="en-US" sz="1400" b="1" dirty="0">
-                <a:solidFill>
-                  <a:srgbClr val="1B7F79"/>
-                </a:solidFill>
-              </a:rPr>
-              <a:t>Tests</a:t>
-            </a:r>
-            <a:endParaRPr lang="en-US" sz="1400" dirty="0"/>
-          </a:p>
-        </p:txBody>
-      </p:sp>
-      <p:sp>
-        <p:nvSpPr>
-          <p:cNvPr id="14" name="Text 12"/>
-          <p:cNvSpPr txBox="1"/>
-          <p:nvPr/>
-        </p:nvSpPr>
-        <p:spPr>
-          <a:xfrm>
-            <a:off x="5614416" y="1783080"/>
-            <a:ext cx="1417320" cy="1234440"/>
-          </a:xfrm>
-          <a:prstGeom prst="rect">
-            <a:avLst/>
-          </a:prstGeom>
-          <a:noFill/>
-          <a:ln/>
-        </p:spPr>
-        <p:txBody>
-          <a:bodyPr wrap="square" lIns="0" tIns="0" rIns="0" bIns="0" rtlCol="0" anchor="t"/>
-          <a:lstStyle/>
-          <a:p>
-            <a:pPr marL="0" indent="0" algn="ctr">
-              <a:buNone/>
-            </a:pPr>
-            <a:r>
-              <a:rPr lang="en-US" sz="1200" dirty="0">
-                <a:solidFill>
-                  <a:srgbClr val="5B6B7A"/>
-                </a:solidFill>
-              </a:rPr>
-              <a:t>Requêtes valides (200) et incohérentes (400), via Swagger</a:t>
-            </a:r>
-            <a:endParaRPr lang="en-US" sz="1200" dirty="0"/>
-          </a:p>
-        </p:txBody>
-      </p:sp>
-      <p:sp>
-        <p:nvSpPr>
-          <p:cNvPr id="15" name="Shape 13"/>
-          <p:cNvSpPr/>
-          <p:nvPr/>
-        </p:nvSpPr>
-        <p:spPr>
-          <a:xfrm>
-            <a:off x="7242048" y="1188720"/>
-            <a:ext cx="1600200" cy="1920240"/>
-          </a:xfrm>
-          <a:prstGeom prst="roundRect">
-            <a:avLst>
-              <a:gd name="adj" fmla="val 5714"/>
-            </a:avLst>
-          </a:prstGeom>
-          <a:solidFill>
-            <a:srgbClr val="E3F0EE"/>
-          </a:solidFill>
-          <a:ln w="9525">
-            <a:solidFill>
-              <a:srgbClr val="CFDDD9"/>
-            </a:solidFill>
-            <a:prstDash val="solid"/>
-          </a:ln>
-        </p:spPr>
-        <p:txBody>
-          <a:bodyPr/>
-          <a:lstStyle/>
-          <a:p>
-            <a:endParaRPr lang="fr-FR"/>
-          </a:p>
-        </p:txBody>
-      </p:sp>
-      <p:sp>
-        <p:nvSpPr>
-          <p:cNvPr id="16" name="Text 14"/>
-          <p:cNvSpPr txBox="1"/>
-          <p:nvPr/>
-        </p:nvSpPr>
-        <p:spPr>
-          <a:xfrm>
-            <a:off x="7315200" y="1280160"/>
-            <a:ext cx="1463040" cy="457200"/>
-          </a:xfrm>
-          <a:prstGeom prst="rect">
-            <a:avLst/>
-          </a:prstGeom>
-          <a:noFill/>
-          <a:ln/>
-        </p:spPr>
-        <p:txBody>
-          <a:bodyPr wrap="square" lIns="0" tIns="0" rIns="0" bIns="0" rtlCol="0" anchor="ctr"/>
-          <a:lstStyle/>
-          <a:p>
-            <a:pPr marL="0" indent="0" algn="ctr">
-              <a:buNone/>
-            </a:pPr>
-            <a:r>
-              <a:rPr lang="en-US" sz="1400" b="1" dirty="0">
-                <a:solidFill>
-                  <a:srgbClr val="1B7F79"/>
-                </a:solidFill>
-              </a:rPr>
-              <a:t>Formulaire</a:t>
-            </a:r>
-            <a:endParaRPr lang="en-US" sz="1400" dirty="0"/>
-          </a:p>
-        </p:txBody>
-      </p:sp>
-      <p:sp>
-        <p:nvSpPr>
-          <p:cNvPr id="17" name="Text 15"/>
-          <p:cNvSpPr txBox="1"/>
-          <p:nvPr/>
-        </p:nvSpPr>
-        <p:spPr>
-          <a:xfrm>
-            <a:off x="7333488" y="1783080"/>
-            <a:ext cx="1417320" cy="1234440"/>
-          </a:xfrm>
-          <a:prstGeom prst="rect">
-            <a:avLst/>
-          </a:prstGeom>
-          <a:noFill/>
-          <a:ln/>
-        </p:spPr>
-        <p:txBody>
-          <a:bodyPr wrap="square" lIns="0" tIns="0" rIns="0" bIns="0" rtlCol="0" anchor="t"/>
-          <a:lstStyle/>
-          <a:p>
-            <a:pPr marL="0" indent="0" algn="ctr">
-              <a:buNone/>
-            </a:pPr>
-            <a:r>
-              <a:rPr lang="en-US" sz="1200" dirty="0">
-                <a:solidFill>
-                  <a:srgbClr val="5B6B7A"/>
-                </a:solidFill>
-              </a:rPr>
-              <a:t>Page web en français servie par le même service</a:t>
-            </a:r>
-            <a:endParaRPr lang="en-US" sz="1200" dirty="0"/>
-          </a:p>
-        </p:txBody>
-      </p:sp>
-      <p:sp>
-        <p:nvSpPr>
-          <p:cNvPr id="18" name="Text 16"/>
-          <p:cNvSpPr txBox="1"/>
-          <p:nvPr/>
-        </p:nvSpPr>
-        <p:spPr>
-          <a:xfrm>
-            <a:off x="457200" y="3383280"/>
-            <a:ext cx="8229600" cy="1188720"/>
-          </a:xfrm>
-          <a:prstGeom prst="rect">
-            <a:avLst/>
-          </a:prstGeom>
-          <a:noFill/>
-          <a:ln/>
-        </p:spPr>
-        <p:txBody>
-          <a:bodyPr wrap="square" lIns="0" tIns="0" rIns="0" bIns="0" rtlCol="0" anchor="t"/>
-          <a:lstStyle/>
-          <a:p>
-            <a:pPr marL="342900" indent="-342900">
-              <a:spcAft>
-                <a:spcPts val="800"/>
-              </a:spcAft>
-              <a:buSzPct val="100000"/>
-              <a:buChar char="•"/>
-            </a:pPr>
-            <a:r>
-              <a:rPr lang="en-US" sz="1400" dirty="0">
-                <a:solidFill>
-                  <a:schemeClr val="tx1"/>
-                </a:solidFill>
-              </a:rPr>
-              <a:t>Les versions des bibliothèques sont épinglées dans bentofile.yaml (scikit-learn 1.9.1…) : le modèle doit être relu par la version qui l'a sauvegardé</a:t>
-            </a:r>
-            <a:endParaRPr lang="en-US" sz="1400" dirty="0"/>
-          </a:p>
-          <a:p>
-            <a:pPr marL="342900" indent="-342900">
-              <a:spcAft>
-                <a:spcPts val="800"/>
-              </a:spcAft>
-              <a:buSzPct val="100000"/>
-              <a:buChar char="•"/>
-            </a:pPr>
-            <a:r>
-              <a:rPr lang="en-US" sz="1400" dirty="0">
-                <a:solidFill>
-                  <a:schemeClr val="tx1"/>
-                </a:solidFill>
-              </a:rPr>
-              <a:t>bentofile.yaml ne liste que le nécessaire (service, page HTML, dépendances) pour garder l'image Docker légère</a:t>
-            </a:r>
-            <a:endParaRPr lang="en-US" sz="1400" dirty="0"/>
+              <a:rPr lang="en-US" sz="1300" dirty="0">
+                <a:solidFill>
+                  <a:srgbClr val="12263A"/>
+                </a:solidFill>
+              </a:rPr>
+              <a:t>Un seul endpoint POST /predict. Les modèles et l'ordre exact des variables sont sauvegardés ensemble dans le Model Store de BentoML (pas de Runner, concept archivé).</a:t>
+            </a:r>
+            <a:endParaRPr lang="en-US" sz="1300" dirty="0"/>
           </a:p>
         </p:txBody>
       </p:sp>
@@ -13017,7 +12468,7 @@
           </a:prstGeom>
           <a:extLst>
             <a:ext uri="{C572A759-6A51-4108-AA02-DFA0A04FC94B}">
-              <ma14:wrappingTextBoxFlag xmlns:ma14="http://schemas.microsoft.com/office/mac/drawingml/2011/main" xmlns="" val="0"/>
+              <ma14:wrappingTextBoxFlag xmlns="" xmlns:ma14="http://schemas.microsoft.com/office/mac/drawingml/2011/main" val="0"/>
             </a:ext>
           </a:extLst>
         </p:spPr>
@@ -13100,56 +12551,7 @@
                 <a:ea typeface="Georgia" pitchFamily="34" charset="-122"/>
                 <a:cs typeface="Georgia" pitchFamily="34" charset="-120"/>
               </a:rPr>
-              <a:t>Un </a:t>
-            </a:r>
-            <a:r>
-              <a:rPr lang="en-US" sz="2400" b="1" dirty="0" err="1">
-                <a:solidFill>
-                  <a:schemeClr val="tx1"/>
-                </a:solidFill>
-                <a:latin typeface="Georgia" pitchFamily="34" charset="0"/>
-                <a:ea typeface="Georgia" pitchFamily="34" charset="-122"/>
-                <a:cs typeface="Georgia" pitchFamily="34" charset="-120"/>
-              </a:rPr>
-              <a:t>formulaire</a:t>
-            </a:r>
-            <a:r>
-              <a:rPr lang="en-US" sz="2400" b="1" dirty="0">
-                <a:solidFill>
-                  <a:schemeClr val="tx1"/>
-                </a:solidFill>
-                <a:latin typeface="Georgia" pitchFamily="34" charset="0"/>
-                <a:ea typeface="Georgia" pitchFamily="34" charset="-122"/>
-                <a:cs typeface="Georgia" pitchFamily="34" charset="-120"/>
-              </a:rPr>
-              <a:t> </a:t>
-            </a:r>
-            <a:r>
-              <a:rPr lang="en-US" sz="2400" b="1" dirty="0">
-                <a:latin typeface="Georgia" pitchFamily="34" charset="0"/>
-                <a:ea typeface="Georgia" pitchFamily="34" charset="-122"/>
-                <a:cs typeface="Georgia" pitchFamily="34" charset="-120"/>
-              </a:rPr>
-              <a:t>qui </a:t>
-            </a:r>
-            <a:r>
-              <a:rPr lang="en-US" sz="2400" b="1" dirty="0">
-                <a:solidFill>
-                  <a:schemeClr val="tx1"/>
-                </a:solidFill>
-                <a:latin typeface="Georgia" pitchFamily="34" charset="0"/>
-                <a:ea typeface="Georgia" pitchFamily="34" charset="-122"/>
-                <a:cs typeface="Georgia" pitchFamily="34" charset="-120"/>
-              </a:rPr>
-              <a:t>rend le modèle utilisable par </a:t>
-            </a:r>
-            <a:r>
-              <a:rPr lang="en-US" sz="2400" b="1" dirty="0">
-                <a:latin typeface="Georgia" pitchFamily="34" charset="0"/>
-                <a:ea typeface="Georgia" pitchFamily="34" charset="-122"/>
-                <a:cs typeface="Georgia" pitchFamily="34" charset="-120"/>
-              </a:rPr>
-              <a:t>le métier</a:t>
+              <a:t>La validation Pydantic empêche d'envoyer des informations incohérentes</a:t>
             </a:r>
             <a:endParaRPr lang="en-US" sz="2400" dirty="0"/>
           </a:p>
@@ -13157,14 +12559,14 @@
       </p:sp>
       <p:sp>
         <p:nvSpPr>
-          <p:cNvPr id="4" name="Shape 1"/>
+          <p:cNvPr id="3" name="f1 fond"/>
           <p:cNvSpPr/>
           <p:nvPr/>
         </p:nvSpPr>
         <p:spPr>
           <a:xfrm>
-            <a:off x="6126480" y="1097280"/>
-            <a:ext cx="2560320" cy="1005840"/>
+            <a:off x="457200" y="1097280"/>
+            <a:ext cx="2651760" cy="1188720"/>
           </a:xfrm>
           <a:prstGeom prst="rect">
             <a:avLst/>
@@ -13189,14 +12591,46 @@
       </p:sp>
       <p:sp>
         <p:nvSpPr>
-          <p:cNvPr id="5" name="Text 2"/>
+          <p:cNvPr id="4" name="f1 puce"/>
+          <p:cNvSpPr/>
+          <p:nvPr/>
+        </p:nvSpPr>
+        <p:spPr>
+          <a:xfrm>
+            <a:off x="594360" y="1234440"/>
+            <a:ext cx="128016" cy="128016"/>
+          </a:xfrm>
+          <a:prstGeom prst="ellipse">
+            <a:avLst/>
+          </a:prstGeom>
+          <a:solidFill>
+            <a:srgbClr val="1B7F79"/>
+          </a:solidFill>
+          <a:ln w="12700">
+            <a:solidFill>
+              <a:srgbClr val="1B7F79"/>
+            </a:solidFill>
+            <a:prstDash val="solid"/>
+          </a:ln>
+        </p:spPr>
+        <p:txBody>
+          <a:bodyPr/>
+          <a:lstStyle/>
+          <a:p>
+            <a:endParaRPr lang="fr-FR"/>
+          </a:p>
+        </p:txBody>
+      </p:sp>
+      <p:sp>
+        <p:nvSpPr>
+          <p:cNvPr id="5" name="Text 3"/>
           <p:cNvSpPr txBox="1"/>
           <p:nvPr/>
         </p:nvSpPr>
         <p:spPr>
           <a:xfrm>
-            <a:off x="6126480" y="1485900"/>
-            <a:ext cx="2560320" cy="502920"/>
+            <a:off x="804672" y="1170432"/>
+            <a:ext cx="2194560" cy="274320"/>
           </a:xfrm>
           <a:prstGeom prst="rect">
             <a:avLst/>
@@ -13208,34 +12642,31 @@
           <a:bodyPr wrap="square" lIns="0" tIns="0" rIns="0" bIns="0" rtlCol="0" anchor="ctr"/>
           <a:lstStyle/>
           <a:p>
-            <a:pPr marL="0" indent="0" algn="ctr">
+            <a:pPr marL="0" indent="0">
               <a:buNone/>
             </a:pPr>
             <a:r>
-              <a:rPr lang="fr-FR" sz="1600" b="1" dirty="0">
-                <a:solidFill>
-                  <a:srgbClr val="1B7F79"/>
-                </a:solidFill>
-                <a:latin typeface="Georgia" pitchFamily="34" charset="0"/>
-                <a:ea typeface="Georgia" pitchFamily="34" charset="-122"/>
-                <a:cs typeface="Georgia" pitchFamily="34" charset="-120"/>
-              </a:rPr>
-              <a:t>l'énergie et le CO2 ensemble</a:t>
-            </a:r>
-            <a:endParaRPr lang="en-US" sz="1600" dirty="0"/>
-          </a:p>
-        </p:txBody>
-      </p:sp>
-      <p:sp>
-        <p:nvSpPr>
-          <p:cNvPr id="6" name="Text 3"/>
+              <a:rPr lang="en-US" sz="1400" b="1" dirty="0">
+                <a:solidFill>
+                  <a:schemeClr val="tx1"/>
+                </a:solidFill>
+              </a:rPr>
+              <a:t>Année et étages</a:t>
+            </a:r>
+            <a:endParaRPr lang="en-US" sz="1400" dirty="0"/>
+          </a:p>
+        </p:txBody>
+      </p:sp>
+      <p:sp>
+        <p:nvSpPr>
+          <p:cNvPr id="6" name="Text 4"/>
           <p:cNvSpPr txBox="1"/>
           <p:nvPr/>
         </p:nvSpPr>
         <p:spPr>
           <a:xfrm>
-            <a:off x="6058647" y="1188720"/>
-            <a:ext cx="2695986" cy="365760"/>
+            <a:off x="594360" y="1508760"/>
+            <a:ext cx="2377440" cy="731520"/>
           </a:xfrm>
           <a:prstGeom prst="rect">
             <a:avLst/>
@@ -13247,7 +12678,7 @@
           <a:bodyPr wrap="square" lIns="0" tIns="0" rIns="0" bIns="0" rtlCol="0" anchor="t"/>
           <a:lstStyle/>
           <a:p>
-            <a:pPr marL="0" indent="0" algn="ctr">
+            <a:pPr marL="0" indent="0">
               <a:buNone/>
             </a:pPr>
             <a:r>
@@ -13256,39 +12687,33 @@
                   <a:srgbClr val="5B6B7A"/>
                 </a:solidFill>
               </a:rPr>
-              <a:t>Le </a:t>
-            </a:r>
-            <a:r>
-              <a:rPr lang="en-US" sz="1200" dirty="0" err="1">
+              <a:t>Année de 1900 à 2016 ; </a:t>
+            </a:r>
+          </a:p>
+          <a:p>
+            <a:pPr marL="0" indent="0">
+              <a:buNone/>
+            </a:pPr>
+            <a:r>
+              <a:rPr lang="en-US" sz="1200" dirty="0">
                 <a:solidFill>
                   <a:srgbClr val="5B6B7A"/>
                 </a:solidFill>
               </a:rPr>
-              <a:t>lancement</a:t>
-            </a:r>
+              <a:t>1 à 80 étages</a:t>
+            </a:r>
+          </a:p>
+          <a:p>
+            <a:pPr marL="0" indent="0">
+              <a:buNone/>
+            </a:pPr>
             <a:r>
               <a:rPr lang="en-US" sz="1200" dirty="0">
                 <a:solidFill>
                   <a:srgbClr val="5B6B7A"/>
                 </a:solidFill>
               </a:rPr>
-              <a:t> </a:t>
-            </a:r>
-            <a:r>
-              <a:rPr lang="en-US" sz="1200" dirty="0" err="1">
-                <a:solidFill>
-                  <a:srgbClr val="5B6B7A"/>
-                </a:solidFill>
-              </a:rPr>
-              <a:t>d’une</a:t>
-            </a:r>
-            <a:r>
-              <a:rPr lang="en-US" sz="1200" dirty="0">
-                <a:solidFill>
-                  <a:srgbClr val="5B6B7A"/>
-                </a:solidFill>
-              </a:rPr>
-              <a:t> estimation propose</a:t>
+              <a:t>1 à 30 bâtiments</a:t>
             </a:r>
             <a:endParaRPr lang="en-US" sz="1200" dirty="0"/>
           </a:p>
@@ -13296,14 +12721,14 @@
       </p:sp>
       <p:sp>
         <p:nvSpPr>
-          <p:cNvPr id="7" name="Shape 4"/>
+          <p:cNvPr id="7" name="f2 fond"/>
           <p:cNvSpPr/>
           <p:nvPr/>
         </p:nvSpPr>
         <p:spPr>
           <a:xfrm>
-            <a:off x="6126480" y="2286000"/>
-            <a:ext cx="2560320" cy="1005840"/>
+            <a:off x="3246120" y="1097280"/>
+            <a:ext cx="2651760" cy="1188720"/>
           </a:xfrm>
           <a:prstGeom prst="rect">
             <a:avLst/>
@@ -13328,14 +12753,46 @@
       </p:sp>
       <p:sp>
         <p:nvSpPr>
-          <p:cNvPr id="8" name="Text 5"/>
+          <p:cNvPr id="8" name="f2 puce"/>
+          <p:cNvSpPr/>
+          <p:nvPr/>
+        </p:nvSpPr>
+        <p:spPr>
+          <a:xfrm>
+            <a:off x="3383280" y="1234440"/>
+            <a:ext cx="128016" cy="128016"/>
+          </a:xfrm>
+          <a:prstGeom prst="ellipse">
+            <a:avLst/>
+          </a:prstGeom>
+          <a:solidFill>
+            <a:srgbClr val="6C8EAD"/>
+          </a:solidFill>
+          <a:ln w="12700">
+            <a:solidFill>
+              <a:srgbClr val="6C8EAD"/>
+            </a:solidFill>
+            <a:prstDash val="solid"/>
+          </a:ln>
+        </p:spPr>
+        <p:txBody>
+          <a:bodyPr/>
+          <a:lstStyle/>
+          <a:p>
+            <a:endParaRPr lang="fr-FR"/>
+          </a:p>
+        </p:txBody>
+      </p:sp>
+      <p:sp>
+        <p:nvSpPr>
+          <p:cNvPr id="9" name="Text 7"/>
           <p:cNvSpPr txBox="1"/>
           <p:nvPr/>
         </p:nvSpPr>
         <p:spPr>
           <a:xfrm>
-            <a:off x="6126480" y="2359152"/>
-            <a:ext cx="2560320" cy="502920"/>
+            <a:off x="3593592" y="1170432"/>
+            <a:ext cx="2194560" cy="274320"/>
           </a:xfrm>
           <a:prstGeom prst="rect">
             <a:avLst/>
@@ -13345,108 +12802,33 @@
         </p:spPr>
         <p:txBody>
           <a:bodyPr wrap="square" lIns="0" tIns="0" rIns="0" bIns="0" rtlCol="0" anchor="ctr"/>
-          <a:lstStyle/>
-          <a:p>
-            <a:pPr marL="0" indent="0" algn="ctr">
-              <a:buNone/>
-            </a:pPr>
-            <a:r>
-              <a:rPr lang="en-US" sz="2800" b="1" dirty="0">
-                <a:solidFill>
-                  <a:srgbClr val="F2A541"/>
-                </a:solidFill>
-                <a:latin typeface="Georgia" pitchFamily="34" charset="0"/>
-                <a:ea typeface="Georgia" pitchFamily="34" charset="-122"/>
-                <a:cs typeface="Georgia" pitchFamily="34" charset="-120"/>
-              </a:rPr>
-              <a:t>pi² ou m²</a:t>
-            </a:r>
-            <a:endParaRPr lang="en-US" sz="2800" dirty="0"/>
-          </a:p>
-        </p:txBody>
-      </p:sp>
-      <p:sp>
-        <p:nvSpPr>
-          <p:cNvPr id="9" name="Text 6"/>
-          <p:cNvSpPr txBox="1"/>
-          <p:nvPr/>
-        </p:nvSpPr>
-        <p:spPr>
-          <a:xfrm>
-            <a:off x="6217920" y="2880360"/>
-            <a:ext cx="2377440" cy="365760"/>
-          </a:xfrm>
-          <a:prstGeom prst="rect">
-            <a:avLst/>
-          </a:prstGeom>
-          <a:noFill/>
-          <a:ln/>
-        </p:spPr>
-        <p:txBody>
-          <a:bodyPr wrap="square" lIns="0" tIns="0" rIns="0" bIns="0" rtlCol="0" anchor="t"/>
-          <a:lstStyle/>
-          <a:p>
-            <a:pPr marL="0" indent="0" algn="ctr">
-              <a:buNone/>
-            </a:pPr>
-            <a:r>
-              <a:rPr lang="en-US" sz="1200" dirty="0">
-                <a:solidFill>
-                  <a:srgbClr val="5B6B7A"/>
-                </a:solidFill>
-              </a:rPr>
-              <a:t>position GPS pré-remplie par quartier</a:t>
-            </a:r>
-            <a:endParaRPr lang="en-US" sz="1200" dirty="0"/>
-          </a:p>
-        </p:txBody>
-      </p:sp>
-      <p:sp>
-        <p:nvSpPr>
-          <p:cNvPr id="10" name="Text 7"/>
-          <p:cNvSpPr txBox="1"/>
-          <p:nvPr/>
-        </p:nvSpPr>
-        <p:spPr>
-          <a:xfrm>
-            <a:off x="457200" y="3657600"/>
-            <a:ext cx="5394960" cy="822960"/>
-          </a:xfrm>
-          <a:prstGeom prst="rect">
-            <a:avLst/>
-          </a:prstGeom>
-          <a:noFill/>
-          <a:ln/>
-        </p:spPr>
-        <p:txBody>
-          <a:bodyPr wrap="square" lIns="0" tIns="0" rIns="0" bIns="0" rtlCol="0" anchor="t"/>
           <a:lstStyle/>
           <a:p>
             <a:pPr marL="0" indent="0">
               <a:buNone/>
             </a:pPr>
             <a:r>
-              <a:rPr lang="en-US" sz="1200" dirty="0">
-                <a:solidFill>
-                  <a:srgbClr val="5B6B7A"/>
-                </a:solidFill>
-              </a:rPr>
-              <a:t>Page servie à l'adresse /Accueil_conso/ du même service : aucune installation pour l'utilisateur.</a:t>
-            </a:r>
-            <a:endParaRPr lang="en-US" sz="1200" dirty="0"/>
-          </a:p>
-        </p:txBody>
-      </p:sp>
-      <p:sp>
-        <p:nvSpPr>
-          <p:cNvPr id="11" name="Text 8"/>
+              <a:rPr lang="en-US" sz="1400" b="1" dirty="0">
+                <a:solidFill>
+                  <a:schemeClr val="tx1"/>
+                </a:solidFill>
+              </a:rPr>
+              <a:t>Surfaces</a:t>
+            </a:r>
+            <a:endParaRPr lang="en-US" sz="1400" dirty="0"/>
+          </a:p>
+        </p:txBody>
+      </p:sp>
+      <p:sp>
+        <p:nvSpPr>
+          <p:cNvPr id="10" name="Text 8"/>
           <p:cNvSpPr txBox="1"/>
           <p:nvPr/>
         </p:nvSpPr>
         <p:spPr>
           <a:xfrm>
-            <a:off x="6126480" y="3474720"/>
-            <a:ext cx="2560320" cy="822960"/>
+            <a:off x="3383280" y="1508760"/>
+            <a:ext cx="2377440" cy="731520"/>
           </a:xfrm>
           <a:prstGeom prst="rect">
             <a:avLst/>
@@ -13462,12 +12844,551 @@
               <a:buNone/>
             </a:pPr>
             <a:r>
-              <a:rPr lang="en-US" sz="1300" b="1" dirty="0">
+              <a:rPr lang="en-US" sz="1200" dirty="0">
+                <a:solidFill>
+                  <a:srgbClr val="5B6B7A"/>
+                </a:solidFill>
+              </a:rPr>
+              <a:t>10 000 à 2,5 M de sq ft</a:t>
+            </a:r>
+          </a:p>
+          <a:p>
+            <a:pPr marL="0" indent="0">
+              <a:buNone/>
+            </a:pPr>
+            <a:r>
+              <a:rPr lang="en-US" sz="1200" dirty="0">
+                <a:solidFill>
+                  <a:srgbClr val="5B6B7A"/>
+                </a:solidFill>
+              </a:rPr>
+              <a:t>parking inférieur à la surface totale</a:t>
+            </a:r>
+            <a:endParaRPr lang="en-US" sz="1200" dirty="0"/>
+          </a:p>
+        </p:txBody>
+      </p:sp>
+      <p:sp>
+        <p:nvSpPr>
+          <p:cNvPr id="11" name="f3 fond"/>
+          <p:cNvSpPr/>
+          <p:nvPr/>
+        </p:nvSpPr>
+        <p:spPr>
+          <a:xfrm>
+            <a:off x="6035040" y="1097280"/>
+            <a:ext cx="2651760" cy="1188720"/>
+          </a:xfrm>
+          <a:prstGeom prst="rect">
+            <a:avLst/>
+          </a:prstGeom>
+          <a:solidFill>
+            <a:srgbClr val="F2F6F5"/>
+          </a:solidFill>
+          <a:ln w="9525">
+            <a:solidFill>
+              <a:srgbClr val="DDE6E3"/>
+            </a:solidFill>
+            <a:prstDash val="solid"/>
+          </a:ln>
+        </p:spPr>
+        <p:txBody>
+          <a:bodyPr/>
+          <a:lstStyle/>
+          <a:p>
+            <a:endParaRPr lang="fr-FR"/>
+          </a:p>
+        </p:txBody>
+      </p:sp>
+      <p:sp>
+        <p:nvSpPr>
+          <p:cNvPr id="12" name="f3 puce"/>
+          <p:cNvSpPr/>
+          <p:nvPr/>
+        </p:nvSpPr>
+        <p:spPr>
+          <a:xfrm>
+            <a:off x="6172200" y="1234440"/>
+            <a:ext cx="128016" cy="128016"/>
+          </a:xfrm>
+          <a:prstGeom prst="ellipse">
+            <a:avLst/>
+          </a:prstGeom>
+          <a:solidFill>
+            <a:srgbClr val="F2A541"/>
+          </a:solidFill>
+          <a:ln w="12700">
+            <a:solidFill>
+              <a:srgbClr val="F2A541"/>
+            </a:solidFill>
+            <a:prstDash val="solid"/>
+          </a:ln>
+        </p:spPr>
+        <p:txBody>
+          <a:bodyPr/>
+          <a:lstStyle/>
+          <a:p>
+            <a:endParaRPr lang="fr-FR"/>
+          </a:p>
+        </p:txBody>
+      </p:sp>
+      <p:sp>
+        <p:nvSpPr>
+          <p:cNvPr id="13" name="Text 11"/>
+          <p:cNvSpPr txBox="1"/>
+          <p:nvPr/>
+        </p:nvSpPr>
+        <p:spPr>
+          <a:xfrm>
+            <a:off x="6382512" y="1170432"/>
+            <a:ext cx="2194560" cy="274320"/>
+          </a:xfrm>
+          <a:prstGeom prst="rect">
+            <a:avLst/>
+          </a:prstGeom>
+          <a:noFill/>
+          <a:ln/>
+        </p:spPr>
+        <p:txBody>
+          <a:bodyPr wrap="square" lIns="0" tIns="0" rIns="0" bIns="0" rtlCol="0" anchor="ctr"/>
+          <a:lstStyle/>
+          <a:p>
+            <a:pPr marL="0" indent="0">
+              <a:buNone/>
+            </a:pPr>
+            <a:r>
+              <a:rPr lang="en-US" sz="1400" b="1" dirty="0">
+                <a:solidFill>
+                  <a:schemeClr val="tx1"/>
+                </a:solidFill>
+              </a:rPr>
+              <a:t>Usages</a:t>
+            </a:r>
+            <a:endParaRPr lang="en-US" sz="1400" dirty="0"/>
+          </a:p>
+        </p:txBody>
+      </p:sp>
+      <p:sp>
+        <p:nvSpPr>
+          <p:cNvPr id="14" name="Text 12"/>
+          <p:cNvSpPr txBox="1"/>
+          <p:nvPr/>
+        </p:nvSpPr>
+        <p:spPr>
+          <a:xfrm>
+            <a:off x="6172200" y="1508760"/>
+            <a:ext cx="2377440" cy="731520"/>
+          </a:xfrm>
+          <a:prstGeom prst="rect">
+            <a:avLst/>
+          </a:prstGeom>
+          <a:noFill/>
+          <a:ln/>
+        </p:spPr>
+        <p:txBody>
+          <a:bodyPr wrap="square" lIns="0" tIns="0" rIns="0" bIns="0" rtlCol="0" anchor="t"/>
+          <a:lstStyle/>
+          <a:p>
+            <a:pPr marL="0" indent="0">
+              <a:buNone/>
+            </a:pPr>
+            <a:r>
+              <a:rPr lang="en-US" sz="1200" dirty="0">
+                <a:solidFill>
+                  <a:srgbClr val="5B6B7A"/>
+                </a:solidFill>
+              </a:rPr>
+              <a:t>1 à 3 usages différents (le jeu de données n'en décrit pas plus)</a:t>
+            </a:r>
+            <a:endParaRPr lang="en-US" sz="1200" dirty="0"/>
+          </a:p>
+        </p:txBody>
+      </p:sp>
+      <p:sp>
+        <p:nvSpPr>
+          <p:cNvPr id="15" name="f4 fond"/>
+          <p:cNvSpPr/>
+          <p:nvPr/>
+        </p:nvSpPr>
+        <p:spPr>
+          <a:xfrm>
+            <a:off x="457200" y="2423160"/>
+            <a:ext cx="2651760" cy="1188720"/>
+          </a:xfrm>
+          <a:prstGeom prst="rect">
+            <a:avLst/>
+          </a:prstGeom>
+          <a:solidFill>
+            <a:srgbClr val="F2F6F5"/>
+          </a:solidFill>
+          <a:ln w="9525">
+            <a:solidFill>
+              <a:srgbClr val="DDE6E3"/>
+            </a:solidFill>
+            <a:prstDash val="solid"/>
+          </a:ln>
+        </p:spPr>
+        <p:txBody>
+          <a:bodyPr/>
+          <a:lstStyle/>
+          <a:p>
+            <a:endParaRPr lang="fr-FR"/>
+          </a:p>
+        </p:txBody>
+      </p:sp>
+      <p:sp>
+        <p:nvSpPr>
+          <p:cNvPr id="16" name="f4 puce"/>
+          <p:cNvSpPr/>
+          <p:nvPr/>
+        </p:nvSpPr>
+        <p:spPr>
+          <a:xfrm>
+            <a:off x="594360" y="2560320"/>
+            <a:ext cx="128016" cy="128016"/>
+          </a:xfrm>
+          <a:prstGeom prst="ellipse">
+            <a:avLst/>
+          </a:prstGeom>
+          <a:solidFill>
+            <a:srgbClr val="D1495B"/>
+          </a:solidFill>
+          <a:ln w="12700">
+            <a:solidFill>
+              <a:srgbClr val="D1495B"/>
+            </a:solidFill>
+            <a:prstDash val="solid"/>
+          </a:ln>
+        </p:spPr>
+        <p:txBody>
+          <a:bodyPr/>
+          <a:lstStyle/>
+          <a:p>
+            <a:endParaRPr lang="fr-FR"/>
+          </a:p>
+        </p:txBody>
+      </p:sp>
+      <p:sp>
+        <p:nvSpPr>
+          <p:cNvPr id="17" name="Text 15"/>
+          <p:cNvSpPr txBox="1"/>
+          <p:nvPr/>
+        </p:nvSpPr>
+        <p:spPr>
+          <a:xfrm>
+            <a:off x="804672" y="2496312"/>
+            <a:ext cx="2194560" cy="274320"/>
+          </a:xfrm>
+          <a:prstGeom prst="rect">
+            <a:avLst/>
+          </a:prstGeom>
+          <a:noFill/>
+          <a:ln/>
+        </p:spPr>
+        <p:txBody>
+          <a:bodyPr wrap="square" lIns="0" tIns="0" rIns="0" bIns="0" rtlCol="0" anchor="ctr"/>
+          <a:lstStyle/>
+          <a:p>
+            <a:pPr marL="0" indent="0">
+              <a:buNone/>
+            </a:pPr>
+            <a:r>
+              <a:rPr lang="en-US" sz="1400" b="1" dirty="0">
+                <a:solidFill>
+                  <a:schemeClr val="tx1"/>
+                </a:solidFill>
+              </a:rPr>
+              <a:t>Position</a:t>
+            </a:r>
+            <a:endParaRPr lang="en-US" sz="1400" dirty="0"/>
+          </a:p>
+        </p:txBody>
+      </p:sp>
+      <p:sp>
+        <p:nvSpPr>
+          <p:cNvPr id="18" name="Text 16"/>
+          <p:cNvSpPr txBox="1"/>
+          <p:nvPr/>
+        </p:nvSpPr>
+        <p:spPr>
+          <a:xfrm>
+            <a:off x="594360" y="2834640"/>
+            <a:ext cx="2377440" cy="731520"/>
+          </a:xfrm>
+          <a:prstGeom prst="rect">
+            <a:avLst/>
+          </a:prstGeom>
+          <a:noFill/>
+          <a:ln/>
+        </p:spPr>
+        <p:txBody>
+          <a:bodyPr wrap="square" lIns="0" tIns="0" rIns="0" bIns="0" rtlCol="0" anchor="t"/>
+          <a:lstStyle/>
+          <a:p>
+            <a:pPr marL="0" indent="0">
+              <a:buNone/>
+            </a:pPr>
+            <a:r>
+              <a:rPr lang="en-US" sz="1200" dirty="0">
+                <a:solidFill>
+                  <a:srgbClr val="5B6B7A"/>
+                </a:solidFill>
+              </a:rPr>
+              <a:t>Latitude et longitude comprises dans les limites de Seattle</a:t>
+            </a:r>
+            <a:endParaRPr lang="en-US" sz="1200" dirty="0"/>
+          </a:p>
+        </p:txBody>
+      </p:sp>
+      <p:sp>
+        <p:nvSpPr>
+          <p:cNvPr id="19" name="f5 fond"/>
+          <p:cNvSpPr/>
+          <p:nvPr/>
+        </p:nvSpPr>
+        <p:spPr>
+          <a:xfrm>
+            <a:off x="3246120" y="2423160"/>
+            <a:ext cx="2651760" cy="1188720"/>
+          </a:xfrm>
+          <a:prstGeom prst="rect">
+            <a:avLst/>
+          </a:prstGeom>
+          <a:solidFill>
+            <a:srgbClr val="F2F6F5"/>
+          </a:solidFill>
+          <a:ln w="9525">
+            <a:solidFill>
+              <a:srgbClr val="DDE6E3"/>
+            </a:solidFill>
+            <a:prstDash val="solid"/>
+          </a:ln>
+        </p:spPr>
+        <p:txBody>
+          <a:bodyPr/>
+          <a:lstStyle/>
+          <a:p>
+            <a:endParaRPr lang="fr-FR"/>
+          </a:p>
+        </p:txBody>
+      </p:sp>
+      <p:sp>
+        <p:nvSpPr>
+          <p:cNvPr id="20" name="f5 puce"/>
+          <p:cNvSpPr/>
+          <p:nvPr/>
+        </p:nvSpPr>
+        <p:spPr>
+          <a:xfrm>
+            <a:off x="3383280" y="2560320"/>
+            <a:ext cx="128016" cy="128016"/>
+          </a:xfrm>
+          <a:prstGeom prst="ellipse">
+            <a:avLst/>
+          </a:prstGeom>
+          <a:solidFill>
+            <a:srgbClr val="1B7F79"/>
+          </a:solidFill>
+          <a:ln w="12700">
+            <a:solidFill>
+              <a:srgbClr val="1B7F79"/>
+            </a:solidFill>
+            <a:prstDash val="solid"/>
+          </a:ln>
+        </p:spPr>
+        <p:txBody>
+          <a:bodyPr/>
+          <a:lstStyle/>
+          <a:p>
+            <a:endParaRPr lang="fr-FR"/>
+          </a:p>
+        </p:txBody>
+      </p:sp>
+      <p:sp>
+        <p:nvSpPr>
+          <p:cNvPr id="21" name="Text 19"/>
+          <p:cNvSpPr txBox="1"/>
+          <p:nvPr/>
+        </p:nvSpPr>
+        <p:spPr>
+          <a:xfrm>
+            <a:off x="3593592" y="2496312"/>
+            <a:ext cx="2194560" cy="274320"/>
+          </a:xfrm>
+          <a:prstGeom prst="rect">
+            <a:avLst/>
+          </a:prstGeom>
+          <a:noFill/>
+          <a:ln/>
+        </p:spPr>
+        <p:txBody>
+          <a:bodyPr wrap="square" lIns="0" tIns="0" rIns="0" bIns="0" rtlCol="0" anchor="ctr"/>
+          <a:lstStyle/>
+          <a:p>
+            <a:pPr marL="0" indent="0">
+              <a:buNone/>
+            </a:pPr>
+            <a:r>
+              <a:rPr lang="en-US" sz="1400" b="1" dirty="0">
+                <a:solidFill>
+                  <a:schemeClr val="tx1"/>
+                </a:solidFill>
+              </a:rPr>
+              <a:t>Listes fermées</a:t>
+            </a:r>
+            <a:endParaRPr lang="en-US" sz="1400" dirty="0"/>
+          </a:p>
+        </p:txBody>
+      </p:sp>
+      <p:sp>
+        <p:nvSpPr>
+          <p:cNvPr id="22" name="Text 20"/>
+          <p:cNvSpPr txBox="1"/>
+          <p:nvPr/>
+        </p:nvSpPr>
+        <p:spPr>
+          <a:xfrm>
+            <a:off x="3383280" y="2834640"/>
+            <a:ext cx="2377440" cy="731520"/>
+          </a:xfrm>
+          <a:prstGeom prst="rect">
+            <a:avLst/>
+          </a:prstGeom>
+          <a:noFill/>
+          <a:ln/>
+        </p:spPr>
+        <p:txBody>
+          <a:bodyPr wrap="square" lIns="0" tIns="0" rIns="0" bIns="0" rtlCol="0" anchor="t"/>
+          <a:lstStyle/>
+          <a:p>
+            <a:pPr marL="0" indent="0">
+              <a:buNone/>
+            </a:pPr>
+            <a:r>
+              <a:rPr lang="en-US" sz="1200" dirty="0">
+                <a:solidFill>
+                  <a:srgbClr val="5B6B7A"/>
+                </a:solidFill>
+              </a:rPr>
+              <a:t>Usage principal, type de bâtiment et quartier : valeurs vues à l'entraînement</a:t>
+            </a:r>
+            <a:endParaRPr lang="en-US" sz="1200" dirty="0"/>
+          </a:p>
+        </p:txBody>
+      </p:sp>
+      <p:sp>
+        <p:nvSpPr>
+          <p:cNvPr id="23" name="Shape 21"/>
+          <p:cNvSpPr/>
+          <p:nvPr/>
+        </p:nvSpPr>
+        <p:spPr>
+          <a:xfrm>
+            <a:off x="6035040" y="2423160"/>
+            <a:ext cx="2651760" cy="1188720"/>
+          </a:xfrm>
+          <a:prstGeom prst="rect">
+            <a:avLst/>
+          </a:prstGeom>
+          <a:solidFill>
+            <a:srgbClr val="12263A"/>
+          </a:solidFill>
+          <a:ln w="12700">
+            <a:solidFill>
+              <a:srgbClr val="12263A"/>
+            </a:solidFill>
+            <a:prstDash val="solid"/>
+          </a:ln>
+        </p:spPr>
+        <p:txBody>
+          <a:bodyPr/>
+          <a:lstStyle/>
+          <a:p>
+            <a:endParaRPr lang="fr-FR"/>
+          </a:p>
+        </p:txBody>
+      </p:sp>
+      <p:sp>
+        <p:nvSpPr>
+          <p:cNvPr id="24" name="Text 22"/>
+          <p:cNvSpPr txBox="1"/>
+          <p:nvPr/>
+        </p:nvSpPr>
+        <p:spPr>
+          <a:xfrm>
+            <a:off x="6172200" y="2514600"/>
+            <a:ext cx="2377440" cy="1005840"/>
+          </a:xfrm>
+          <a:prstGeom prst="rect">
+            <a:avLst/>
+          </a:prstGeom>
+          <a:noFill/>
+          <a:ln/>
+        </p:spPr>
+        <p:txBody>
+          <a:bodyPr wrap="square" lIns="0" tIns="0" rIns="0" bIns="0" rtlCol="0" anchor="t"/>
+          <a:lstStyle/>
+          <a:p>
+            <a:pPr marL="0" indent="0">
+              <a:buNone/>
+            </a:pPr>
+            <a:r>
+              <a:rPr lang="en-US" sz="1400" b="1" dirty="0">
+                <a:solidFill>
+                  <a:srgbClr val="FFFFFF"/>
+                </a:solidFill>
+              </a:rPr>
+              <a:t>Erreur 400 explicite</a:t>
+            </a:r>
+            <a:endParaRPr lang="en-US" sz="1400" dirty="0"/>
+          </a:p>
+          <a:p>
+            <a:pPr marL="0" indent="0">
+              <a:buNone/>
+            </a:pPr>
+            <a:r>
+              <a:rPr lang="en-US" sz="1200" dirty="0">
+                <a:solidFill>
+                  <a:srgbClr val="FFFFFF"/>
+                </a:solidFill>
+              </a:rPr>
+              <a:t>Surface par étage d'au moins 500 sq ft ; le champ fautif est indiqué à l'utilisateur</a:t>
+            </a:r>
+            <a:endParaRPr lang="en-US" sz="1400" dirty="0"/>
+          </a:p>
+        </p:txBody>
+      </p:sp>
+      <p:sp>
+        <p:nvSpPr>
+          <p:cNvPr id="25" name="Text 23"/>
+          <p:cNvSpPr txBox="1"/>
+          <p:nvPr/>
+        </p:nvSpPr>
+        <p:spPr>
+          <a:xfrm>
+            <a:off x="457200" y="3840480"/>
+            <a:ext cx="8229600" cy="640080"/>
+          </a:xfrm>
+          <a:prstGeom prst="rect">
+            <a:avLst/>
+          </a:prstGeom>
+          <a:noFill/>
+          <a:ln/>
+        </p:spPr>
+        <p:txBody>
+          <a:bodyPr wrap="square" lIns="0" tIns="0" rIns="0" bIns="0" rtlCol="0" anchor="t"/>
+          <a:lstStyle/>
+          <a:p>
+            <a:pPr marL="0" indent="0">
+              <a:buNone/>
+            </a:pPr>
+            <a:r>
+              <a:rPr lang="en-US" sz="1300" i="1" dirty="0">
                 <a:solidFill>
                   <a:srgbClr val="12263A"/>
                 </a:solidFill>
               </a:rPr>
-              <a:t>Estimation indicative : l'écart médian (39 % et 56 %) est rappelé à l'écran.</a:t>
+              <a:t>Un Random Forest répond toujours, même à une entrée absurde : la validation protège la qualité des prédictions. Les plages reprennent celles vues à l'entraînement.</a:t>
             </a:r>
             <a:endParaRPr lang="en-US" sz="1300" dirty="0"/>
           </a:p>
@@ -13475,7 +13396,7 @@
       </p:sp>
       <p:sp>
         <p:nvSpPr>
-          <p:cNvPr id="25" name="Slide Number Placeholder 0"/>
+          <p:cNvPr id="26" name="Slide Number Placeholder 0"/>
           <p:cNvSpPr>
             <a:spLocks noGrp="1"/>
           </p:cNvSpPr>
@@ -13493,7 +13414,7 @@
           </a:prstGeom>
           <a:extLst>
             <a:ext uri="{C572A759-6A51-4108-AA02-DFA0A04FC94B}">
-              <ma14:wrappingTextBoxFlag xmlns:ma14="http://schemas.microsoft.com/office/mac/drawingml/2011/main" xmlns="" val="0"/>
+              <ma14:wrappingTextBoxFlag xmlns="" xmlns:ma14="http://schemas.microsoft.com/office/mac/drawingml/2011/main" val="0"/>
             </a:ext>
           </a:extLst>
         </p:spPr>
@@ -13518,30 +13439,6 @@
           </a:p>
         </p:txBody>
       </p:sp>
-      <p:pic>
-        <p:nvPicPr>
-          <p:cNvPr id="26" name="Picture 25" descr="form_crop.png"/>
-          <p:cNvPicPr>
-            <a:picLocks noChangeAspect="1"/>
-          </p:cNvPicPr>
-          <p:nvPr/>
-        </p:nvPicPr>
-        <p:blipFill>
-          <a:blip r:embed="rId2"/>
-          <a:stretch>
-            <a:fillRect/>
-          </a:stretch>
-        </p:blipFill>
-        <p:spPr>
-          <a:xfrm>
-            <a:off x="365760" y="1097280"/>
-            <a:ext cx="5486400" cy="2394065"/>
-          </a:xfrm>
-          <a:prstGeom prst="rect">
-            <a:avLst/>
-          </a:prstGeom>
-        </p:spPr>
-      </p:pic>
     </p:spTree>
   </p:cSld>
   <p:clrMapOvr>
@@ -13600,7 +13497,7 @@
                 <a:ea typeface="Georgia" pitchFamily="34" charset="-122"/>
                 <a:cs typeface="Georgia" pitchFamily="34" charset="-120"/>
               </a:rPr>
-              <a:t>Le modèle est empaqueté dans une image Docker puis publié sur Google Cloud</a:t>
+              <a:t>En local, bentoml serve expose l'API, testée par Swagger et par requêtes</a:t>
             </a:r>
             <a:endParaRPr lang="en-US" sz="2400" dirty="0"/>
           </a:p>
@@ -13614,18 +13511,20 @@
         </p:nvSpPr>
         <p:spPr>
           <a:xfrm>
-            <a:off x="1234440" y="1739751"/>
-            <a:ext cx="457200" cy="457200"/>
-          </a:xfrm>
-          <a:prstGeom prst="ellipse">
-            <a:avLst/>
+            <a:off x="365760" y="1188720"/>
+            <a:ext cx="1600200" cy="1920240"/>
+          </a:xfrm>
+          <a:prstGeom prst="roundRect">
+            <a:avLst>
+              <a:gd name="adj" fmla="val 5714"/>
+            </a:avLst>
           </a:prstGeom>
           <a:solidFill>
-            <a:srgbClr val="1B7F79"/>
+            <a:srgbClr val="E3F0EE"/>
           </a:solidFill>
-          <a:ln w="12700">
+          <a:ln w="9525">
             <a:solidFill>
-              <a:srgbClr val="1B7F79"/>
+              <a:srgbClr val="CFDDD9"/>
             </a:solidFill>
             <a:prstDash val="solid"/>
           </a:ln>
@@ -13646,8 +13545,8 @@
         </p:nvSpPr>
         <p:spPr>
           <a:xfrm>
-            <a:off x="1234440" y="1739751"/>
-            <a:ext cx="457200" cy="457200"/>
+            <a:off x="438912" y="1280160"/>
+            <a:ext cx="1463040" cy="457200"/>
           </a:xfrm>
           <a:prstGeom prst="rect">
             <a:avLst/>
@@ -13663,14 +13562,14 @@
               <a:buNone/>
             </a:pPr>
             <a:r>
-              <a:rPr lang="en-US" sz="1600" b="1" dirty="0">
-                <a:solidFill>
-                  <a:srgbClr val="FFFFFF"/>
-                </a:solidFill>
-              </a:rPr>
-              <a:t>1</a:t>
-            </a:r>
-            <a:endParaRPr lang="en-US" sz="1600" dirty="0"/>
+              <a:rPr lang="en-US" sz="1400" b="1" dirty="0">
+                <a:solidFill>
+                  <a:srgbClr val="1B7F79"/>
+                </a:solidFill>
+              </a:rPr>
+              <a:t>Sauvegarde</a:t>
+            </a:r>
+            <a:endParaRPr lang="en-US" sz="1400" dirty="0"/>
           </a:p>
         </p:txBody>
       </p:sp>
@@ -13682,8 +13581,8 @@
         </p:nvSpPr>
         <p:spPr>
           <a:xfrm>
-            <a:off x="457200" y="2334111"/>
-            <a:ext cx="2011680" cy="320040"/>
+            <a:off x="457200" y="1783080"/>
+            <a:ext cx="1417320" cy="1234440"/>
           </a:xfrm>
           <a:prstGeom prst="rect">
             <a:avLst/>
@@ -13692,34 +13591,68 @@
           <a:ln/>
         </p:spPr>
         <p:txBody>
-          <a:bodyPr wrap="square" lIns="0" tIns="0" rIns="0" bIns="0" rtlCol="0" anchor="ctr"/>
+          <a:bodyPr wrap="square" lIns="0" tIns="0" rIns="0" bIns="0" rtlCol="0" anchor="t"/>
           <a:lstStyle/>
           <a:p>
             <a:pPr marL="0" indent="0" algn="ctr">
               <a:buNone/>
             </a:pPr>
             <a:r>
-              <a:rPr lang="en-US" sz="1400" b="1" dirty="0">
-                <a:solidFill>
-                  <a:schemeClr val="tx1"/>
-                </a:solidFill>
-              </a:rPr>
-              <a:t>Bento local</a:t>
-            </a:r>
-            <a:endParaRPr lang="en-US" sz="1400" dirty="0"/>
-          </a:p>
-        </p:txBody>
-      </p:sp>
-      <p:sp>
-        <p:nvSpPr>
-          <p:cNvPr id="6" name="Text 4"/>
+              <a:rPr lang="en-US" sz="1200" dirty="0">
+                <a:solidFill>
+                  <a:srgbClr val="5B6B7A"/>
+                </a:solidFill>
+              </a:rPr>
+              <a:t>Les 2 modèles et la liste ordonnée des variables entrent dans le Model Store</a:t>
+            </a:r>
+            <a:endParaRPr lang="en-US" sz="1200" dirty="0"/>
+          </a:p>
+        </p:txBody>
+      </p:sp>
+      <p:sp>
+        <p:nvSpPr>
+          <p:cNvPr id="6" name="Shape 4"/>
+          <p:cNvSpPr/>
+          <p:nvPr/>
+        </p:nvSpPr>
+        <p:spPr>
+          <a:xfrm>
+            <a:off x="2084832" y="1188720"/>
+            <a:ext cx="1600200" cy="1920240"/>
+          </a:xfrm>
+          <a:prstGeom prst="roundRect">
+            <a:avLst>
+              <a:gd name="adj" fmla="val 5714"/>
+            </a:avLst>
+          </a:prstGeom>
+          <a:solidFill>
+            <a:srgbClr val="F2F6F5"/>
+          </a:solidFill>
+          <a:ln w="9525">
+            <a:solidFill>
+              <a:srgbClr val="CFDDD9"/>
+            </a:solidFill>
+            <a:prstDash val="solid"/>
+          </a:ln>
+        </p:spPr>
+        <p:txBody>
+          <a:bodyPr/>
+          <a:lstStyle/>
+          <a:p>
+            <a:endParaRPr lang="fr-FR"/>
+          </a:p>
+        </p:txBody>
+      </p:sp>
+      <p:sp>
+        <p:nvSpPr>
+          <p:cNvPr id="7" name="Text 5"/>
           <p:cNvSpPr txBox="1"/>
           <p:nvPr/>
         </p:nvSpPr>
         <p:spPr>
           <a:xfrm>
-            <a:off x="457200" y="2699871"/>
-            <a:ext cx="2011680" cy="1371600"/>
+            <a:off x="2157984" y="1280160"/>
+            <a:ext cx="1463040" cy="457200"/>
           </a:xfrm>
           <a:prstGeom prst="rect">
             <a:avLst/>
@@ -13728,19 +13661,55 @@
           <a:ln/>
         </p:spPr>
         <p:txBody>
-          <a:bodyPr wrap="square" lIns="0" tIns="0" rIns="0" bIns="0" rtlCol="0" anchor="t"/>
+          <a:bodyPr wrap="square" lIns="0" tIns="0" rIns="0" bIns="0" rtlCol="0" anchor="ctr"/>
           <a:lstStyle/>
           <a:p>
             <a:pPr marL="0" indent="0" algn="ctr">
               <a:buNone/>
             </a:pPr>
             <a:r>
+              <a:rPr lang="en-US" sz="1400" b="1" dirty="0">
+                <a:solidFill>
+                  <a:srgbClr val="1B7F79"/>
+                </a:solidFill>
+              </a:rPr>
+              <a:t>Service</a:t>
+            </a:r>
+            <a:endParaRPr lang="en-US" sz="1400" dirty="0"/>
+          </a:p>
+        </p:txBody>
+      </p:sp>
+      <p:sp>
+        <p:nvSpPr>
+          <p:cNvPr id="8" name="Text 6"/>
+          <p:cNvSpPr txBox="1"/>
+          <p:nvPr/>
+        </p:nvSpPr>
+        <p:spPr>
+          <a:xfrm>
+            <a:off x="2176272" y="1783080"/>
+            <a:ext cx="1417320" cy="1234440"/>
+          </a:xfrm>
+          <a:prstGeom prst="rect">
+            <a:avLst/>
+          </a:prstGeom>
+          <a:noFill/>
+          <a:ln/>
+        </p:spPr>
+        <p:txBody>
+          <a:bodyPr wrap="square" lIns="0" tIns="0" rIns="0" bIns="0" rtlCol="0" anchor="t"/>
+          <a:lstStyle/>
+          <a:p>
+            <a:pPr marL="0" indent="0" algn="ctr">
+              <a:buNone/>
+            </a:pPr>
+            <a:r>
               <a:rPr lang="en-US" sz="1200" dirty="0">
                 <a:solidFill>
                   <a:srgbClr val="5B6B7A"/>
                 </a:solidFill>
               </a:rPr>
-              <a:t>bentoml build puis export : service, modèles et dépendances dans un fichier</a:t>
+              <a:t>service.py : classe BentoML, endpoint /predict, validation Pydantic</a:t>
             </a:r>
             <a:endParaRPr lang="en-US" sz="1200" dirty="0"/>
           </a:p>
@@ -13748,24 +13717,26 @@
       </p:sp>
       <p:sp>
         <p:nvSpPr>
-          <p:cNvPr id="7" name="Shape 5"/>
+          <p:cNvPr id="9" name="Shape 7"/>
           <p:cNvSpPr/>
           <p:nvPr/>
         </p:nvSpPr>
         <p:spPr>
           <a:xfrm>
-            <a:off x="3319272" y="1739751"/>
-            <a:ext cx="457200" cy="457200"/>
-          </a:xfrm>
-          <a:prstGeom prst="ellipse">
-            <a:avLst/>
+            <a:off x="3803904" y="1188720"/>
+            <a:ext cx="1600200" cy="1920240"/>
+          </a:xfrm>
+          <a:prstGeom prst="roundRect">
+            <a:avLst>
+              <a:gd name="adj" fmla="val 5714"/>
+            </a:avLst>
           </a:prstGeom>
           <a:solidFill>
-            <a:srgbClr val="6C8EAD"/>
+            <a:srgbClr val="E3F0EE"/>
           </a:solidFill>
-          <a:ln w="12700">
+          <a:ln w="9525">
             <a:solidFill>
-              <a:srgbClr val="6C8EAD"/>
+              <a:srgbClr val="CFDDD9"/>
             </a:solidFill>
             <a:prstDash val="solid"/>
           </a:ln>
@@ -13780,14 +13751,14 @@
       </p:sp>
       <p:sp>
         <p:nvSpPr>
-          <p:cNvPr id="8" name="Text 6"/>
+          <p:cNvPr id="10" name="Text 8"/>
           <p:cNvSpPr txBox="1"/>
           <p:nvPr/>
         </p:nvSpPr>
         <p:spPr>
           <a:xfrm>
-            <a:off x="3319272" y="1739751"/>
-            <a:ext cx="457200" cy="457200"/>
+            <a:off x="3877056" y="1280160"/>
+            <a:ext cx="1463040" cy="457200"/>
           </a:xfrm>
           <a:prstGeom prst="rect">
             <a:avLst/>
@@ -13803,27 +13774,27 @@
               <a:buNone/>
             </a:pPr>
             <a:r>
-              <a:rPr lang="en-US" sz="1600" b="1" dirty="0">
-                <a:solidFill>
-                  <a:srgbClr val="FFFFFF"/>
-                </a:solidFill>
-              </a:rPr>
-              <a:t>2</a:t>
-            </a:r>
-            <a:endParaRPr lang="en-US" sz="1600" dirty="0"/>
-          </a:p>
-        </p:txBody>
-      </p:sp>
-      <p:sp>
-        <p:nvSpPr>
-          <p:cNvPr id="9" name="Text 7"/>
+              <a:rPr lang="en-US" sz="1400" b="1" dirty="0">
+                <a:solidFill>
+                  <a:srgbClr val="1B7F79"/>
+                </a:solidFill>
+              </a:rPr>
+              <a:t>Lancement</a:t>
+            </a:r>
+            <a:endParaRPr lang="en-US" sz="1400" dirty="0"/>
+          </a:p>
+        </p:txBody>
+      </p:sp>
+      <p:sp>
+        <p:nvSpPr>
+          <p:cNvPr id="11" name="Text 9"/>
           <p:cNvSpPr txBox="1"/>
           <p:nvPr/>
         </p:nvSpPr>
         <p:spPr>
           <a:xfrm>
-            <a:off x="2542032" y="2334111"/>
-            <a:ext cx="2011680" cy="320040"/>
+            <a:off x="3895344" y="1783080"/>
+            <a:ext cx="1417320" cy="1234440"/>
           </a:xfrm>
           <a:prstGeom prst="rect">
             <a:avLst/>
@@ -13832,34 +13803,68 @@
           <a:ln/>
         </p:spPr>
         <p:txBody>
-          <a:bodyPr wrap="square" lIns="0" tIns="0" rIns="0" bIns="0" rtlCol="0" anchor="ctr"/>
+          <a:bodyPr wrap="square" lIns="0" tIns="0" rIns="0" bIns="0" rtlCol="0" anchor="t"/>
           <a:lstStyle/>
           <a:p>
             <a:pPr marL="0" indent="0" algn="ctr">
               <a:buNone/>
             </a:pPr>
             <a:r>
-              <a:rPr lang="en-US" sz="1400" b="1" dirty="0">
-                <a:solidFill>
-                  <a:schemeClr val="tx1"/>
-                </a:solidFill>
-              </a:rPr>
-              <a:t>Cloud Shell</a:t>
-            </a:r>
-            <a:endParaRPr lang="en-US" sz="1400" dirty="0"/>
-          </a:p>
-        </p:txBody>
-      </p:sp>
-      <p:sp>
-        <p:nvSpPr>
-          <p:cNvPr id="10" name="Text 8"/>
+              <a:rPr lang="en-US" sz="1200" dirty="0">
+                <a:solidFill>
+                  <a:srgbClr val="5B6B7A"/>
+                </a:solidFill>
+              </a:rPr>
+              <a:t>bentoml serve : API sur le port 3000, Swagger à la racine</a:t>
+            </a:r>
+            <a:endParaRPr lang="en-US" sz="1200" dirty="0"/>
+          </a:p>
+        </p:txBody>
+      </p:sp>
+      <p:sp>
+        <p:nvSpPr>
+          <p:cNvPr id="12" name="Shape 10"/>
+          <p:cNvSpPr/>
+          <p:nvPr/>
+        </p:nvSpPr>
+        <p:spPr>
+          <a:xfrm>
+            <a:off x="5522976" y="1188720"/>
+            <a:ext cx="1600200" cy="1920240"/>
+          </a:xfrm>
+          <a:prstGeom prst="roundRect">
+            <a:avLst>
+              <a:gd name="adj" fmla="val 5714"/>
+            </a:avLst>
+          </a:prstGeom>
+          <a:solidFill>
+            <a:srgbClr val="F2F6F5"/>
+          </a:solidFill>
+          <a:ln w="9525">
+            <a:solidFill>
+              <a:srgbClr val="CFDDD9"/>
+            </a:solidFill>
+            <a:prstDash val="solid"/>
+          </a:ln>
+        </p:spPr>
+        <p:txBody>
+          <a:bodyPr/>
+          <a:lstStyle/>
+          <a:p>
+            <a:endParaRPr lang="fr-FR"/>
+          </a:p>
+        </p:txBody>
+      </p:sp>
+      <p:sp>
+        <p:nvSpPr>
+          <p:cNvPr id="13" name="Text 11"/>
           <p:cNvSpPr txBox="1"/>
           <p:nvPr/>
         </p:nvSpPr>
         <p:spPr>
           <a:xfrm>
-            <a:off x="2542032" y="2699871"/>
-            <a:ext cx="2011680" cy="1371600"/>
+            <a:off x="5596128" y="1280160"/>
+            <a:ext cx="1463040" cy="457200"/>
           </a:xfrm>
           <a:prstGeom prst="rect">
             <a:avLst/>
@@ -13868,19 +13873,55 @@
           <a:ln/>
         </p:spPr>
         <p:txBody>
-          <a:bodyPr wrap="square" lIns="0" tIns="0" rIns="0" bIns="0" rtlCol="0" anchor="t"/>
+          <a:bodyPr wrap="square" lIns="0" tIns="0" rIns="0" bIns="0" rtlCol="0" anchor="ctr"/>
           <a:lstStyle/>
           <a:p>
             <a:pPr marL="0" indent="0" algn="ctr">
               <a:buNone/>
             </a:pPr>
             <a:r>
+              <a:rPr lang="en-US" sz="1400" b="1" dirty="0">
+                <a:solidFill>
+                  <a:srgbClr val="1B7F79"/>
+                </a:solidFill>
+              </a:rPr>
+              <a:t>Tests</a:t>
+            </a:r>
+            <a:endParaRPr lang="en-US" sz="1400" dirty="0"/>
+          </a:p>
+        </p:txBody>
+      </p:sp>
+      <p:sp>
+        <p:nvSpPr>
+          <p:cNvPr id="14" name="Text 12"/>
+          <p:cNvSpPr txBox="1"/>
+          <p:nvPr/>
+        </p:nvSpPr>
+        <p:spPr>
+          <a:xfrm>
+            <a:off x="5614416" y="1783080"/>
+            <a:ext cx="1417320" cy="1234440"/>
+          </a:xfrm>
+          <a:prstGeom prst="rect">
+            <a:avLst/>
+          </a:prstGeom>
+          <a:noFill/>
+          <a:ln/>
+        </p:spPr>
+        <p:txBody>
+          <a:bodyPr wrap="square" lIns="0" tIns="0" rIns="0" bIns="0" rtlCol="0" anchor="t"/>
+          <a:lstStyle/>
+          <a:p>
+            <a:pPr marL="0" indent="0" algn="ctr">
+              <a:buNone/>
+            </a:pPr>
+            <a:r>
               <a:rPr lang="en-US" sz="1200" dirty="0">
                 <a:solidFill>
                   <a:srgbClr val="5B6B7A"/>
                 </a:solidFill>
               </a:rPr>
-              <a:t>Import du bento et préparation du contexte de build avec les modèles</a:t>
+              <a:t>Requêtes valides (200) et incohérentes (400), via Swagger</a:t>
             </a:r>
             <a:endParaRPr lang="en-US" sz="1200" dirty="0"/>
           </a:p>
@@ -13888,24 +13929,26 @@
       </p:sp>
       <p:sp>
         <p:nvSpPr>
-          <p:cNvPr id="11" name="Shape 9"/>
+          <p:cNvPr id="15" name="Shape 13"/>
           <p:cNvSpPr/>
           <p:nvPr/>
         </p:nvSpPr>
         <p:spPr>
           <a:xfrm>
-            <a:off x="5404104" y="1739751"/>
-            <a:ext cx="457200" cy="457200"/>
-          </a:xfrm>
-          <a:prstGeom prst="ellipse">
-            <a:avLst/>
+            <a:off x="7242048" y="1188720"/>
+            <a:ext cx="1600200" cy="1920240"/>
+          </a:xfrm>
+          <a:prstGeom prst="roundRect">
+            <a:avLst>
+              <a:gd name="adj" fmla="val 5714"/>
+            </a:avLst>
           </a:prstGeom>
           <a:solidFill>
-            <a:srgbClr val="F2A541"/>
+            <a:srgbClr val="E3F0EE"/>
           </a:solidFill>
-          <a:ln w="12700">
+          <a:ln w="9525">
             <a:solidFill>
-              <a:srgbClr val="F2A541"/>
+              <a:srgbClr val="CFDDD9"/>
             </a:solidFill>
             <a:prstDash val="solid"/>
           </a:ln>
@@ -13920,14 +13963,14 @@
       </p:sp>
       <p:sp>
         <p:nvSpPr>
-          <p:cNvPr id="12" name="Text 10"/>
+          <p:cNvPr id="16" name="Text 14"/>
           <p:cNvSpPr txBox="1"/>
           <p:nvPr/>
         </p:nvSpPr>
         <p:spPr>
           <a:xfrm>
-            <a:off x="5404104" y="1739751"/>
-            <a:ext cx="457200" cy="457200"/>
+            <a:off x="7315200" y="1280160"/>
+            <a:ext cx="1463040" cy="457200"/>
           </a:xfrm>
           <a:prstGeom prst="rect">
             <a:avLst/>
@@ -13943,27 +13986,27 @@
               <a:buNone/>
             </a:pPr>
             <a:r>
-              <a:rPr lang="en-US" sz="1600" b="1" dirty="0">
-                <a:solidFill>
-                  <a:srgbClr val="FFFFFF"/>
-                </a:solidFill>
-              </a:rPr>
-              <a:t>3</a:t>
-            </a:r>
-            <a:endParaRPr lang="en-US" sz="1600" dirty="0"/>
-          </a:p>
-        </p:txBody>
-      </p:sp>
-      <p:sp>
-        <p:nvSpPr>
-          <p:cNvPr id="13" name="Text 11"/>
+              <a:rPr lang="en-US" sz="1400" b="1" dirty="0">
+                <a:solidFill>
+                  <a:srgbClr val="1B7F79"/>
+                </a:solidFill>
+              </a:rPr>
+              <a:t>Formulaire</a:t>
+            </a:r>
+            <a:endParaRPr lang="en-US" sz="1400" dirty="0"/>
+          </a:p>
+        </p:txBody>
+      </p:sp>
+      <p:sp>
+        <p:nvSpPr>
+          <p:cNvPr id="17" name="Text 15"/>
           <p:cNvSpPr txBox="1"/>
           <p:nvPr/>
         </p:nvSpPr>
         <p:spPr>
           <a:xfrm>
-            <a:off x="4626864" y="2334111"/>
-            <a:ext cx="2011680" cy="320040"/>
+            <a:off x="7333488" y="1783080"/>
+            <a:ext cx="1417320" cy="1234440"/>
           </a:xfrm>
           <a:prstGeom prst="rect">
             <a:avLst/>
@@ -13972,34 +14015,34 @@
           <a:ln/>
         </p:spPr>
         <p:txBody>
-          <a:bodyPr wrap="square" lIns="0" tIns="0" rIns="0" bIns="0" rtlCol="0" anchor="ctr"/>
+          <a:bodyPr wrap="square" lIns="0" tIns="0" rIns="0" bIns="0" rtlCol="0" anchor="t"/>
           <a:lstStyle/>
           <a:p>
             <a:pPr marL="0" indent="0" algn="ctr">
               <a:buNone/>
             </a:pPr>
             <a:r>
-              <a:rPr lang="en-US" sz="1400" b="1" dirty="0">
-                <a:solidFill>
-                  <a:schemeClr val="tx1"/>
-                </a:solidFill>
-              </a:rPr>
-              <a:t>Image Docker</a:t>
-            </a:r>
-            <a:endParaRPr lang="en-US" sz="1400" dirty="0"/>
-          </a:p>
-        </p:txBody>
-      </p:sp>
-      <p:sp>
-        <p:nvSpPr>
-          <p:cNvPr id="14" name="Text 12"/>
+              <a:rPr lang="en-US" sz="1200" dirty="0">
+                <a:solidFill>
+                  <a:srgbClr val="5B6B7A"/>
+                </a:solidFill>
+              </a:rPr>
+              <a:t>Page web en français servie par le même service</a:t>
+            </a:r>
+            <a:endParaRPr lang="en-US" sz="1200" dirty="0"/>
+          </a:p>
+        </p:txBody>
+      </p:sp>
+      <p:sp>
+        <p:nvSpPr>
+          <p:cNvPr id="18" name="Text 16"/>
           <p:cNvSpPr txBox="1"/>
           <p:nvPr/>
         </p:nvSpPr>
         <p:spPr>
           <a:xfrm>
-            <a:off x="4626864" y="2699871"/>
-            <a:ext cx="2011680" cy="1371600"/>
+            <a:off x="457200" y="3383280"/>
+            <a:ext cx="8229600" cy="1188720"/>
           </a:xfrm>
           <a:prstGeom prst="rect">
             <a:avLst/>
@@ -14011,158 +14054,40 @@
           <a:bodyPr wrap="square" lIns="0" tIns="0" rIns="0" bIns="0" rtlCol="0" anchor="t"/>
           <a:lstStyle/>
           <a:p>
-            <a:pPr marL="0" indent="0" algn="ctr">
-              <a:buNone/>
+            <a:pPr marL="342900" indent="-342900">
+              <a:spcAft>
+                <a:spcPts val="800"/>
+              </a:spcAft>
+              <a:buSzPct val="100000"/>
+              <a:buChar char="•"/>
             </a:pPr>
             <a:r>
-              <a:rPr lang="en-US" sz="1200" dirty="0">
-                <a:solidFill>
-                  <a:srgbClr val="5B6B7A"/>
-                </a:solidFill>
-              </a:rPr>
-              <a:t>Cloud Build construit l'image, stockée dans Artifact Registry</a:t>
-            </a:r>
-            <a:endParaRPr lang="en-US" sz="1200" dirty="0"/>
-          </a:p>
-        </p:txBody>
-      </p:sp>
-      <p:sp>
-        <p:nvSpPr>
-          <p:cNvPr id="15" name="Shape 13"/>
-          <p:cNvSpPr/>
-          <p:nvPr/>
-        </p:nvSpPr>
-        <p:spPr>
-          <a:xfrm>
-            <a:off x="7488936" y="1739751"/>
-            <a:ext cx="457200" cy="457200"/>
-          </a:xfrm>
-          <a:prstGeom prst="ellipse">
-            <a:avLst/>
-          </a:prstGeom>
-          <a:solidFill>
-            <a:srgbClr val="D1495B"/>
-          </a:solidFill>
-          <a:ln w="12700">
-            <a:solidFill>
-              <a:srgbClr val="D1495B"/>
-            </a:solidFill>
-            <a:prstDash val="solid"/>
-          </a:ln>
-        </p:spPr>
-        <p:txBody>
-          <a:bodyPr/>
-          <a:lstStyle/>
-          <a:p>
-            <a:endParaRPr lang="fr-FR"/>
-          </a:p>
-        </p:txBody>
-      </p:sp>
-      <p:sp>
-        <p:nvSpPr>
-          <p:cNvPr id="16" name="Text 14"/>
-          <p:cNvSpPr txBox="1"/>
-          <p:nvPr/>
-        </p:nvSpPr>
-        <p:spPr>
-          <a:xfrm>
-            <a:off x="7488936" y="1739751"/>
-            <a:ext cx="457200" cy="457200"/>
-          </a:xfrm>
-          <a:prstGeom prst="rect">
-            <a:avLst/>
-          </a:prstGeom>
-          <a:noFill/>
-          <a:ln/>
-        </p:spPr>
-        <p:txBody>
-          <a:bodyPr wrap="square" lIns="0" tIns="0" rIns="0" bIns="0" rtlCol="0" anchor="ctr"/>
-          <a:lstStyle/>
-          <a:p>
-            <a:pPr marL="0" indent="0" algn="ctr">
-              <a:buNone/>
+              <a:rPr lang="en-US" sz="1400" dirty="0">
+                <a:solidFill>
+                  <a:schemeClr val="tx1"/>
+                </a:solidFill>
+              </a:rPr>
+              <a:t>Les versions des bibliothèques sont épinglées dans bentofile.yaml (scikit-learn 1.9.1…) : le modèle doit être relu par la version qui l'a sauvegardé</a:t>
+            </a:r>
+            <a:endParaRPr lang="en-US" sz="1400" dirty="0"/>
+          </a:p>
+          <a:p>
+            <a:pPr marL="342900" indent="-342900">
+              <a:spcAft>
+                <a:spcPts val="800"/>
+              </a:spcAft>
+              <a:buSzPct val="100000"/>
+              <a:buChar char="•"/>
             </a:pPr>
             <a:r>
-              <a:rPr lang="en-US" sz="1600" b="1" dirty="0">
-                <a:solidFill>
-                  <a:srgbClr val="FFFFFF"/>
-                </a:solidFill>
-              </a:rPr>
-              <a:t>4</a:t>
-            </a:r>
-            <a:endParaRPr lang="en-US" sz="1600" dirty="0"/>
-          </a:p>
-        </p:txBody>
-      </p:sp>
-      <p:sp>
-        <p:nvSpPr>
-          <p:cNvPr id="17" name="Text 15"/>
-          <p:cNvSpPr txBox="1"/>
-          <p:nvPr/>
-        </p:nvSpPr>
-        <p:spPr>
-          <a:xfrm>
-            <a:off x="6711696" y="2334111"/>
-            <a:ext cx="2011680" cy="320040"/>
-          </a:xfrm>
-          <a:prstGeom prst="rect">
-            <a:avLst/>
-          </a:prstGeom>
-          <a:noFill/>
-          <a:ln/>
-        </p:spPr>
-        <p:txBody>
-          <a:bodyPr wrap="square" lIns="0" tIns="0" rIns="0" bIns="0" rtlCol="0" anchor="ctr"/>
-          <a:lstStyle/>
-          <a:p>
-            <a:pPr marL="0" indent="0" algn="ctr">
-              <a:buNone/>
-            </a:pPr>
-            <a:r>
-              <a:rPr lang="en-US" sz="1400" b="1" dirty="0">
+              <a:rPr lang="en-US" sz="1400" dirty="0">
                 <a:solidFill>
                   <a:schemeClr val="tx1"/>
                 </a:solidFill>
               </a:rPr>
-              <a:t>Cloud Run</a:t>
+              <a:t>bentofile.yaml ne liste que le nécessaire (service, page HTML, dépendances) pour garder l'image Docker légère</a:t>
             </a:r>
             <a:endParaRPr lang="en-US" sz="1400" dirty="0"/>
-          </a:p>
-        </p:txBody>
-      </p:sp>
-      <p:sp>
-        <p:nvSpPr>
-          <p:cNvPr id="18" name="Text 16"/>
-          <p:cNvSpPr txBox="1"/>
-          <p:nvPr/>
-        </p:nvSpPr>
-        <p:spPr>
-          <a:xfrm>
-            <a:off x="6711696" y="2699871"/>
-            <a:ext cx="2011680" cy="1371600"/>
-          </a:xfrm>
-          <a:prstGeom prst="rect">
-            <a:avLst/>
-          </a:prstGeom>
-          <a:noFill/>
-          <a:ln/>
-        </p:spPr>
-        <p:txBody>
-          <a:bodyPr wrap="square" lIns="0" tIns="0" rIns="0" bIns="0" rtlCol="0" anchor="t"/>
-          <a:lstStyle/>
-          <a:p>
-            <a:pPr marL="0" indent="0" algn="ctr">
-              <a:buNone/>
-            </a:pPr>
-            <a:r>
-              <a:rPr lang="en-US" sz="1200" dirty="0">
-                <a:solidFill>
-                  <a:srgbClr val="5B6B7A"/>
-                </a:solidFill>
-              </a:rPr>
-              <a:t>Déploiement : port 3000, 2 Go de mémoire, accès public, 1 instance maximum</a:t>
-            </a:r>
-            <a:endParaRPr lang="en-US" sz="1200" dirty="0"/>
           </a:p>
         </p:txBody>
       </p:sp>
@@ -14186,7 +14111,7 @@
           </a:prstGeom>
           <a:extLst>
             <a:ext uri="{C572A759-6A51-4108-AA02-DFA0A04FC94B}">
-              <ma14:wrappingTextBoxFlag xmlns:ma14="http://schemas.microsoft.com/office/mac/drawingml/2011/main" xmlns="" val="0"/>
+              <ma14:wrappingTextBoxFlag xmlns="" xmlns:ma14="http://schemas.microsoft.com/office/mac/drawingml/2011/main" val="0"/>
             </a:ext>
           </a:extLst>
         </p:spPr>
@@ -14211,36 +14136,6 @@
           </a:p>
         </p:txBody>
       </p:sp>
-      <p:pic>
-        <p:nvPicPr>
-          <p:cNvPr id="21" name="Image 20" descr="Google Cloud Logo">
-            <a:extLst>
-              <a:ext uri="{FF2B5EF4-FFF2-40B4-BE49-F238E27FC236}">
-                <a16:creationId xmlns:a16="http://schemas.microsoft.com/office/drawing/2014/main" id="{F8765B0D-3387-AB83-10B7-83722F5A5353}"/>
-              </a:ext>
-            </a:extLst>
-          </p:cNvPr>
-          <p:cNvPicPr>
-            <a:picLocks noChangeAspect="1"/>
-          </p:cNvPicPr>
-          <p:nvPr/>
-        </p:nvPicPr>
-        <p:blipFill>
-          <a:blip r:embed="rId2"/>
-          <a:stretch>
-            <a:fillRect/>
-          </a:stretch>
-        </p:blipFill>
-        <p:spPr>
-          <a:xfrm>
-            <a:off x="5243121" y="3525237"/>
-            <a:ext cx="2705645" cy="1531395"/>
-          </a:xfrm>
-          <a:prstGeom prst="rect">
-            <a:avLst/>
-          </a:prstGeom>
-        </p:spPr>
-      </p:pic>
     </p:spTree>
   </p:cSld>
   <p:clrMapOvr>
@@ -14251,7 +14146,7 @@
 
 <file path=ppt/slides/slide19.xml><?xml version="1.0" encoding="utf-8"?>
 <p:sld xmlns:a="http://schemas.openxmlformats.org/drawingml/2006/main" xmlns:r="http://schemas.openxmlformats.org/officeDocument/2006/relationships" xmlns:p="http://schemas.openxmlformats.org/presentationml/2006/main">
-  <p:cSld name="Slide 14">
+  <p:cSld>
     <p:spTree>
       <p:nvGrpSpPr>
         <p:cNvPr id="1" name=""/>
@@ -14268,14 +14163,14 @@
       </p:grpSpPr>
       <p:sp>
         <p:nvSpPr>
-          <p:cNvPr id="2" name="Text 0"/>
+          <p:cNvPr id="2" name="Titre"/>
           <p:cNvSpPr txBox="1"/>
           <p:nvPr/>
         </p:nvSpPr>
         <p:spPr>
           <a:xfrm>
-            <a:off x="640080" y="365760"/>
-            <a:ext cx="7863840" cy="640080"/>
+            <a:off x="457200" y="228600"/>
+            <a:ext cx="8229600" cy="777240"/>
           </a:xfrm>
           <a:prstGeom prst="rect">
             <a:avLst/>
@@ -14291,30 +14186,111 @@
               <a:buNone/>
             </a:pPr>
             <a:r>
-              <a:rPr lang="en-US" sz="3000" b="1" dirty="0">
-                <a:solidFill>
-                  <a:srgbClr val="FFFFFF"/>
+              <a:rPr lang="en-US" sz="2400" b="1" dirty="0">
+                <a:solidFill>
+                  <a:schemeClr val="tx1"/>
                 </a:solidFill>
                 <a:latin typeface="Georgia" pitchFamily="34" charset="0"/>
                 <a:ea typeface="Georgia" pitchFamily="34" charset="-122"/>
                 <a:cs typeface="Georgia" pitchFamily="34" charset="-120"/>
               </a:rPr>
-              <a:t>Ce qu'il faut retenir</a:t>
-            </a:r>
-            <a:endParaRPr lang="en-US" sz="3000" dirty="0"/>
-          </a:p>
-        </p:txBody>
-      </p:sp>
-      <p:sp>
-        <p:nvSpPr>
-          <p:cNvPr id="3" name="Text 1"/>
+              <a:t>Un </a:t>
+            </a:r>
+            <a:r>
+              <a:rPr lang="en-US" sz="2400" b="1" dirty="0" err="1">
+                <a:solidFill>
+                  <a:schemeClr val="tx1"/>
+                </a:solidFill>
+                <a:latin typeface="Georgia" pitchFamily="34" charset="0"/>
+                <a:ea typeface="Georgia" pitchFamily="34" charset="-122"/>
+                <a:cs typeface="Georgia" pitchFamily="34" charset="-120"/>
+              </a:rPr>
+              <a:t>formulaire</a:t>
+            </a:r>
+            <a:r>
+              <a:rPr lang="en-US" sz="2400" b="1" dirty="0">
+                <a:solidFill>
+                  <a:schemeClr val="tx1"/>
+                </a:solidFill>
+                <a:latin typeface="Georgia" pitchFamily="34" charset="0"/>
+                <a:ea typeface="Georgia" pitchFamily="34" charset="-122"/>
+                <a:cs typeface="Georgia" pitchFamily="34" charset="-120"/>
+              </a:rPr>
+              <a:t> </a:t>
+            </a:r>
+            <a:r>
+              <a:rPr lang="en-US" sz="2400" b="1" dirty="0">
+                <a:latin typeface="Georgia" pitchFamily="34" charset="0"/>
+                <a:ea typeface="Georgia" pitchFamily="34" charset="-122"/>
+                <a:cs typeface="Georgia" pitchFamily="34" charset="-120"/>
+              </a:rPr>
+              <a:t>qui </a:t>
+            </a:r>
+            <a:r>
+              <a:rPr lang="en-US" sz="2400" b="1" dirty="0">
+                <a:solidFill>
+                  <a:schemeClr val="tx1"/>
+                </a:solidFill>
+                <a:latin typeface="Georgia" pitchFamily="34" charset="0"/>
+                <a:ea typeface="Georgia" pitchFamily="34" charset="-122"/>
+                <a:cs typeface="Georgia" pitchFamily="34" charset="-120"/>
+              </a:rPr>
+              <a:t>rend le modèle utilisable par </a:t>
+            </a:r>
+            <a:r>
+              <a:rPr lang="en-US" sz="2400" b="1" dirty="0">
+                <a:latin typeface="Georgia" pitchFamily="34" charset="0"/>
+                <a:ea typeface="Georgia" pitchFamily="34" charset="-122"/>
+                <a:cs typeface="Georgia" pitchFamily="34" charset="-120"/>
+              </a:rPr>
+              <a:t>le métier</a:t>
+            </a:r>
+            <a:endParaRPr lang="en-US" sz="2400" dirty="0"/>
+          </a:p>
+        </p:txBody>
+      </p:sp>
+      <p:sp>
+        <p:nvSpPr>
+          <p:cNvPr id="4" name="Shape 1"/>
+          <p:cNvSpPr/>
+          <p:nvPr/>
+        </p:nvSpPr>
+        <p:spPr>
+          <a:xfrm>
+            <a:off x="6126480" y="1097280"/>
+            <a:ext cx="2560320" cy="1005840"/>
+          </a:xfrm>
+          <a:prstGeom prst="rect">
+            <a:avLst/>
+          </a:prstGeom>
+          <a:solidFill>
+            <a:srgbClr val="F2F6F5"/>
+          </a:solidFill>
+          <a:ln w="9525">
+            <a:solidFill>
+              <a:srgbClr val="DDE6E3"/>
+            </a:solidFill>
+            <a:prstDash val="solid"/>
+          </a:ln>
+        </p:spPr>
+        <p:txBody>
+          <a:bodyPr/>
+          <a:lstStyle/>
+          <a:p>
+            <a:endParaRPr lang="fr-FR"/>
+          </a:p>
+        </p:txBody>
+      </p:sp>
+      <p:sp>
+        <p:nvSpPr>
+          <p:cNvPr id="5" name="Text 2"/>
           <p:cNvSpPr txBox="1"/>
           <p:nvPr/>
         </p:nvSpPr>
         <p:spPr>
           <a:xfrm>
-            <a:off x="640080" y="1188720"/>
-            <a:ext cx="7863840" cy="2011680"/>
+            <a:off x="6126480" y="1485900"/>
+            <a:ext cx="2560320" cy="502920"/>
           </a:xfrm>
           <a:prstGeom prst="rect">
             <a:avLst/>
@@ -14323,74 +14299,212 @@
           <a:ln/>
         </p:spPr>
         <p:txBody>
+          <a:bodyPr wrap="square" lIns="0" tIns="0" rIns="0" bIns="0" rtlCol="0" anchor="ctr"/>
+          <a:lstStyle/>
+          <a:p>
+            <a:pPr marL="0" indent="0" algn="ctr">
+              <a:buNone/>
+            </a:pPr>
+            <a:r>
+              <a:rPr lang="fr-FR" sz="1600" b="1" dirty="0">
+                <a:solidFill>
+                  <a:srgbClr val="1B7F79"/>
+                </a:solidFill>
+                <a:latin typeface="Georgia" pitchFamily="34" charset="0"/>
+                <a:ea typeface="Georgia" pitchFamily="34" charset="-122"/>
+                <a:cs typeface="Georgia" pitchFamily="34" charset="-120"/>
+              </a:rPr>
+              <a:t>l'énergie et le CO2 ensemble</a:t>
+            </a:r>
+            <a:endParaRPr lang="en-US" sz="1600" dirty="0"/>
+          </a:p>
+        </p:txBody>
+      </p:sp>
+      <p:sp>
+        <p:nvSpPr>
+          <p:cNvPr id="6" name="Text 3"/>
+          <p:cNvSpPr txBox="1"/>
+          <p:nvPr/>
+        </p:nvSpPr>
+        <p:spPr>
+          <a:xfrm>
+            <a:off x="6058647" y="1188720"/>
+            <a:ext cx="2695986" cy="365760"/>
+          </a:xfrm>
+          <a:prstGeom prst="rect">
+            <a:avLst/>
+          </a:prstGeom>
+          <a:noFill/>
+          <a:ln/>
+        </p:spPr>
+        <p:txBody>
           <a:bodyPr wrap="square" lIns="0" tIns="0" rIns="0" bIns="0" rtlCol="0" anchor="t"/>
           <a:lstStyle/>
           <a:p>
-            <a:pPr marL="342900" indent="-342900">
-              <a:spcAft>
-                <a:spcPts val="1000"/>
-              </a:spcAft>
-              <a:buSzPct val="100000"/>
-              <a:buChar char="•"/>
+            <a:pPr marL="0" indent="0" algn="ctr">
+              <a:buNone/>
             </a:pPr>
             <a:r>
-              <a:rPr lang="en-US" sz="1600" dirty="0">
-                <a:solidFill>
-                  <a:srgbClr val="FFFFFF"/>
-                </a:solidFill>
-              </a:rPr>
-              <a:t>Un Random Forest estime la consommation d'énergie à ± 39 % (médiane) et le CO2 à ± 56 %, avec les seules données structurelles</a:t>
-            </a:r>
-            <a:endParaRPr lang="en-US" sz="1600" dirty="0"/>
-          </a:p>
-          <a:p>
-            <a:pPr marL="342900" indent="-342900">
-              <a:spcAft>
-                <a:spcPts val="1000"/>
-              </a:spcAft>
-              <a:buSzPct val="100000"/>
-              <a:buChar char="•"/>
+              <a:rPr lang="en-US" sz="1200" dirty="0">
+                <a:solidFill>
+                  <a:srgbClr val="5B6B7A"/>
+                </a:solidFill>
+              </a:rPr>
+              <a:t>Le </a:t>
+            </a:r>
+            <a:r>
+              <a:rPr lang="en-US" sz="1200" dirty="0" err="1">
+                <a:solidFill>
+                  <a:srgbClr val="5B6B7A"/>
+                </a:solidFill>
+              </a:rPr>
+              <a:t>lancement</a:t>
+            </a:r>
+            <a:r>
+              <a:rPr lang="en-US" sz="1200" dirty="0">
+                <a:solidFill>
+                  <a:srgbClr val="5B6B7A"/>
+                </a:solidFill>
+              </a:rPr>
+              <a:t> </a:t>
+            </a:r>
+            <a:r>
+              <a:rPr lang="en-US" sz="1200" dirty="0" err="1">
+                <a:solidFill>
+                  <a:srgbClr val="5B6B7A"/>
+                </a:solidFill>
+              </a:rPr>
+              <a:t>d’une</a:t>
+            </a:r>
+            <a:r>
+              <a:rPr lang="en-US" sz="1200" dirty="0">
+                <a:solidFill>
+                  <a:srgbClr val="5B6B7A"/>
+                </a:solidFill>
+              </a:rPr>
+              <a:t> estimation propose</a:t>
+            </a:r>
+            <a:endParaRPr lang="en-US" sz="1200" dirty="0"/>
+          </a:p>
+        </p:txBody>
+      </p:sp>
+      <p:sp>
+        <p:nvSpPr>
+          <p:cNvPr id="7" name="Shape 4"/>
+          <p:cNvSpPr/>
+          <p:nvPr/>
+        </p:nvSpPr>
+        <p:spPr>
+          <a:xfrm>
+            <a:off x="6126480" y="2286000"/>
+            <a:ext cx="2560320" cy="1005840"/>
+          </a:xfrm>
+          <a:prstGeom prst="rect">
+            <a:avLst/>
+          </a:prstGeom>
+          <a:solidFill>
+            <a:srgbClr val="F2F6F5"/>
+          </a:solidFill>
+          <a:ln w="9525">
+            <a:solidFill>
+              <a:srgbClr val="DDE6E3"/>
+            </a:solidFill>
+            <a:prstDash val="solid"/>
+          </a:ln>
+        </p:spPr>
+        <p:txBody>
+          <a:bodyPr/>
+          <a:lstStyle/>
+          <a:p>
+            <a:endParaRPr lang="fr-FR"/>
+          </a:p>
+        </p:txBody>
+      </p:sp>
+      <p:sp>
+        <p:nvSpPr>
+          <p:cNvPr id="8" name="Text 5"/>
+          <p:cNvSpPr txBox="1"/>
+          <p:nvPr/>
+        </p:nvSpPr>
+        <p:spPr>
+          <a:xfrm>
+            <a:off x="6126480" y="2359152"/>
+            <a:ext cx="2560320" cy="502920"/>
+          </a:xfrm>
+          <a:prstGeom prst="rect">
+            <a:avLst/>
+          </a:prstGeom>
+          <a:noFill/>
+          <a:ln/>
+        </p:spPr>
+        <p:txBody>
+          <a:bodyPr wrap="square" lIns="0" tIns="0" rIns="0" bIns="0" rtlCol="0" anchor="ctr"/>
+          <a:lstStyle/>
+          <a:p>
+            <a:pPr marL="0" indent="0" algn="ctr">
+              <a:buNone/>
             </a:pPr>
             <a:r>
-              <a:rPr lang="en-US" sz="1600" dirty="0">
-                <a:solidFill>
-                  <a:srgbClr val="FFFFFF"/>
-                </a:solidFill>
-              </a:rPr>
-              <a:t>La surface totale fait l'essentiel ; le type de propriété compte surtout pour les émissions de CO2</a:t>
-            </a:r>
-            <a:endParaRPr lang="en-US" sz="1600" dirty="0"/>
-          </a:p>
-          <a:p>
-            <a:pPr marL="342900" indent="-342900">
-              <a:spcAft>
-                <a:spcPts val="1000"/>
-              </a:spcAft>
-              <a:buSzPct val="100000"/>
-              <a:buChar char="•"/>
+              <a:rPr lang="en-US" sz="2800" b="1" dirty="0">
+                <a:solidFill>
+                  <a:srgbClr val="F2A541"/>
+                </a:solidFill>
+                <a:latin typeface="Georgia" pitchFamily="34" charset="0"/>
+                <a:ea typeface="Georgia" pitchFamily="34" charset="-122"/>
+                <a:cs typeface="Georgia" pitchFamily="34" charset="-120"/>
+              </a:rPr>
+              <a:t>pi² ou m²</a:t>
+            </a:r>
+            <a:endParaRPr lang="en-US" sz="2800" dirty="0"/>
+          </a:p>
+        </p:txBody>
+      </p:sp>
+      <p:sp>
+        <p:nvSpPr>
+          <p:cNvPr id="9" name="Text 6"/>
+          <p:cNvSpPr txBox="1"/>
+          <p:nvPr/>
+        </p:nvSpPr>
+        <p:spPr>
+          <a:xfrm>
+            <a:off x="6217920" y="2880360"/>
+            <a:ext cx="2377440" cy="365760"/>
+          </a:xfrm>
+          <a:prstGeom prst="rect">
+            <a:avLst/>
+          </a:prstGeom>
+          <a:noFill/>
+          <a:ln/>
+        </p:spPr>
+        <p:txBody>
+          <a:bodyPr wrap="square" lIns="0" tIns="0" rIns="0" bIns="0" rtlCol="0" anchor="t"/>
+          <a:lstStyle/>
+          <a:p>
+            <a:pPr marL="0" indent="0" algn="ctr">
+              <a:buNone/>
             </a:pPr>
             <a:r>
-              <a:rPr lang="en-US" sz="1600" dirty="0">
-                <a:solidFill>
-                  <a:srgbClr val="FFFFFF"/>
-                </a:solidFill>
-              </a:rPr>
-              <a:t>Le modèle est exposé par une API BentoML validée par Pydantic, empaquetée dans Docker et déployée sur Google Cloud Run</a:t>
-            </a:r>
-            <a:endParaRPr lang="en-US" sz="1600" dirty="0"/>
-          </a:p>
-        </p:txBody>
-      </p:sp>
-      <p:sp>
-        <p:nvSpPr>
-          <p:cNvPr id="4" name="Text 2"/>
+              <a:rPr lang="en-US" sz="1200" dirty="0">
+                <a:solidFill>
+                  <a:srgbClr val="5B6B7A"/>
+                </a:solidFill>
+              </a:rPr>
+              <a:t>position GPS pré-remplie par quartier</a:t>
+            </a:r>
+            <a:endParaRPr lang="en-US" sz="1200" dirty="0"/>
+          </a:p>
+        </p:txBody>
+      </p:sp>
+      <p:sp>
+        <p:nvSpPr>
+          <p:cNvPr id="10" name="Text 7"/>
           <p:cNvSpPr txBox="1"/>
           <p:nvPr/>
         </p:nvSpPr>
         <p:spPr>
           <a:xfrm>
-            <a:off x="640080" y="3383280"/>
-            <a:ext cx="7863840" cy="822960"/>
+            <a:off x="457200" y="3657600"/>
+            <a:ext cx="5394960" cy="822960"/>
           </a:xfrm>
           <a:prstGeom prst="rect">
             <a:avLst/>
@@ -14406,112 +14520,122 @@
               <a:buNone/>
             </a:pPr>
             <a:r>
-              <a:rPr lang="en-US" sz="1400" i="1" dirty="0">
-                <a:solidFill>
-                  <a:srgbClr val="CFE3E0"/>
-                </a:solidFill>
-              </a:rPr>
-              <a:t>Limites : sur-</a:t>
-            </a:r>
-            <a:r>
-              <a:rPr lang="en-US" sz="1400" i="1" dirty="0" err="1">
-                <a:solidFill>
-                  <a:srgbClr val="CFE3E0"/>
-                </a:solidFill>
-              </a:rPr>
-              <a:t>apprentissage</a:t>
-            </a:r>
-            <a:r>
-              <a:rPr lang="en-US" sz="1400" i="1" dirty="0">
-                <a:solidFill>
-                  <a:srgbClr val="CFE3E0"/>
-                </a:solidFill>
-              </a:rPr>
-              <a:t>, 1 479 bâtiments seulement. </a:t>
-            </a:r>
-          </a:p>
+              <a:rPr lang="en-US" sz="1200" dirty="0">
+                <a:solidFill>
+                  <a:srgbClr val="5B6B7A"/>
+                </a:solidFill>
+              </a:rPr>
+              <a:t>Page servie à l'adresse /Accueil_conso/ du même service : aucune installation pour l'utilisateur.</a:t>
+            </a:r>
+            <a:endParaRPr lang="en-US" sz="1200" dirty="0"/>
+          </a:p>
+        </p:txBody>
+      </p:sp>
+      <p:sp>
+        <p:nvSpPr>
+          <p:cNvPr id="11" name="Text 8"/>
+          <p:cNvSpPr txBox="1"/>
+          <p:nvPr/>
+        </p:nvSpPr>
+        <p:spPr>
+          <a:xfrm>
+            <a:off x="6126480" y="3474720"/>
+            <a:ext cx="2560320" cy="822960"/>
+          </a:xfrm>
+          <a:prstGeom prst="rect">
+            <a:avLst/>
+          </a:prstGeom>
+          <a:noFill/>
+          <a:ln/>
+        </p:spPr>
+        <p:txBody>
+          <a:bodyPr wrap="square" lIns="0" tIns="0" rIns="0" bIns="0" rtlCol="0" anchor="t"/>
+          <a:lstStyle/>
           <a:p>
             <a:pPr marL="0" indent="0">
               <a:buNone/>
             </a:pPr>
-            <a:endParaRPr lang="en-US" sz="1400" i="1" dirty="0">
-              <a:solidFill>
-                <a:srgbClr val="CFE3E0"/>
-              </a:solidFill>
-            </a:endParaRPr>
-          </a:p>
-          <a:p>
-            <a:pPr marL="0" indent="0">
-              <a:buNone/>
-            </a:pPr>
-            <a:r>
-              <a:rPr lang="en-US" sz="1400" i="1" dirty="0" err="1">
-                <a:solidFill>
-                  <a:srgbClr val="CFE3E0"/>
-                </a:solidFill>
-              </a:rPr>
-              <a:t>Améliorations</a:t>
-            </a:r>
-            <a:r>
-              <a:rPr lang="en-US" sz="1400" i="1" dirty="0">
-                <a:solidFill>
-                  <a:srgbClr val="CFE3E0"/>
-                </a:solidFill>
-              </a:rPr>
-              <a:t> : données 2015-2026, Tester d’autres </a:t>
-            </a:r>
-            <a:r>
-              <a:rPr lang="en-US" sz="1400" i="1" dirty="0" err="1">
-                <a:solidFill>
-                  <a:srgbClr val="CFE3E0"/>
-                </a:solidFill>
-              </a:rPr>
-              <a:t>modèles</a:t>
-            </a:r>
-            <a:r>
-              <a:rPr lang="en-US" sz="1400" i="1" dirty="0">
-                <a:solidFill>
-                  <a:srgbClr val="CFE3E0"/>
-                </a:solidFill>
-              </a:rPr>
-              <a:t>, augmentation type de données (occupation, </a:t>
-            </a:r>
-            <a:r>
-              <a:rPr lang="en-US" sz="1400" i="1" dirty="0" err="1">
-                <a:solidFill>
-                  <a:srgbClr val="CFE3E0"/>
-                </a:solidFill>
-              </a:rPr>
-              <a:t>équipements</a:t>
-            </a:r>
-            <a:r>
-              <a:rPr lang="en-US" sz="1400" i="1" dirty="0">
-                <a:solidFill>
-                  <a:srgbClr val="CFE3E0"/>
-                </a:solidFill>
-              </a:rPr>
-              <a:t> </a:t>
-            </a:r>
-            <a:r>
-              <a:rPr lang="en-US" sz="1400" i="1" dirty="0" err="1">
-                <a:solidFill>
-                  <a:srgbClr val="CFE3E0"/>
-                </a:solidFill>
-              </a:rPr>
-              <a:t>etc</a:t>
-            </a:r>
-            <a:r>
-              <a:rPr lang="en-US" sz="1400" i="1" dirty="0">
-                <a:solidFill>
-                  <a:srgbClr val="CFE3E0"/>
-                </a:solidFill>
-              </a:rPr>
-              <a:t>…)</a:t>
-            </a:r>
-            <a:endParaRPr lang="en-US" sz="1400" dirty="0"/>
-          </a:p>
-        </p:txBody>
-      </p:sp>
+            <a:r>
+              <a:rPr lang="en-US" sz="1300" b="1" dirty="0">
+                <a:solidFill>
+                  <a:srgbClr val="12263A"/>
+                </a:solidFill>
+              </a:rPr>
+              <a:t>Estimation indicative : l'écart médian (39 % et 56 %) est rappelé à l'écran.</a:t>
+            </a:r>
+            <a:endParaRPr lang="en-US" sz="1300" dirty="0"/>
+          </a:p>
+        </p:txBody>
+      </p:sp>
+      <p:sp>
+        <p:nvSpPr>
+          <p:cNvPr id="25" name="Slide Number Placeholder 0"/>
+          <p:cNvSpPr>
+            <a:spLocks noGrp="1"/>
+          </p:cNvSpPr>
+          <p:nvPr>
+            <p:ph type="sldNum" sz="quarter" idx="4294967295"/>
+          </p:nvPr>
+        </p:nvSpPr>
+        <p:spPr>
+          <a:xfrm>
+            <a:off x="8321040" y="4828032"/>
+            <a:ext cx="457200" cy="228600"/>
+          </a:xfrm>
+          <a:prstGeom prst="rect">
+            <a:avLst/>
+          </a:prstGeom>
+          <a:extLst>
+            <a:ext uri="{C572A759-6A51-4108-AA02-DFA0A04FC94B}">
+              <ma14:wrappingTextBoxFlag xmlns="" xmlns:ma14="http://schemas.microsoft.com/office/mac/drawingml/2011/main" val="0"/>
+            </a:ext>
+          </a:extLst>
+        </p:spPr>
+        <p:txBody>
+          <a:bodyPr/>
+          <a:lstStyle>
+            <a:lvl1pPr>
+              <a:defRPr sz="900">
+                <a:solidFill>
+                  <a:srgbClr val="5B6B7A"/>
+                </a:solidFill>
+              </a:defRPr>
+            </a:lvl1pPr>
+          </a:lstStyle>
+          <a:p>
+            <a:pPr algn="l"/>
+            <a:fld id="{F7021451-1387-4CA6-816F-3879F97B5CBC}" type="slidenum">
+              <a:rPr lang="en-US" b="0"/>
+              <a:t>19</a:t>
+            </a:fld>
+            <a:endParaRPr lang="en-US"/>
+          </a:p>
+        </p:txBody>
+      </p:sp>
+      <p:pic>
+        <p:nvPicPr>
+          <p:cNvPr id="26" name="Picture 25" descr="form_crop.png"/>
+          <p:cNvPicPr>
+            <a:picLocks noChangeAspect="1"/>
+          </p:cNvPicPr>
+          <p:nvPr/>
+        </p:nvPicPr>
+        <p:blipFill>
+          <a:blip r:embed="rId2"/>
+          <a:stretch>
+            <a:fillRect/>
+          </a:stretch>
+        </p:blipFill>
+        <p:spPr>
+          <a:xfrm>
+            <a:off x="365760" y="1097280"/>
+            <a:ext cx="5486400" cy="2394065"/>
+          </a:xfrm>
+          <a:prstGeom prst="rect">
+            <a:avLst/>
+          </a:prstGeom>
+        </p:spPr>
+      </p:pic>
     </p:spTree>
   </p:cSld>
   <p:clrMapOvr>
@@ -14660,7 +14784,7 @@
         </p:nvSpPr>
         <p:spPr>
           <a:xfrm>
-            <a:off x="5029200" y="1234440"/>
+            <a:off x="5029200" y="1551842"/>
             <a:ext cx="3657600" cy="1005840"/>
           </a:xfrm>
           <a:prstGeom prst="rect">
@@ -14692,7 +14816,7 @@
         </p:nvSpPr>
         <p:spPr>
           <a:xfrm>
-            <a:off x="5029200" y="1307592"/>
+            <a:off x="5029200" y="1624994"/>
             <a:ext cx="3657600" cy="502920"/>
           </a:xfrm>
           <a:prstGeom prst="rect">
@@ -14731,7 +14855,7 @@
         </p:nvSpPr>
         <p:spPr>
           <a:xfrm>
-            <a:off x="5120640" y="1828800"/>
+            <a:off x="5120640" y="2146202"/>
             <a:ext cx="3474720" cy="365760"/>
           </a:xfrm>
           <a:prstGeom prst="rect">
@@ -14761,13 +14885,13 @@
       </p:sp>
       <p:sp>
         <p:nvSpPr>
-          <p:cNvPr id="7" name="Shape 5"/>
+          <p:cNvPr id="10" name="Shape 8"/>
           <p:cNvSpPr/>
           <p:nvPr/>
         </p:nvSpPr>
         <p:spPr>
           <a:xfrm>
-            <a:off x="5029200" y="2423160"/>
+            <a:off x="5029200" y="3108960"/>
             <a:ext cx="3657600" cy="1005840"/>
           </a:xfrm>
           <a:prstGeom prst="rect">
@@ -14793,13 +14917,13 @@
       </p:sp>
       <p:sp>
         <p:nvSpPr>
-          <p:cNvPr id="8" name="Text 6"/>
+          <p:cNvPr id="11" name="Text 9"/>
           <p:cNvSpPr txBox="1"/>
           <p:nvPr/>
         </p:nvSpPr>
         <p:spPr>
           <a:xfrm>
-            <a:off x="5029200" y="2496312"/>
+            <a:off x="5029200" y="3182112"/>
             <a:ext cx="3657600" cy="502920"/>
           </a:xfrm>
           <a:prstGeom prst="rect">
@@ -14818,119 +14942,12 @@
             <a:r>
               <a:rPr lang="en-US" sz="2800" b="1" dirty="0">
                 <a:solidFill>
-                  <a:srgbClr val="1B7F79"/>
+                  <a:srgbClr val="F2A541"/>
                 </a:solidFill>
                 <a:latin typeface="Georgia" pitchFamily="34" charset="0"/>
                 <a:ea typeface="Georgia" pitchFamily="34" charset="-122"/>
                 <a:cs typeface="Georgia" pitchFamily="34" charset="-120"/>
               </a:rPr>
-              <a:t>1 479</a:t>
-            </a:r>
-            <a:endParaRPr lang="en-US" sz="2800" dirty="0"/>
-          </a:p>
-        </p:txBody>
-      </p:sp>
-      <p:sp>
-        <p:nvSpPr>
-          <p:cNvPr id="9" name="Text 7"/>
-          <p:cNvSpPr txBox="1"/>
-          <p:nvPr/>
-        </p:nvSpPr>
-        <p:spPr>
-          <a:xfrm>
-            <a:off x="5120640" y="3017520"/>
-            <a:ext cx="3474720" cy="365760"/>
-          </a:xfrm>
-          <a:prstGeom prst="rect">
-            <a:avLst/>
-          </a:prstGeom>
-          <a:noFill/>
-          <a:ln/>
-        </p:spPr>
-        <p:txBody>
-          <a:bodyPr wrap="square" lIns="0" tIns="0" rIns="0" bIns="0" rtlCol="0" anchor="t"/>
-          <a:lstStyle/>
-          <a:p>
-            <a:pPr marL="0" indent="0" algn="ctr">
-              <a:buNone/>
-            </a:pPr>
-            <a:r>
-              <a:rPr lang="en-US" sz="1200" dirty="0">
-                <a:solidFill>
-                  <a:srgbClr val="5B6B7A"/>
-                </a:solidFill>
-              </a:rPr>
-              <a:t>bâtiments non résidentiels modélisés</a:t>
-            </a:r>
-            <a:endParaRPr lang="en-US" sz="1200" dirty="0"/>
-          </a:p>
-        </p:txBody>
-      </p:sp>
-      <p:sp>
-        <p:nvSpPr>
-          <p:cNvPr id="10" name="Shape 8"/>
-          <p:cNvSpPr/>
-          <p:nvPr/>
-        </p:nvSpPr>
-        <p:spPr>
-          <a:xfrm>
-            <a:off x="5029200" y="3611880"/>
-            <a:ext cx="3657600" cy="1005840"/>
-          </a:xfrm>
-          <a:prstGeom prst="rect">
-            <a:avLst/>
-          </a:prstGeom>
-          <a:solidFill>
-            <a:srgbClr val="F2F6F5"/>
-          </a:solidFill>
-          <a:ln w="9525">
-            <a:solidFill>
-              <a:srgbClr val="DDE6E3"/>
-            </a:solidFill>
-            <a:prstDash val="solid"/>
-          </a:ln>
-        </p:spPr>
-        <p:txBody>
-          <a:bodyPr/>
-          <a:lstStyle/>
-          <a:p>
-            <a:endParaRPr lang="fr-FR"/>
-          </a:p>
-        </p:txBody>
-      </p:sp>
-      <p:sp>
-        <p:nvSpPr>
-          <p:cNvPr id="11" name="Text 9"/>
-          <p:cNvSpPr txBox="1"/>
-          <p:nvPr/>
-        </p:nvSpPr>
-        <p:spPr>
-          <a:xfrm>
-            <a:off x="5029200" y="3685032"/>
-            <a:ext cx="3657600" cy="502920"/>
-          </a:xfrm>
-          <a:prstGeom prst="rect">
-            <a:avLst/>
-          </a:prstGeom>
-          <a:noFill/>
-          <a:ln/>
-        </p:spPr>
-        <p:txBody>
-          <a:bodyPr wrap="square" lIns="0" tIns="0" rIns="0" bIns="0" rtlCol="0" anchor="ctr"/>
-          <a:lstStyle/>
-          <a:p>
-            <a:pPr marL="0" indent="0" algn="ctr">
-              <a:buNone/>
-            </a:pPr>
-            <a:r>
-              <a:rPr lang="en-US" sz="2800" b="1" dirty="0">
-                <a:solidFill>
-                  <a:srgbClr val="F2A541"/>
-                </a:solidFill>
-                <a:latin typeface="Georgia" pitchFamily="34" charset="0"/>
-                <a:ea typeface="Georgia" pitchFamily="34" charset="-122"/>
-                <a:cs typeface="Georgia" pitchFamily="34" charset="-120"/>
-              </a:rPr>
               <a:t>2 cibles</a:t>
             </a:r>
             <a:endParaRPr lang="en-US" sz="2800" dirty="0"/>
@@ -14945,7 +14962,7 @@
         </p:nvSpPr>
         <p:spPr>
           <a:xfrm>
-            <a:off x="5120640" y="4206240"/>
+            <a:off x="5120640" y="3703320"/>
             <a:ext cx="3474720" cy="365760"/>
           </a:xfrm>
           <a:prstGeom prst="rect">
@@ -14993,7 +15010,7 @@
           </a:prstGeom>
           <a:extLst>
             <a:ext uri="{C572A759-6A51-4108-AA02-DFA0A04FC94B}">
-              <ma14:wrappingTextBoxFlag xmlns:ma14="http://schemas.microsoft.com/office/mac/drawingml/2011/main" xmlns="" val="0"/>
+              <ma14:wrappingTextBoxFlag xmlns="" xmlns:ma14="http://schemas.microsoft.com/office/mac/drawingml/2011/main" val="0"/>
             </a:ext>
           </a:extLst>
         </p:spPr>
@@ -15015,6 +15032,976 @@
               <a:t>2</a:t>
             </a:fld>
             <a:endParaRPr lang="en-US"/>
+          </a:p>
+        </p:txBody>
+      </p:sp>
+    </p:spTree>
+  </p:cSld>
+  <p:clrMapOvr>
+    <a:masterClrMapping/>
+  </p:clrMapOvr>
+</p:sld>
+</file>
+
+<file path=ppt/slides/slide20.xml><?xml version="1.0" encoding="utf-8"?>
+<p:sld xmlns:a="http://schemas.openxmlformats.org/drawingml/2006/main" xmlns:r="http://schemas.openxmlformats.org/officeDocument/2006/relationships" xmlns:p="http://schemas.openxmlformats.org/presentationml/2006/main">
+  <p:cSld>
+    <p:spTree>
+      <p:nvGrpSpPr>
+        <p:cNvPr id="1" name=""/>
+        <p:cNvGrpSpPr/>
+        <p:nvPr/>
+      </p:nvGrpSpPr>
+      <p:grpSpPr>
+        <a:xfrm>
+          <a:off x="0" y="0"/>
+          <a:ext cx="0" cy="0"/>
+          <a:chOff x="0" y="0"/>
+          <a:chExt cx="0" cy="0"/>
+        </a:xfrm>
+      </p:grpSpPr>
+      <p:sp>
+        <p:nvSpPr>
+          <p:cNvPr id="2" name="Titre"/>
+          <p:cNvSpPr txBox="1"/>
+          <p:nvPr/>
+        </p:nvSpPr>
+        <p:spPr>
+          <a:xfrm>
+            <a:off x="457200" y="228600"/>
+            <a:ext cx="8229600" cy="777240"/>
+          </a:xfrm>
+          <a:prstGeom prst="rect">
+            <a:avLst/>
+          </a:prstGeom>
+          <a:noFill/>
+          <a:ln/>
+        </p:spPr>
+        <p:txBody>
+          <a:bodyPr wrap="square" lIns="0" tIns="0" rIns="0" bIns="0" rtlCol="0" anchor="ctr"/>
+          <a:lstStyle/>
+          <a:p>
+            <a:pPr marL="0" indent="0">
+              <a:buNone/>
+            </a:pPr>
+            <a:r>
+              <a:rPr lang="en-US" sz="2400" b="1" dirty="0">
+                <a:solidFill>
+                  <a:schemeClr val="tx1"/>
+                </a:solidFill>
+                <a:latin typeface="Georgia" pitchFamily="34" charset="0"/>
+                <a:ea typeface="Georgia" pitchFamily="34" charset="-122"/>
+                <a:cs typeface="Georgia" pitchFamily="34" charset="-120"/>
+              </a:rPr>
+              <a:t>Le modèle est empaqueté dans une image Docker puis publié sur Google Cloud</a:t>
+            </a:r>
+            <a:endParaRPr lang="en-US" sz="2400" dirty="0"/>
+          </a:p>
+        </p:txBody>
+      </p:sp>
+      <p:sp>
+        <p:nvSpPr>
+          <p:cNvPr id="3" name="Shape 1"/>
+          <p:cNvSpPr/>
+          <p:nvPr/>
+        </p:nvSpPr>
+        <p:spPr>
+          <a:xfrm>
+            <a:off x="1234440" y="1739751"/>
+            <a:ext cx="457200" cy="457200"/>
+          </a:xfrm>
+          <a:prstGeom prst="ellipse">
+            <a:avLst/>
+          </a:prstGeom>
+          <a:solidFill>
+            <a:srgbClr val="1B7F79"/>
+          </a:solidFill>
+          <a:ln w="12700">
+            <a:solidFill>
+              <a:srgbClr val="1B7F79"/>
+            </a:solidFill>
+            <a:prstDash val="solid"/>
+          </a:ln>
+        </p:spPr>
+        <p:txBody>
+          <a:bodyPr/>
+          <a:lstStyle/>
+          <a:p>
+            <a:endParaRPr lang="fr-FR"/>
+          </a:p>
+        </p:txBody>
+      </p:sp>
+      <p:sp>
+        <p:nvSpPr>
+          <p:cNvPr id="4" name="Text 2"/>
+          <p:cNvSpPr txBox="1"/>
+          <p:nvPr/>
+        </p:nvSpPr>
+        <p:spPr>
+          <a:xfrm>
+            <a:off x="1234440" y="1739751"/>
+            <a:ext cx="457200" cy="457200"/>
+          </a:xfrm>
+          <a:prstGeom prst="rect">
+            <a:avLst/>
+          </a:prstGeom>
+          <a:noFill/>
+          <a:ln/>
+        </p:spPr>
+        <p:txBody>
+          <a:bodyPr wrap="square" lIns="0" tIns="0" rIns="0" bIns="0" rtlCol="0" anchor="ctr"/>
+          <a:lstStyle/>
+          <a:p>
+            <a:pPr marL="0" indent="0" algn="ctr">
+              <a:buNone/>
+            </a:pPr>
+            <a:r>
+              <a:rPr lang="en-US" sz="1600" b="1" dirty="0">
+                <a:solidFill>
+                  <a:srgbClr val="FFFFFF"/>
+                </a:solidFill>
+              </a:rPr>
+              <a:t>1</a:t>
+            </a:r>
+            <a:endParaRPr lang="en-US" sz="1600" dirty="0"/>
+          </a:p>
+        </p:txBody>
+      </p:sp>
+      <p:sp>
+        <p:nvSpPr>
+          <p:cNvPr id="5" name="Text 3"/>
+          <p:cNvSpPr txBox="1"/>
+          <p:nvPr/>
+        </p:nvSpPr>
+        <p:spPr>
+          <a:xfrm>
+            <a:off x="457200" y="2334111"/>
+            <a:ext cx="2011680" cy="320040"/>
+          </a:xfrm>
+          <a:prstGeom prst="rect">
+            <a:avLst/>
+          </a:prstGeom>
+          <a:noFill/>
+          <a:ln/>
+        </p:spPr>
+        <p:txBody>
+          <a:bodyPr wrap="square" lIns="0" tIns="0" rIns="0" bIns="0" rtlCol="0" anchor="ctr"/>
+          <a:lstStyle/>
+          <a:p>
+            <a:pPr marL="0" indent="0" algn="ctr">
+              <a:buNone/>
+            </a:pPr>
+            <a:r>
+              <a:rPr lang="en-US" sz="1400" b="1" dirty="0">
+                <a:solidFill>
+                  <a:schemeClr val="tx1"/>
+                </a:solidFill>
+              </a:rPr>
+              <a:t>Bento local</a:t>
+            </a:r>
+            <a:endParaRPr lang="en-US" sz="1400" dirty="0"/>
+          </a:p>
+        </p:txBody>
+      </p:sp>
+      <p:sp>
+        <p:nvSpPr>
+          <p:cNvPr id="6" name="Text 4"/>
+          <p:cNvSpPr txBox="1"/>
+          <p:nvPr/>
+        </p:nvSpPr>
+        <p:spPr>
+          <a:xfrm>
+            <a:off x="457200" y="2699871"/>
+            <a:ext cx="2011680" cy="1371600"/>
+          </a:xfrm>
+          <a:prstGeom prst="rect">
+            <a:avLst/>
+          </a:prstGeom>
+          <a:noFill/>
+          <a:ln/>
+        </p:spPr>
+        <p:txBody>
+          <a:bodyPr wrap="square" lIns="0" tIns="0" rIns="0" bIns="0" rtlCol="0" anchor="t"/>
+          <a:lstStyle/>
+          <a:p>
+            <a:pPr marL="0" indent="0" algn="ctr">
+              <a:buNone/>
+            </a:pPr>
+            <a:r>
+              <a:rPr lang="en-US" sz="1200" dirty="0">
+                <a:solidFill>
+                  <a:srgbClr val="5B6B7A"/>
+                </a:solidFill>
+              </a:rPr>
+              <a:t>bentoml build puis export : service, modèles et dépendances dans un fichier</a:t>
+            </a:r>
+            <a:endParaRPr lang="en-US" sz="1200" dirty="0"/>
+          </a:p>
+        </p:txBody>
+      </p:sp>
+      <p:sp>
+        <p:nvSpPr>
+          <p:cNvPr id="7" name="Shape 5"/>
+          <p:cNvSpPr/>
+          <p:nvPr/>
+        </p:nvSpPr>
+        <p:spPr>
+          <a:xfrm>
+            <a:off x="3319272" y="1739751"/>
+            <a:ext cx="457200" cy="457200"/>
+          </a:xfrm>
+          <a:prstGeom prst="ellipse">
+            <a:avLst/>
+          </a:prstGeom>
+          <a:solidFill>
+            <a:srgbClr val="6C8EAD"/>
+          </a:solidFill>
+          <a:ln w="12700">
+            <a:solidFill>
+              <a:srgbClr val="6C8EAD"/>
+            </a:solidFill>
+            <a:prstDash val="solid"/>
+          </a:ln>
+        </p:spPr>
+        <p:txBody>
+          <a:bodyPr/>
+          <a:lstStyle/>
+          <a:p>
+            <a:endParaRPr lang="fr-FR"/>
+          </a:p>
+        </p:txBody>
+      </p:sp>
+      <p:sp>
+        <p:nvSpPr>
+          <p:cNvPr id="8" name="Text 6"/>
+          <p:cNvSpPr txBox="1"/>
+          <p:nvPr/>
+        </p:nvSpPr>
+        <p:spPr>
+          <a:xfrm>
+            <a:off x="3319272" y="1739751"/>
+            <a:ext cx="457200" cy="457200"/>
+          </a:xfrm>
+          <a:prstGeom prst="rect">
+            <a:avLst/>
+          </a:prstGeom>
+          <a:noFill/>
+          <a:ln/>
+        </p:spPr>
+        <p:txBody>
+          <a:bodyPr wrap="square" lIns="0" tIns="0" rIns="0" bIns="0" rtlCol="0" anchor="ctr"/>
+          <a:lstStyle/>
+          <a:p>
+            <a:pPr marL="0" indent="0" algn="ctr">
+              <a:buNone/>
+            </a:pPr>
+            <a:r>
+              <a:rPr lang="en-US" sz="1600" b="1" dirty="0">
+                <a:solidFill>
+                  <a:srgbClr val="FFFFFF"/>
+                </a:solidFill>
+              </a:rPr>
+              <a:t>2</a:t>
+            </a:r>
+            <a:endParaRPr lang="en-US" sz="1600" dirty="0"/>
+          </a:p>
+        </p:txBody>
+      </p:sp>
+      <p:sp>
+        <p:nvSpPr>
+          <p:cNvPr id="9" name="Text 7"/>
+          <p:cNvSpPr txBox="1"/>
+          <p:nvPr/>
+        </p:nvSpPr>
+        <p:spPr>
+          <a:xfrm>
+            <a:off x="2542032" y="2334111"/>
+            <a:ext cx="2011680" cy="320040"/>
+          </a:xfrm>
+          <a:prstGeom prst="rect">
+            <a:avLst/>
+          </a:prstGeom>
+          <a:noFill/>
+          <a:ln/>
+        </p:spPr>
+        <p:txBody>
+          <a:bodyPr wrap="square" lIns="0" tIns="0" rIns="0" bIns="0" rtlCol="0" anchor="ctr"/>
+          <a:lstStyle/>
+          <a:p>
+            <a:pPr marL="0" indent="0" algn="ctr">
+              <a:buNone/>
+            </a:pPr>
+            <a:r>
+              <a:rPr lang="en-US" sz="1400" b="1" dirty="0">
+                <a:solidFill>
+                  <a:schemeClr val="tx1"/>
+                </a:solidFill>
+              </a:rPr>
+              <a:t>Cloud Shell</a:t>
+            </a:r>
+            <a:endParaRPr lang="en-US" sz="1400" dirty="0"/>
+          </a:p>
+        </p:txBody>
+      </p:sp>
+      <p:sp>
+        <p:nvSpPr>
+          <p:cNvPr id="10" name="Text 8"/>
+          <p:cNvSpPr txBox="1"/>
+          <p:nvPr/>
+        </p:nvSpPr>
+        <p:spPr>
+          <a:xfrm>
+            <a:off x="2542032" y="2699871"/>
+            <a:ext cx="2011680" cy="1371600"/>
+          </a:xfrm>
+          <a:prstGeom prst="rect">
+            <a:avLst/>
+          </a:prstGeom>
+          <a:noFill/>
+          <a:ln/>
+        </p:spPr>
+        <p:txBody>
+          <a:bodyPr wrap="square" lIns="0" tIns="0" rIns="0" bIns="0" rtlCol="0" anchor="t"/>
+          <a:lstStyle/>
+          <a:p>
+            <a:pPr marL="0" indent="0" algn="ctr">
+              <a:buNone/>
+            </a:pPr>
+            <a:r>
+              <a:rPr lang="en-US" sz="1200" dirty="0">
+                <a:solidFill>
+                  <a:srgbClr val="5B6B7A"/>
+                </a:solidFill>
+              </a:rPr>
+              <a:t>Import du bento et préparation du contexte de build avec les modèles</a:t>
+            </a:r>
+            <a:endParaRPr lang="en-US" sz="1200" dirty="0"/>
+          </a:p>
+        </p:txBody>
+      </p:sp>
+      <p:sp>
+        <p:nvSpPr>
+          <p:cNvPr id="11" name="Shape 9"/>
+          <p:cNvSpPr/>
+          <p:nvPr/>
+        </p:nvSpPr>
+        <p:spPr>
+          <a:xfrm>
+            <a:off x="5404104" y="1739751"/>
+            <a:ext cx="457200" cy="457200"/>
+          </a:xfrm>
+          <a:prstGeom prst="ellipse">
+            <a:avLst/>
+          </a:prstGeom>
+          <a:solidFill>
+            <a:srgbClr val="F2A541"/>
+          </a:solidFill>
+          <a:ln w="12700">
+            <a:solidFill>
+              <a:srgbClr val="F2A541"/>
+            </a:solidFill>
+            <a:prstDash val="solid"/>
+          </a:ln>
+        </p:spPr>
+        <p:txBody>
+          <a:bodyPr/>
+          <a:lstStyle/>
+          <a:p>
+            <a:endParaRPr lang="fr-FR"/>
+          </a:p>
+        </p:txBody>
+      </p:sp>
+      <p:sp>
+        <p:nvSpPr>
+          <p:cNvPr id="12" name="Text 10"/>
+          <p:cNvSpPr txBox="1"/>
+          <p:nvPr/>
+        </p:nvSpPr>
+        <p:spPr>
+          <a:xfrm>
+            <a:off x="5404104" y="1739751"/>
+            <a:ext cx="457200" cy="457200"/>
+          </a:xfrm>
+          <a:prstGeom prst="rect">
+            <a:avLst/>
+          </a:prstGeom>
+          <a:noFill/>
+          <a:ln/>
+        </p:spPr>
+        <p:txBody>
+          <a:bodyPr wrap="square" lIns="0" tIns="0" rIns="0" bIns="0" rtlCol="0" anchor="ctr"/>
+          <a:lstStyle/>
+          <a:p>
+            <a:pPr marL="0" indent="0" algn="ctr">
+              <a:buNone/>
+            </a:pPr>
+            <a:r>
+              <a:rPr lang="en-US" sz="1600" b="1" dirty="0">
+                <a:solidFill>
+                  <a:srgbClr val="FFFFFF"/>
+                </a:solidFill>
+              </a:rPr>
+              <a:t>3</a:t>
+            </a:r>
+            <a:endParaRPr lang="en-US" sz="1600" dirty="0"/>
+          </a:p>
+        </p:txBody>
+      </p:sp>
+      <p:sp>
+        <p:nvSpPr>
+          <p:cNvPr id="13" name="Text 11"/>
+          <p:cNvSpPr txBox="1"/>
+          <p:nvPr/>
+        </p:nvSpPr>
+        <p:spPr>
+          <a:xfrm>
+            <a:off x="4626864" y="2334111"/>
+            <a:ext cx="2011680" cy="320040"/>
+          </a:xfrm>
+          <a:prstGeom prst="rect">
+            <a:avLst/>
+          </a:prstGeom>
+          <a:noFill/>
+          <a:ln/>
+        </p:spPr>
+        <p:txBody>
+          <a:bodyPr wrap="square" lIns="0" tIns="0" rIns="0" bIns="0" rtlCol="0" anchor="ctr"/>
+          <a:lstStyle/>
+          <a:p>
+            <a:pPr marL="0" indent="0" algn="ctr">
+              <a:buNone/>
+            </a:pPr>
+            <a:r>
+              <a:rPr lang="en-US" sz="1400" b="1" dirty="0">
+                <a:solidFill>
+                  <a:schemeClr val="tx1"/>
+                </a:solidFill>
+              </a:rPr>
+              <a:t>Image Docker</a:t>
+            </a:r>
+            <a:endParaRPr lang="en-US" sz="1400" dirty="0"/>
+          </a:p>
+        </p:txBody>
+      </p:sp>
+      <p:sp>
+        <p:nvSpPr>
+          <p:cNvPr id="14" name="Text 12"/>
+          <p:cNvSpPr txBox="1"/>
+          <p:nvPr/>
+        </p:nvSpPr>
+        <p:spPr>
+          <a:xfrm>
+            <a:off x="4626864" y="2699871"/>
+            <a:ext cx="2011680" cy="1371600"/>
+          </a:xfrm>
+          <a:prstGeom prst="rect">
+            <a:avLst/>
+          </a:prstGeom>
+          <a:noFill/>
+          <a:ln/>
+        </p:spPr>
+        <p:txBody>
+          <a:bodyPr wrap="square" lIns="0" tIns="0" rIns="0" bIns="0" rtlCol="0" anchor="t"/>
+          <a:lstStyle/>
+          <a:p>
+            <a:pPr marL="0" indent="0" algn="ctr">
+              <a:buNone/>
+            </a:pPr>
+            <a:r>
+              <a:rPr lang="en-US" sz="1200" dirty="0">
+                <a:solidFill>
+                  <a:srgbClr val="5B6B7A"/>
+                </a:solidFill>
+              </a:rPr>
+              <a:t>Cloud Build construit l'image, stockée dans Artifact Registry</a:t>
+            </a:r>
+            <a:endParaRPr lang="en-US" sz="1200" dirty="0"/>
+          </a:p>
+        </p:txBody>
+      </p:sp>
+      <p:sp>
+        <p:nvSpPr>
+          <p:cNvPr id="15" name="Shape 13"/>
+          <p:cNvSpPr/>
+          <p:nvPr/>
+        </p:nvSpPr>
+        <p:spPr>
+          <a:xfrm>
+            <a:off x="7488936" y="1739751"/>
+            <a:ext cx="457200" cy="457200"/>
+          </a:xfrm>
+          <a:prstGeom prst="ellipse">
+            <a:avLst/>
+          </a:prstGeom>
+          <a:solidFill>
+            <a:srgbClr val="D1495B"/>
+          </a:solidFill>
+          <a:ln w="12700">
+            <a:solidFill>
+              <a:srgbClr val="D1495B"/>
+            </a:solidFill>
+            <a:prstDash val="solid"/>
+          </a:ln>
+        </p:spPr>
+        <p:txBody>
+          <a:bodyPr/>
+          <a:lstStyle/>
+          <a:p>
+            <a:endParaRPr lang="fr-FR"/>
+          </a:p>
+        </p:txBody>
+      </p:sp>
+      <p:sp>
+        <p:nvSpPr>
+          <p:cNvPr id="16" name="Text 14"/>
+          <p:cNvSpPr txBox="1"/>
+          <p:nvPr/>
+        </p:nvSpPr>
+        <p:spPr>
+          <a:xfrm>
+            <a:off x="7488936" y="1739751"/>
+            <a:ext cx="457200" cy="457200"/>
+          </a:xfrm>
+          <a:prstGeom prst="rect">
+            <a:avLst/>
+          </a:prstGeom>
+          <a:noFill/>
+          <a:ln/>
+        </p:spPr>
+        <p:txBody>
+          <a:bodyPr wrap="square" lIns="0" tIns="0" rIns="0" bIns="0" rtlCol="0" anchor="ctr"/>
+          <a:lstStyle/>
+          <a:p>
+            <a:pPr marL="0" indent="0" algn="ctr">
+              <a:buNone/>
+            </a:pPr>
+            <a:r>
+              <a:rPr lang="en-US" sz="1600" b="1" dirty="0">
+                <a:solidFill>
+                  <a:srgbClr val="FFFFFF"/>
+                </a:solidFill>
+              </a:rPr>
+              <a:t>4</a:t>
+            </a:r>
+            <a:endParaRPr lang="en-US" sz="1600" dirty="0"/>
+          </a:p>
+        </p:txBody>
+      </p:sp>
+      <p:sp>
+        <p:nvSpPr>
+          <p:cNvPr id="17" name="Text 15"/>
+          <p:cNvSpPr txBox="1"/>
+          <p:nvPr/>
+        </p:nvSpPr>
+        <p:spPr>
+          <a:xfrm>
+            <a:off x="6711696" y="2334111"/>
+            <a:ext cx="2011680" cy="320040"/>
+          </a:xfrm>
+          <a:prstGeom prst="rect">
+            <a:avLst/>
+          </a:prstGeom>
+          <a:noFill/>
+          <a:ln/>
+        </p:spPr>
+        <p:txBody>
+          <a:bodyPr wrap="square" lIns="0" tIns="0" rIns="0" bIns="0" rtlCol="0" anchor="ctr"/>
+          <a:lstStyle/>
+          <a:p>
+            <a:pPr marL="0" indent="0" algn="ctr">
+              <a:buNone/>
+            </a:pPr>
+            <a:r>
+              <a:rPr lang="en-US" sz="1400" b="1" dirty="0">
+                <a:solidFill>
+                  <a:schemeClr val="tx1"/>
+                </a:solidFill>
+              </a:rPr>
+              <a:t>Cloud Run</a:t>
+            </a:r>
+            <a:endParaRPr lang="en-US" sz="1400" dirty="0"/>
+          </a:p>
+        </p:txBody>
+      </p:sp>
+      <p:sp>
+        <p:nvSpPr>
+          <p:cNvPr id="18" name="Text 16"/>
+          <p:cNvSpPr txBox="1"/>
+          <p:nvPr/>
+        </p:nvSpPr>
+        <p:spPr>
+          <a:xfrm>
+            <a:off x="6711696" y="2699871"/>
+            <a:ext cx="2011680" cy="1371600"/>
+          </a:xfrm>
+          <a:prstGeom prst="rect">
+            <a:avLst/>
+          </a:prstGeom>
+          <a:noFill/>
+          <a:ln/>
+        </p:spPr>
+        <p:txBody>
+          <a:bodyPr wrap="square" lIns="0" tIns="0" rIns="0" bIns="0" rtlCol="0" anchor="t"/>
+          <a:lstStyle/>
+          <a:p>
+            <a:pPr marL="0" indent="0" algn="ctr">
+              <a:buNone/>
+            </a:pPr>
+            <a:r>
+              <a:rPr lang="en-US" sz="1200" dirty="0">
+                <a:solidFill>
+                  <a:srgbClr val="5B6B7A"/>
+                </a:solidFill>
+              </a:rPr>
+              <a:t>Déploiement : port 3000, 2 Go de mémoire, accès public, 1 instance maximum</a:t>
+            </a:r>
+            <a:endParaRPr lang="en-US" sz="1200" dirty="0"/>
+          </a:p>
+        </p:txBody>
+      </p:sp>
+      <p:sp>
+        <p:nvSpPr>
+          <p:cNvPr id="25" name="Slide Number Placeholder 0"/>
+          <p:cNvSpPr>
+            <a:spLocks noGrp="1"/>
+          </p:cNvSpPr>
+          <p:nvPr>
+            <p:ph type="sldNum" sz="quarter" idx="4294967295"/>
+          </p:nvPr>
+        </p:nvSpPr>
+        <p:spPr>
+          <a:xfrm>
+            <a:off x="8321040" y="4828032"/>
+            <a:ext cx="457200" cy="228600"/>
+          </a:xfrm>
+          <a:prstGeom prst="rect">
+            <a:avLst/>
+          </a:prstGeom>
+          <a:extLst>
+            <a:ext uri="{C572A759-6A51-4108-AA02-DFA0A04FC94B}">
+              <ma14:wrappingTextBoxFlag xmlns="" xmlns:ma14="http://schemas.microsoft.com/office/mac/drawingml/2011/main" val="0"/>
+            </a:ext>
+          </a:extLst>
+        </p:spPr>
+        <p:txBody>
+          <a:bodyPr/>
+          <a:lstStyle>
+            <a:lvl1pPr>
+              <a:defRPr sz="900">
+                <a:solidFill>
+                  <a:srgbClr val="5B6B7A"/>
+                </a:solidFill>
+              </a:defRPr>
+            </a:lvl1pPr>
+          </a:lstStyle>
+          <a:p>
+            <a:pPr algn="l"/>
+            <a:fld id="{F7021451-1387-4CA6-816F-3879F97B5CBC}" type="slidenum">
+              <a:rPr lang="en-US" b="0"/>
+              <a:t>20</a:t>
+            </a:fld>
+            <a:endParaRPr lang="en-US"/>
+          </a:p>
+        </p:txBody>
+      </p:sp>
+      <p:pic>
+        <p:nvPicPr>
+          <p:cNvPr id="21" name="Image 20" descr="Google Cloud Logo">
+            <a:extLst>
+              <a:ext uri="{FF2B5EF4-FFF2-40B4-BE49-F238E27FC236}">
+                <a16:creationId xmlns:a16="http://schemas.microsoft.com/office/drawing/2014/main" id="{F8765B0D-3387-AB83-10B7-83722F5A5353}"/>
+              </a:ext>
+            </a:extLst>
+          </p:cNvPr>
+          <p:cNvPicPr>
+            <a:picLocks noChangeAspect="1"/>
+          </p:cNvPicPr>
+          <p:nvPr/>
+        </p:nvPicPr>
+        <p:blipFill>
+          <a:blip r:embed="rId2"/>
+          <a:stretch>
+            <a:fillRect/>
+          </a:stretch>
+        </p:blipFill>
+        <p:spPr>
+          <a:xfrm>
+            <a:off x="5243121" y="3525237"/>
+            <a:ext cx="2705645" cy="1531395"/>
+          </a:xfrm>
+          <a:prstGeom prst="rect">
+            <a:avLst/>
+          </a:prstGeom>
+        </p:spPr>
+      </p:pic>
+    </p:spTree>
+  </p:cSld>
+  <p:clrMapOvr>
+    <a:masterClrMapping/>
+  </p:clrMapOvr>
+</p:sld>
+</file>
+
+<file path=ppt/slides/slide21.xml><?xml version="1.0" encoding="utf-8"?>
+<p:sld xmlns:a="http://schemas.openxmlformats.org/drawingml/2006/main" xmlns:r="http://schemas.openxmlformats.org/officeDocument/2006/relationships" xmlns:p="http://schemas.openxmlformats.org/presentationml/2006/main">
+  <p:cSld name="Slide 14">
+    <p:spTree>
+      <p:nvGrpSpPr>
+        <p:cNvPr id="1" name=""/>
+        <p:cNvGrpSpPr/>
+        <p:nvPr/>
+      </p:nvGrpSpPr>
+      <p:grpSpPr>
+        <a:xfrm>
+          <a:off x="0" y="0"/>
+          <a:ext cx="0" cy="0"/>
+          <a:chOff x="0" y="0"/>
+          <a:chExt cx="0" cy="0"/>
+        </a:xfrm>
+      </p:grpSpPr>
+      <p:sp>
+        <p:nvSpPr>
+          <p:cNvPr id="2" name="Text 0"/>
+          <p:cNvSpPr txBox="1"/>
+          <p:nvPr/>
+        </p:nvSpPr>
+        <p:spPr>
+          <a:xfrm>
+            <a:off x="640080" y="365760"/>
+            <a:ext cx="7863840" cy="640080"/>
+          </a:xfrm>
+          <a:prstGeom prst="rect">
+            <a:avLst/>
+          </a:prstGeom>
+          <a:noFill/>
+          <a:ln/>
+        </p:spPr>
+        <p:txBody>
+          <a:bodyPr wrap="square" lIns="0" tIns="0" rIns="0" bIns="0" rtlCol="0" anchor="ctr"/>
+          <a:lstStyle/>
+          <a:p>
+            <a:pPr marL="0" indent="0">
+              <a:buNone/>
+            </a:pPr>
+            <a:r>
+              <a:rPr lang="en-US" sz="3000" b="1" dirty="0">
+                <a:solidFill>
+                  <a:srgbClr val="FFFFFF"/>
+                </a:solidFill>
+                <a:latin typeface="Georgia" pitchFamily="34" charset="0"/>
+                <a:ea typeface="Georgia" pitchFamily="34" charset="-122"/>
+                <a:cs typeface="Georgia" pitchFamily="34" charset="-120"/>
+              </a:rPr>
+              <a:t>Ce qu'il faut retenir</a:t>
+            </a:r>
+            <a:endParaRPr lang="en-US" sz="3000" dirty="0"/>
+          </a:p>
+        </p:txBody>
+      </p:sp>
+      <p:sp>
+        <p:nvSpPr>
+          <p:cNvPr id="3" name="Text 1"/>
+          <p:cNvSpPr txBox="1"/>
+          <p:nvPr/>
+        </p:nvSpPr>
+        <p:spPr>
+          <a:xfrm>
+            <a:off x="640080" y="1188720"/>
+            <a:ext cx="7863840" cy="2011680"/>
+          </a:xfrm>
+          <a:prstGeom prst="rect">
+            <a:avLst/>
+          </a:prstGeom>
+          <a:noFill/>
+          <a:ln/>
+        </p:spPr>
+        <p:txBody>
+          <a:bodyPr wrap="square" lIns="0" tIns="0" rIns="0" bIns="0" rtlCol="0" anchor="t"/>
+          <a:lstStyle/>
+          <a:p>
+            <a:pPr marL="342900" indent="-342900">
+              <a:spcAft>
+                <a:spcPts val="1000"/>
+              </a:spcAft>
+              <a:buSzPct val="100000"/>
+              <a:buChar char="•"/>
+            </a:pPr>
+            <a:r>
+              <a:rPr lang="en-US" sz="1600" dirty="0">
+                <a:solidFill>
+                  <a:srgbClr val="FFFFFF"/>
+                </a:solidFill>
+              </a:rPr>
+              <a:t>Un Random Forest estime la consommation d'énergie à ± 39 % (médiane) et le CO2 à ± 56 %, avec les seules données structurelles</a:t>
+            </a:r>
+            <a:endParaRPr lang="en-US" sz="1600" dirty="0"/>
+          </a:p>
+          <a:p>
+            <a:pPr marL="342900" indent="-342900">
+              <a:spcAft>
+                <a:spcPts val="1000"/>
+              </a:spcAft>
+              <a:buSzPct val="100000"/>
+              <a:buChar char="•"/>
+            </a:pPr>
+            <a:r>
+              <a:rPr lang="en-US" sz="1600" dirty="0">
+                <a:solidFill>
+                  <a:srgbClr val="FFFFFF"/>
+                </a:solidFill>
+              </a:rPr>
+              <a:t>La surface totale fait l'essentiel ; le type de propriété compte surtout pour les émissions de CO2</a:t>
+            </a:r>
+            <a:endParaRPr lang="en-US" sz="1600" dirty="0"/>
+          </a:p>
+          <a:p>
+            <a:pPr marL="342900" indent="-342900">
+              <a:spcAft>
+                <a:spcPts val="1000"/>
+              </a:spcAft>
+              <a:buSzPct val="100000"/>
+              <a:buChar char="•"/>
+            </a:pPr>
+            <a:r>
+              <a:rPr lang="en-US" sz="1600" dirty="0">
+                <a:solidFill>
+                  <a:srgbClr val="FFFFFF"/>
+                </a:solidFill>
+              </a:rPr>
+              <a:t>Le modèle est exposé par une API BentoML validée par Pydantic, empaquetée dans Docker et déployée sur Google Cloud Run</a:t>
+            </a:r>
+            <a:endParaRPr lang="en-US" sz="1600" dirty="0"/>
+          </a:p>
+        </p:txBody>
+      </p:sp>
+      <p:sp>
+        <p:nvSpPr>
+          <p:cNvPr id="4" name="Text 2"/>
+          <p:cNvSpPr txBox="1"/>
+          <p:nvPr/>
+        </p:nvSpPr>
+        <p:spPr>
+          <a:xfrm>
+            <a:off x="640080" y="3383280"/>
+            <a:ext cx="7863840" cy="822960"/>
+          </a:xfrm>
+          <a:prstGeom prst="rect">
+            <a:avLst/>
+          </a:prstGeom>
+          <a:noFill/>
+          <a:ln/>
+        </p:spPr>
+        <p:txBody>
+          <a:bodyPr wrap="square" lIns="0" tIns="0" rIns="0" bIns="0" rtlCol="0" anchor="t"/>
+          <a:lstStyle/>
+          <a:p>
+            <a:pPr marL="0" indent="0">
+              <a:buNone/>
+            </a:pPr>
+            <a:r>
+              <a:rPr lang="en-US" sz="1400" i="1" dirty="0">
+                <a:solidFill>
+                  <a:srgbClr val="CFE3E0"/>
+                </a:solidFill>
+              </a:rPr>
+              <a:t>Limites : sur-</a:t>
+            </a:r>
+            <a:r>
+              <a:rPr lang="en-US" sz="1400" i="1" dirty="0" err="1">
+                <a:solidFill>
+                  <a:srgbClr val="CFE3E0"/>
+                </a:solidFill>
+              </a:rPr>
+              <a:t>apprentissage</a:t>
+            </a:r>
+            <a:r>
+              <a:rPr lang="en-US" sz="1400" i="1" dirty="0">
+                <a:solidFill>
+                  <a:srgbClr val="CFE3E0"/>
+                </a:solidFill>
+              </a:rPr>
+              <a:t>, 1 479 bâtiments seulement. </a:t>
+            </a:r>
+          </a:p>
+          <a:p>
+            <a:pPr marL="0" indent="0">
+              <a:buNone/>
+            </a:pPr>
+            <a:endParaRPr lang="en-US" sz="1400" i="1" dirty="0">
+              <a:solidFill>
+                <a:srgbClr val="CFE3E0"/>
+              </a:solidFill>
+            </a:endParaRPr>
+          </a:p>
+          <a:p>
+            <a:pPr marL="0" indent="0">
+              <a:buNone/>
+            </a:pPr>
+            <a:r>
+              <a:rPr lang="en-US" sz="1400" i="1" dirty="0" err="1">
+                <a:solidFill>
+                  <a:srgbClr val="CFE3E0"/>
+                </a:solidFill>
+              </a:rPr>
+              <a:t>Améliorations</a:t>
+            </a:r>
+            <a:r>
+              <a:rPr lang="en-US" sz="1400" i="1" dirty="0">
+                <a:solidFill>
+                  <a:srgbClr val="CFE3E0"/>
+                </a:solidFill>
+              </a:rPr>
+              <a:t> : données 2015-2026, Tester d’autres </a:t>
+            </a:r>
+            <a:r>
+              <a:rPr lang="en-US" sz="1400" i="1" dirty="0" err="1">
+                <a:solidFill>
+                  <a:srgbClr val="CFE3E0"/>
+                </a:solidFill>
+              </a:rPr>
+              <a:t>modèles</a:t>
+            </a:r>
+            <a:r>
+              <a:rPr lang="en-US" sz="1400" i="1" dirty="0">
+                <a:solidFill>
+                  <a:srgbClr val="CFE3E0"/>
+                </a:solidFill>
+              </a:rPr>
+              <a:t>, augmentation type de données (occupation, </a:t>
+            </a:r>
+            <a:r>
+              <a:rPr lang="en-US" sz="1400" i="1" dirty="0" err="1">
+                <a:solidFill>
+                  <a:srgbClr val="CFE3E0"/>
+                </a:solidFill>
+              </a:rPr>
+              <a:t>équipements</a:t>
+            </a:r>
+            <a:r>
+              <a:rPr lang="en-US" sz="1400" i="1" dirty="0">
+                <a:solidFill>
+                  <a:srgbClr val="CFE3E0"/>
+                </a:solidFill>
+              </a:rPr>
+              <a:t> </a:t>
+            </a:r>
+            <a:r>
+              <a:rPr lang="en-US" sz="1400" i="1" dirty="0" err="1">
+                <a:solidFill>
+                  <a:srgbClr val="CFE3E0"/>
+                </a:solidFill>
+              </a:rPr>
+              <a:t>etc</a:t>
+            </a:r>
+            <a:r>
+              <a:rPr lang="en-US" sz="1400" i="1" dirty="0">
+                <a:solidFill>
+                  <a:srgbClr val="CFE3E0"/>
+                </a:solidFill>
+              </a:rPr>
+              <a:t>…)</a:t>
+            </a:r>
+            <a:endParaRPr lang="en-US" sz="1400" dirty="0"/>
           </a:p>
         </p:txBody>
       </p:sp>
@@ -15027,6 +16014,209 @@
 </file>
 
 <file path=ppt/slides/slide3.xml><?xml version="1.0" encoding="utf-8"?>
+<p:sld xmlns:a="http://schemas.openxmlformats.org/drawingml/2006/main" xmlns:r="http://schemas.openxmlformats.org/officeDocument/2006/relationships" xmlns:p="http://schemas.openxmlformats.org/presentationml/2006/main">
+  <p:cSld>
+    <p:spTree>
+      <p:nvGrpSpPr>
+        <p:cNvPr id="1" name=""/>
+        <p:cNvGrpSpPr/>
+        <p:nvPr/>
+      </p:nvGrpSpPr>
+      <p:grpSpPr>
+        <a:xfrm>
+          <a:off x="0" y="0"/>
+          <a:ext cx="0" cy="0"/>
+          <a:chOff x="0" y="0"/>
+          <a:chExt cx="0" cy="0"/>
+        </a:xfrm>
+      </p:grpSpPr>
+      <p:sp>
+        <p:nvSpPr>
+          <p:cNvPr id="2" name="Text 0"/>
+          <p:cNvSpPr txBox="1"/>
+          <p:nvPr/>
+        </p:nvSpPr>
+        <p:spPr>
+          <a:xfrm>
+            <a:off x="640080" y="1005840"/>
+            <a:ext cx="7863840" cy="1645920"/>
+          </a:xfrm>
+          <a:prstGeom prst="rect">
+            <a:avLst/>
+          </a:prstGeom>
+          <a:noFill/>
+          <a:ln/>
+        </p:spPr>
+        <p:txBody>
+          <a:bodyPr wrap="square" lIns="0" tIns="0" rIns="0" bIns="0" rtlCol="0" anchor="t"/>
+          <a:lstStyle/>
+          <a:p>
+            <a:pPr marL="0" indent="0">
+              <a:buNone/>
+            </a:pPr>
+            <a:r>
+              <a:rPr lang="en-US" sz="3400" b="1" dirty="0" err="1">
+                <a:solidFill>
+                  <a:srgbClr val="FFFFFF"/>
+                </a:solidFill>
+                <a:latin typeface="Georgia" pitchFamily="34" charset="0"/>
+                <a:ea typeface="Georgia" pitchFamily="34" charset="-122"/>
+                <a:cs typeface="Georgia" pitchFamily="34" charset="-120"/>
+              </a:rPr>
+              <a:t>Partie</a:t>
+            </a:r>
+            <a:r>
+              <a:rPr lang="en-US" sz="3400" b="1" dirty="0">
+                <a:solidFill>
+                  <a:srgbClr val="FFFFFF"/>
+                </a:solidFill>
+                <a:latin typeface="Georgia" pitchFamily="34" charset="0"/>
+                <a:ea typeface="Georgia" pitchFamily="34" charset="-122"/>
+                <a:cs typeface="Georgia" pitchFamily="34" charset="-120"/>
+              </a:rPr>
+              <a:t> 1 : </a:t>
+            </a:r>
+            <a:r>
+              <a:rPr lang="fr-FR" sz="3400" b="1" dirty="0">
+                <a:solidFill>
+                  <a:srgbClr val="FFFFFF"/>
+                </a:solidFill>
+                <a:latin typeface="Georgia" pitchFamily="34" charset="0"/>
+                <a:ea typeface="Georgia" pitchFamily="34" charset="-122"/>
+                <a:cs typeface="Georgia" pitchFamily="34" charset="-120"/>
+              </a:rPr>
+              <a:t>Prédire la consommation d’énergie des bâtiments </a:t>
+            </a:r>
+            <a:endParaRPr lang="en-US" sz="3400" dirty="0"/>
+          </a:p>
+        </p:txBody>
+      </p:sp>
+      <p:sp>
+        <p:nvSpPr>
+          <p:cNvPr id="3" name="Text 1"/>
+          <p:cNvSpPr txBox="1"/>
+          <p:nvPr/>
+        </p:nvSpPr>
+        <p:spPr>
+          <a:xfrm>
+            <a:off x="640080" y="2834640"/>
+            <a:ext cx="7863840" cy="457200"/>
+          </a:xfrm>
+          <a:prstGeom prst="rect">
+            <a:avLst/>
+          </a:prstGeom>
+          <a:noFill/>
+          <a:ln/>
+        </p:spPr>
+        <p:txBody>
+          <a:bodyPr wrap="square" lIns="0" tIns="0" rIns="0" bIns="0" rtlCol="0" anchor="ctr"/>
+          <a:lstStyle/>
+          <a:p>
+            <a:pPr marL="0" indent="0">
+              <a:buNone/>
+            </a:pPr>
+            <a:r>
+              <a:rPr lang="en-US" sz="1800" dirty="0" err="1">
+                <a:solidFill>
+                  <a:srgbClr val="CFE3E0"/>
+                </a:solidFill>
+              </a:rPr>
+              <a:t>Analyse</a:t>
+            </a:r>
+            <a:r>
+              <a:rPr lang="en-US" sz="1800" dirty="0">
+                <a:solidFill>
+                  <a:srgbClr val="CFE3E0"/>
+                </a:solidFill>
+              </a:rPr>
+              <a:t> </a:t>
+            </a:r>
+            <a:r>
+              <a:rPr lang="en-US" sz="1800" dirty="0" err="1">
+                <a:solidFill>
+                  <a:srgbClr val="CFE3E0"/>
+                </a:solidFill>
+              </a:rPr>
+              <a:t>exploratoire</a:t>
+            </a:r>
+            <a:r>
+              <a:rPr lang="en-US" sz="1800" dirty="0">
+                <a:solidFill>
+                  <a:srgbClr val="CFE3E0"/>
+                </a:solidFill>
+              </a:rPr>
+              <a:t> et choix du </a:t>
+            </a:r>
+            <a:r>
+              <a:rPr lang="en-US" sz="1800" dirty="0" err="1">
+                <a:solidFill>
+                  <a:srgbClr val="CFE3E0"/>
+                </a:solidFill>
+              </a:rPr>
+              <a:t>modèle</a:t>
+            </a:r>
+            <a:r>
+              <a:rPr lang="en-US" sz="1800" dirty="0">
+                <a:solidFill>
+                  <a:srgbClr val="CFE3E0"/>
+                </a:solidFill>
+              </a:rPr>
+              <a:t> ML</a:t>
+            </a:r>
+            <a:endParaRPr lang="en-US" sz="1800" dirty="0"/>
+          </a:p>
+        </p:txBody>
+      </p:sp>
+      <p:sp>
+        <p:nvSpPr>
+          <p:cNvPr id="4" name="Text 2"/>
+          <p:cNvSpPr txBox="1"/>
+          <p:nvPr/>
+        </p:nvSpPr>
+        <p:spPr>
+          <a:xfrm>
+            <a:off x="640080" y="4572000"/>
+            <a:ext cx="7863840" cy="457200"/>
+          </a:xfrm>
+          <a:prstGeom prst="rect">
+            <a:avLst/>
+          </a:prstGeom>
+          <a:noFill/>
+          <a:ln/>
+        </p:spPr>
+        <p:txBody>
+          <a:bodyPr wrap="square" lIns="0" tIns="0" rIns="0" bIns="0" rtlCol="0" anchor="ctr"/>
+          <a:lstStyle/>
+          <a:p>
+            <a:pPr marL="0" indent="0">
+              <a:buNone/>
+            </a:pPr>
+            <a:r>
+              <a:rPr lang="en-US" sz="1400" dirty="0">
+                <a:solidFill>
+                  <a:srgbClr val="FFFFFF"/>
+                </a:solidFill>
+              </a:rPr>
+              <a:t>Projet 6  |  Objectif ville neutre en carbone en 2050</a:t>
+            </a:r>
+            <a:endParaRPr lang="en-US" sz="1400" dirty="0"/>
+          </a:p>
+        </p:txBody>
+      </p:sp>
+    </p:spTree>
+    <p:extLst>
+      <p:ext uri="{BB962C8B-B14F-4D97-AF65-F5344CB8AC3E}">
+        <p14:creationId xmlns:p14="http://schemas.microsoft.com/office/powerpoint/2010/main" val="1245016896"/>
+      </p:ext>
+    </p:extLst>
+  </p:cSld>
+  <p:clrMapOvr>
+    <a:masterClrMapping/>
+  </p:clrMapOvr>
+</p:sld>
+</file>
+
+<file path=ppt/slides/slide4.xml><?xml version="1.0" encoding="utf-8"?>
 <p:sld xmlns:a="http://schemas.openxmlformats.org/drawingml/2006/main" xmlns:r="http://schemas.openxmlformats.org/officeDocument/2006/relationships" xmlns:p="http://schemas.openxmlformats.org/presentationml/2006/main">
   <p:cSld name="Slide 3">
     <p:spTree>
@@ -15706,7 +16896,7 @@
           </a:prstGeom>
           <a:extLst>
             <a:ext uri="{C572A759-6A51-4108-AA02-DFA0A04FC94B}">
-              <ma14:wrappingTextBoxFlag xmlns:ma14="http://schemas.microsoft.com/office/mac/drawingml/2011/main" xmlns="" val="0"/>
+              <ma14:wrappingTextBoxFlag xmlns="" xmlns:ma14="http://schemas.microsoft.com/office/mac/drawingml/2011/main" val="0"/>
             </a:ext>
           </a:extLst>
         </p:spPr>
@@ -15725,7 +16915,7 @@
             <a:pPr algn="l"/>
             <a:fld id="{F7021451-1387-4CA6-816F-3879F97B5CBC}" type="slidenum">
               <a:rPr lang="en-US" b="0"/>
-              <a:t>3</a:t>
+              <a:t>4</a:t>
             </a:fld>
             <a:endParaRPr lang="en-US"/>
           </a:p>
@@ -15739,7 +16929,7 @@
 </p:sld>
 </file>
 
-<file path=ppt/slides/slide4.xml><?xml version="1.0" encoding="utf-8"?>
+<file path=ppt/slides/slide5.xml><?xml version="1.0" encoding="utf-8"?>
 <p:sld xmlns:a="http://schemas.openxmlformats.org/drawingml/2006/main" xmlns:r="http://schemas.openxmlformats.org/officeDocument/2006/relationships" xmlns:p="http://schemas.openxmlformats.org/presentationml/2006/main">
   <p:cSld name="Slide 4">
     <p:spTree>
@@ -16239,7 +17429,7 @@
           </a:prstGeom>
           <a:extLst>
             <a:ext uri="{C572A759-6A51-4108-AA02-DFA0A04FC94B}">
-              <ma14:wrappingTextBoxFlag xmlns:ma14="http://schemas.microsoft.com/office/mac/drawingml/2011/main" xmlns="" val="0"/>
+              <ma14:wrappingTextBoxFlag xmlns="" xmlns:ma14="http://schemas.microsoft.com/office/mac/drawingml/2011/main" val="0"/>
             </a:ext>
           </a:extLst>
         </p:spPr>
@@ -16258,7 +17448,7 @@
             <a:pPr algn="l"/>
             <a:fld id="{F7021451-1387-4CA6-816F-3879F97B5CBC}" type="slidenum">
               <a:rPr lang="en-US" b="0"/>
-              <a:t>4</a:t>
+              <a:t>5</a:t>
             </a:fld>
             <a:endParaRPr lang="en-US"/>
           </a:p>
@@ -16272,7 +17462,7 @@
 </p:sld>
 </file>
 
-<file path=ppt/slides/slide5.xml><?xml version="1.0" encoding="utf-8"?>
+<file path=ppt/slides/slide6.xml><?xml version="1.0" encoding="utf-8"?>
 <p:sld xmlns:a="http://schemas.openxmlformats.org/drawingml/2006/main" xmlns:r="http://schemas.openxmlformats.org/officeDocument/2006/relationships" xmlns:p="http://schemas.openxmlformats.org/presentationml/2006/main">
   <p:cSld name="Slide 5">
     <p:spTree>
@@ -16800,7 +17990,7 @@
           </a:prstGeom>
           <a:extLst>
             <a:ext uri="{C572A759-6A51-4108-AA02-DFA0A04FC94B}">
-              <ma14:wrappingTextBoxFlag xmlns:ma14="http://schemas.microsoft.com/office/mac/drawingml/2011/main" xmlns="" val="0"/>
+              <ma14:wrappingTextBoxFlag xmlns="" xmlns:ma14="http://schemas.microsoft.com/office/mac/drawingml/2011/main" val="0"/>
             </a:ext>
           </a:extLst>
         </p:spPr>
@@ -16819,7 +18009,7 @@
             <a:pPr algn="l"/>
             <a:fld id="{F7021451-1387-4CA6-816F-3879F97B5CBC}" type="slidenum">
               <a:rPr lang="en-US" b="0"/>
-              <a:t>5</a:t>
+              <a:t>6</a:t>
             </a:fld>
             <a:endParaRPr lang="en-US"/>
           </a:p>
@@ -16833,7 +18023,7 @@
 </p:sld>
 </file>
 
-<file path=ppt/slides/slide6.xml><?xml version="1.0" encoding="utf-8"?>
+<file path=ppt/slides/slide7.xml><?xml version="1.0" encoding="utf-8"?>
 <p:sld xmlns:a="http://schemas.openxmlformats.org/drawingml/2006/main" xmlns:r="http://schemas.openxmlformats.org/officeDocument/2006/relationships" xmlns:p="http://schemas.openxmlformats.org/presentationml/2006/main">
   <p:cSld name="Slide 6">
     <p:spTree>
@@ -17033,7 +18223,7 @@
           </a:prstGeom>
           <a:extLst>
             <a:ext uri="{C572A759-6A51-4108-AA02-DFA0A04FC94B}">
-              <ma14:wrappingTextBoxFlag xmlns:ma14="http://schemas.microsoft.com/office/mac/drawingml/2011/main" xmlns="" val="0"/>
+              <ma14:wrappingTextBoxFlag xmlns="" xmlns:ma14="http://schemas.microsoft.com/office/mac/drawingml/2011/main" val="0"/>
             </a:ext>
           </a:extLst>
         </p:spPr>
@@ -17052,7 +18242,7 @@
             <a:pPr algn="l"/>
             <a:fld id="{F7021451-1387-4CA6-816F-3879F97B5CBC}" type="slidenum">
               <a:rPr lang="en-US" b="0"/>
-              <a:t>6</a:t>
+              <a:t>7</a:t>
             </a:fld>
             <a:endParaRPr lang="en-US"/>
           </a:p>
@@ -17066,7 +18256,7 @@
 </p:sld>
 </file>
 
-<file path=ppt/slides/slide7.xml><?xml version="1.0" encoding="utf-8"?>
+<file path=ppt/slides/slide8.xml><?xml version="1.0" encoding="utf-8"?>
 <p:sld xmlns:a="http://schemas.openxmlformats.org/drawingml/2006/main" xmlns:r="http://schemas.openxmlformats.org/officeDocument/2006/relationships" xmlns:p="http://schemas.openxmlformats.org/presentationml/2006/main">
   <p:cSld name="Slide 7">
     <p:spTree>
@@ -17929,7 +19119,7 @@
           </a:prstGeom>
           <a:extLst>
             <a:ext uri="{C572A759-6A51-4108-AA02-DFA0A04FC94B}">
-              <ma14:wrappingTextBoxFlag xmlns:ma14="http://schemas.microsoft.com/office/mac/drawingml/2011/main" xmlns="" val="0"/>
+              <ma14:wrappingTextBoxFlag xmlns="" xmlns:ma14="http://schemas.microsoft.com/office/mac/drawingml/2011/main" val="0"/>
             </a:ext>
           </a:extLst>
         </p:spPr>
@@ -17948,7 +19138,7 @@
             <a:pPr algn="l"/>
             <a:fld id="{F7021451-1387-4CA6-816F-3879F97B5CBC}" type="slidenum">
               <a:rPr lang="en-US" b="0"/>
-              <a:t>7</a:t>
+              <a:t>8</a:t>
             </a:fld>
             <a:endParaRPr lang="en-US"/>
           </a:p>
@@ -17962,7 +19152,7 @@
 </p:sld>
 </file>
 
-<file path=ppt/slides/slide8.xml><?xml version="1.0" encoding="utf-8"?>
+<file path=ppt/slides/slide9.xml><?xml version="1.0" encoding="utf-8"?>
 <p:sld xmlns:a="http://schemas.openxmlformats.org/drawingml/2006/main" xmlns:r="http://schemas.openxmlformats.org/officeDocument/2006/relationships" xmlns:p="http://schemas.openxmlformats.org/presentationml/2006/main">
   <p:cSld name="Slide 8">
     <p:spTree>
@@ -18666,733 +19856,7 @@
           </a:prstGeom>
           <a:extLst>
             <a:ext uri="{C572A759-6A51-4108-AA02-DFA0A04FC94B}">
-              <ma14:wrappingTextBoxFlag xmlns:ma14="http://schemas.microsoft.com/office/mac/drawingml/2011/main" xmlns="" val="0"/>
-            </a:ext>
-          </a:extLst>
-        </p:spPr>
-        <p:txBody>
-          <a:bodyPr/>
-          <a:lstStyle>
-            <a:lvl1pPr>
-              <a:defRPr sz="900">
-                <a:solidFill>
-                  <a:srgbClr val="5B6B7A"/>
-                </a:solidFill>
-              </a:defRPr>
-            </a:lvl1pPr>
-          </a:lstStyle>
-          <a:p>
-            <a:pPr algn="l"/>
-            <a:fld id="{F7021451-1387-4CA6-816F-3879F97B5CBC}" type="slidenum">
-              <a:rPr lang="en-US" b="0"/>
-              <a:t>8</a:t>
-            </a:fld>
-            <a:endParaRPr lang="en-US"/>
-          </a:p>
-        </p:txBody>
-      </p:sp>
-    </p:spTree>
-  </p:cSld>
-  <p:clrMapOvr>
-    <a:masterClrMapping/>
-  </p:clrMapOvr>
-</p:sld>
-</file>
-
-<file path=ppt/slides/slide9.xml><?xml version="1.0" encoding="utf-8"?>
-<p:sld xmlns:a="http://schemas.openxmlformats.org/drawingml/2006/main" xmlns:r="http://schemas.openxmlformats.org/officeDocument/2006/relationships" xmlns:p="http://schemas.openxmlformats.org/presentationml/2006/main">
-  <p:cSld name="Slide 9">
-    <p:spTree>
-      <p:nvGrpSpPr>
-        <p:cNvPr id="1" name=""/>
-        <p:cNvGrpSpPr/>
-        <p:nvPr/>
-      </p:nvGrpSpPr>
-      <p:grpSpPr>
-        <a:xfrm>
-          <a:off x="0" y="0"/>
-          <a:ext cx="0" cy="0"/>
-          <a:chOff x="0" y="0"/>
-          <a:chExt cx="0" cy="0"/>
-        </a:xfrm>
-      </p:grpSpPr>
-      <p:sp>
-        <p:nvSpPr>
-          <p:cNvPr id="2" name="Titre"/>
-          <p:cNvSpPr txBox="1"/>
-          <p:nvPr/>
-        </p:nvSpPr>
-        <p:spPr>
-          <a:xfrm>
-            <a:off x="457200" y="228600"/>
-            <a:ext cx="8229600" cy="777240"/>
-          </a:xfrm>
-          <a:prstGeom prst="rect">
-            <a:avLst/>
-          </a:prstGeom>
-          <a:noFill/>
-          <a:ln/>
-        </p:spPr>
-        <p:txBody>
-          <a:bodyPr wrap="square" lIns="0" tIns="0" rIns="0" bIns="0" rtlCol="0" anchor="ctr"/>
-          <a:lstStyle/>
-          <a:p>
-            <a:pPr marL="0" indent="0">
-              <a:buNone/>
-            </a:pPr>
-            <a:r>
-              <a:rPr lang="en-US" sz="2400" b="1" dirty="0">
-                <a:solidFill>
-                  <a:schemeClr val="tx1"/>
-                </a:solidFill>
-                <a:latin typeface="Georgia" pitchFamily="34" charset="0"/>
-                <a:ea typeface="Georgia" pitchFamily="34" charset="-122"/>
-                <a:cs typeface="Georgia" pitchFamily="34" charset="-120"/>
-              </a:rPr>
-              <a:t>Une démarche de test identique pour chaque modèle et chaque cible</a:t>
-            </a:r>
-            <a:endParaRPr lang="en-US" sz="2400" dirty="0"/>
-          </a:p>
-        </p:txBody>
-      </p:sp>
-      <p:sp>
-        <p:nvSpPr>
-          <p:cNvPr id="3" name="Shape 1"/>
-          <p:cNvSpPr/>
-          <p:nvPr/>
-        </p:nvSpPr>
-        <p:spPr>
-          <a:xfrm>
-            <a:off x="365760" y="1188720"/>
-            <a:ext cx="1600200" cy="1920240"/>
-          </a:xfrm>
-          <a:prstGeom prst="roundRect">
-            <a:avLst>
-              <a:gd name="adj" fmla="val 5714"/>
-            </a:avLst>
-          </a:prstGeom>
-          <a:solidFill>
-            <a:srgbClr val="E3F0EE"/>
-          </a:solidFill>
-          <a:ln w="9525">
-            <a:solidFill>
-              <a:srgbClr val="CFDDD9"/>
-            </a:solidFill>
-            <a:prstDash val="solid"/>
-          </a:ln>
-        </p:spPr>
-        <p:txBody>
-          <a:bodyPr/>
-          <a:lstStyle/>
-          <a:p>
-            <a:endParaRPr lang="fr-FR"/>
-          </a:p>
-        </p:txBody>
-      </p:sp>
-      <p:sp>
-        <p:nvSpPr>
-          <p:cNvPr id="4" name="Text 2"/>
-          <p:cNvSpPr txBox="1"/>
-          <p:nvPr/>
-        </p:nvSpPr>
-        <p:spPr>
-          <a:xfrm>
-            <a:off x="438912" y="1280160"/>
-            <a:ext cx="1463040" cy="457200"/>
-          </a:xfrm>
-          <a:prstGeom prst="rect">
-            <a:avLst/>
-          </a:prstGeom>
-          <a:noFill/>
-          <a:ln/>
-        </p:spPr>
-        <p:txBody>
-          <a:bodyPr wrap="square" lIns="0" tIns="0" rIns="0" bIns="0" rtlCol="0" anchor="ctr"/>
-          <a:lstStyle/>
-          <a:p>
-            <a:pPr marL="0" indent="0" algn="ctr">
-              <a:buNone/>
-            </a:pPr>
-            <a:r>
-              <a:rPr lang="en-US" sz="1400" b="1" dirty="0">
-                <a:solidFill>
-                  <a:srgbClr val="1B7F79"/>
-                </a:solidFill>
-              </a:rPr>
-              <a:t>Séparation</a:t>
-            </a:r>
-            <a:endParaRPr lang="en-US" sz="1400" dirty="0"/>
-          </a:p>
-        </p:txBody>
-      </p:sp>
-      <p:sp>
-        <p:nvSpPr>
-          <p:cNvPr id="5" name="Text 3"/>
-          <p:cNvSpPr txBox="1"/>
-          <p:nvPr/>
-        </p:nvSpPr>
-        <p:spPr>
-          <a:xfrm>
-            <a:off x="457200" y="1783080"/>
-            <a:ext cx="1417320" cy="1234440"/>
-          </a:xfrm>
-          <a:prstGeom prst="rect">
-            <a:avLst/>
-          </a:prstGeom>
-          <a:noFill/>
-          <a:ln/>
-        </p:spPr>
-        <p:txBody>
-          <a:bodyPr wrap="square" lIns="0" tIns="0" rIns="0" bIns="0" rtlCol="0" anchor="t"/>
-          <a:lstStyle/>
-          <a:p>
-            <a:pPr marL="0" indent="0" algn="ctr">
-              <a:buNone/>
-            </a:pPr>
-            <a:r>
-              <a:rPr lang="en-US" sz="1200" dirty="0">
-                <a:solidFill>
-                  <a:srgbClr val="5B6B7A"/>
-                </a:solidFill>
-              </a:rPr>
-              <a:t>80 % </a:t>
-            </a:r>
-            <a:r>
-              <a:rPr lang="en-US" sz="1200" dirty="0" err="1">
-                <a:solidFill>
-                  <a:srgbClr val="5B6B7A"/>
-                </a:solidFill>
-              </a:rPr>
-              <a:t>entraînement</a:t>
-            </a:r>
-            <a:r>
-              <a:rPr lang="en-US" sz="1200" dirty="0">
-                <a:solidFill>
-                  <a:srgbClr val="5B6B7A"/>
-                </a:solidFill>
-              </a:rPr>
-              <a:t> </a:t>
-            </a:r>
-          </a:p>
-          <a:p>
-            <a:pPr marL="0" indent="0" algn="ctr">
-              <a:buNone/>
-            </a:pPr>
-            <a:r>
-              <a:rPr lang="en-US" sz="1200" dirty="0">
-                <a:solidFill>
-                  <a:srgbClr val="5B6B7A"/>
-                </a:solidFill>
-              </a:rPr>
-              <a:t>(1 155 sans extrêmes) / 20 % test (296, tous conservés), graine fixée</a:t>
-            </a:r>
-            <a:endParaRPr lang="en-US" sz="1200" dirty="0"/>
-          </a:p>
-        </p:txBody>
-      </p:sp>
-      <p:sp>
-        <p:nvSpPr>
-          <p:cNvPr id="6" name="Shape 4"/>
-          <p:cNvSpPr/>
-          <p:nvPr/>
-        </p:nvSpPr>
-        <p:spPr>
-          <a:xfrm>
-            <a:off x="2084832" y="1188720"/>
-            <a:ext cx="1600200" cy="1920240"/>
-          </a:xfrm>
-          <a:prstGeom prst="roundRect">
-            <a:avLst>
-              <a:gd name="adj" fmla="val 5714"/>
-            </a:avLst>
-          </a:prstGeom>
-          <a:solidFill>
-            <a:srgbClr val="F2F6F5"/>
-          </a:solidFill>
-          <a:ln w="9525">
-            <a:solidFill>
-              <a:srgbClr val="CFDDD9"/>
-            </a:solidFill>
-            <a:prstDash val="solid"/>
-          </a:ln>
-        </p:spPr>
-        <p:txBody>
-          <a:bodyPr/>
-          <a:lstStyle/>
-          <a:p>
-            <a:endParaRPr lang="fr-FR"/>
-          </a:p>
-        </p:txBody>
-      </p:sp>
-      <p:sp>
-        <p:nvSpPr>
-          <p:cNvPr id="7" name="Text 5"/>
-          <p:cNvSpPr txBox="1"/>
-          <p:nvPr/>
-        </p:nvSpPr>
-        <p:spPr>
-          <a:xfrm>
-            <a:off x="2157984" y="1280160"/>
-            <a:ext cx="1463040" cy="457200"/>
-          </a:xfrm>
-          <a:prstGeom prst="rect">
-            <a:avLst/>
-          </a:prstGeom>
-          <a:noFill/>
-          <a:ln/>
-        </p:spPr>
-        <p:txBody>
-          <a:bodyPr wrap="square" lIns="0" tIns="0" rIns="0" bIns="0" rtlCol="0" anchor="ctr"/>
-          <a:lstStyle/>
-          <a:p>
-            <a:pPr marL="0" indent="0" algn="ctr">
-              <a:buNone/>
-            </a:pPr>
-            <a:r>
-              <a:rPr lang="en-US" sz="1400" b="1" dirty="0">
-                <a:solidFill>
-                  <a:srgbClr val="1B7F79"/>
-                </a:solidFill>
-              </a:rPr>
-              <a:t>Validation croisée</a:t>
-            </a:r>
-            <a:endParaRPr lang="en-US" sz="1400" dirty="0"/>
-          </a:p>
-        </p:txBody>
-      </p:sp>
-      <p:sp>
-        <p:nvSpPr>
-          <p:cNvPr id="8" name="Text 6"/>
-          <p:cNvSpPr txBox="1"/>
-          <p:nvPr/>
-        </p:nvSpPr>
-        <p:spPr>
-          <a:xfrm>
-            <a:off x="2176272" y="1783080"/>
-            <a:ext cx="1417320" cy="1234440"/>
-          </a:xfrm>
-          <a:prstGeom prst="rect">
-            <a:avLst/>
-          </a:prstGeom>
-          <a:noFill/>
-          <a:ln/>
-        </p:spPr>
-        <p:txBody>
-          <a:bodyPr wrap="square" lIns="0" tIns="0" rIns="0" bIns="0" rtlCol="0" anchor="t"/>
-          <a:lstStyle/>
-          <a:p>
-            <a:pPr marL="0" indent="0" algn="ctr">
-              <a:buNone/>
-            </a:pPr>
-            <a:r>
-              <a:rPr lang="en-US" sz="1200" dirty="0">
-                <a:solidFill>
-                  <a:srgbClr val="5B6B7A"/>
-                </a:solidFill>
-              </a:rPr>
-              <a:t>5 découpages sur l'entraînement pour mesurer la stabilité</a:t>
-            </a:r>
-            <a:endParaRPr lang="en-US" sz="1200" dirty="0"/>
-          </a:p>
-        </p:txBody>
-      </p:sp>
-      <p:sp>
-        <p:nvSpPr>
-          <p:cNvPr id="9" name="Shape 7"/>
-          <p:cNvSpPr/>
-          <p:nvPr/>
-        </p:nvSpPr>
-        <p:spPr>
-          <a:xfrm>
-            <a:off x="3803904" y="1188720"/>
-            <a:ext cx="1600200" cy="1920240"/>
-          </a:xfrm>
-          <a:prstGeom prst="roundRect">
-            <a:avLst>
-              <a:gd name="adj" fmla="val 5714"/>
-            </a:avLst>
-          </a:prstGeom>
-          <a:solidFill>
-            <a:srgbClr val="E3F0EE"/>
-          </a:solidFill>
-          <a:ln w="9525">
-            <a:solidFill>
-              <a:srgbClr val="CFDDD9"/>
-            </a:solidFill>
-            <a:prstDash val="solid"/>
-          </a:ln>
-        </p:spPr>
-        <p:txBody>
-          <a:bodyPr/>
-          <a:lstStyle/>
-          <a:p>
-            <a:endParaRPr lang="fr-FR"/>
-          </a:p>
-        </p:txBody>
-      </p:sp>
-      <p:sp>
-        <p:nvSpPr>
-          <p:cNvPr id="10" name="Text 8"/>
-          <p:cNvSpPr txBox="1"/>
-          <p:nvPr/>
-        </p:nvSpPr>
-        <p:spPr>
-          <a:xfrm>
-            <a:off x="3877056" y="1280160"/>
-            <a:ext cx="1463040" cy="457200"/>
-          </a:xfrm>
-          <a:prstGeom prst="rect">
-            <a:avLst/>
-          </a:prstGeom>
-          <a:noFill/>
-          <a:ln/>
-        </p:spPr>
-        <p:txBody>
-          <a:bodyPr wrap="square" lIns="0" tIns="0" rIns="0" bIns="0" rtlCol="0" anchor="ctr"/>
-          <a:lstStyle/>
-          <a:p>
-            <a:pPr marL="0" indent="0" algn="ctr">
-              <a:buNone/>
-            </a:pPr>
-            <a:r>
-              <a:rPr lang="en-US" sz="1400" b="1" dirty="0">
-                <a:solidFill>
-                  <a:srgbClr val="1B7F79"/>
-                </a:solidFill>
-              </a:rPr>
-              <a:t>4 modèles</a:t>
-            </a:r>
-            <a:endParaRPr lang="en-US" sz="1400" dirty="0"/>
-          </a:p>
-        </p:txBody>
-      </p:sp>
-      <p:sp>
-        <p:nvSpPr>
-          <p:cNvPr id="11" name="Text 9"/>
-          <p:cNvSpPr txBox="1"/>
-          <p:nvPr/>
-        </p:nvSpPr>
-        <p:spPr>
-          <a:xfrm>
-            <a:off x="3895344" y="1783080"/>
-            <a:ext cx="1417320" cy="1234440"/>
-          </a:xfrm>
-          <a:prstGeom prst="rect">
-            <a:avLst/>
-          </a:prstGeom>
-          <a:noFill/>
-          <a:ln/>
-        </p:spPr>
-        <p:txBody>
-          <a:bodyPr wrap="square" lIns="0" tIns="0" rIns="0" bIns="0" rtlCol="0" anchor="t"/>
-          <a:lstStyle/>
-          <a:p>
-            <a:pPr marL="0" indent="0" algn="ctr">
-              <a:buNone/>
-            </a:pPr>
-            <a:r>
-              <a:rPr lang="en-US" sz="1200" dirty="0">
-                <a:solidFill>
-                  <a:srgbClr val="5B6B7A"/>
-                </a:solidFill>
-              </a:rPr>
-              <a:t>Référence, linéaire, SVR, Random Forest (base puis réglé)</a:t>
-            </a:r>
-            <a:endParaRPr lang="en-US" sz="1200" dirty="0"/>
-          </a:p>
-        </p:txBody>
-      </p:sp>
-      <p:sp>
-        <p:nvSpPr>
-          <p:cNvPr id="12" name="Shape 10"/>
-          <p:cNvSpPr/>
-          <p:nvPr/>
-        </p:nvSpPr>
-        <p:spPr>
-          <a:xfrm>
-            <a:off x="5522976" y="1188720"/>
-            <a:ext cx="1600200" cy="1920240"/>
-          </a:xfrm>
-          <a:prstGeom prst="roundRect">
-            <a:avLst>
-              <a:gd name="adj" fmla="val 5714"/>
-            </a:avLst>
-          </a:prstGeom>
-          <a:solidFill>
-            <a:srgbClr val="F2F6F5"/>
-          </a:solidFill>
-          <a:ln w="9525">
-            <a:solidFill>
-              <a:srgbClr val="CFDDD9"/>
-            </a:solidFill>
-            <a:prstDash val="solid"/>
-          </a:ln>
-        </p:spPr>
-        <p:txBody>
-          <a:bodyPr/>
-          <a:lstStyle/>
-          <a:p>
-            <a:endParaRPr lang="fr-FR"/>
-          </a:p>
-        </p:txBody>
-      </p:sp>
-      <p:sp>
-        <p:nvSpPr>
-          <p:cNvPr id="13" name="Text 11"/>
-          <p:cNvSpPr txBox="1"/>
-          <p:nvPr/>
-        </p:nvSpPr>
-        <p:spPr>
-          <a:xfrm>
-            <a:off x="5596128" y="1280160"/>
-            <a:ext cx="1463040" cy="457200"/>
-          </a:xfrm>
-          <a:prstGeom prst="rect">
-            <a:avLst/>
-          </a:prstGeom>
-          <a:noFill/>
-          <a:ln/>
-        </p:spPr>
-        <p:txBody>
-          <a:bodyPr wrap="square" lIns="0" tIns="0" rIns="0" bIns="0" rtlCol="0" anchor="ctr"/>
-          <a:lstStyle/>
-          <a:p>
-            <a:pPr marL="0" indent="0" algn="ctr">
-              <a:buNone/>
-            </a:pPr>
-            <a:r>
-              <a:rPr lang="en-US" sz="1400" b="1" dirty="0">
-                <a:solidFill>
-                  <a:srgbClr val="1B7F79"/>
-                </a:solidFill>
-              </a:rPr>
-              <a:t>3 métriques</a:t>
-            </a:r>
-            <a:endParaRPr lang="en-US" sz="1400" dirty="0"/>
-          </a:p>
-        </p:txBody>
-      </p:sp>
-      <p:sp>
-        <p:nvSpPr>
-          <p:cNvPr id="14" name="Text 12"/>
-          <p:cNvSpPr txBox="1"/>
-          <p:nvPr/>
-        </p:nvSpPr>
-        <p:spPr>
-          <a:xfrm>
-            <a:off x="5614416" y="1783080"/>
-            <a:ext cx="1417320" cy="1234440"/>
-          </a:xfrm>
-          <a:prstGeom prst="rect">
-            <a:avLst/>
-          </a:prstGeom>
-          <a:noFill/>
-          <a:ln/>
-        </p:spPr>
-        <p:txBody>
-          <a:bodyPr wrap="square" lIns="0" tIns="0" rIns="0" bIns="0" rtlCol="0" anchor="t"/>
-          <a:lstStyle/>
-          <a:p>
-            <a:pPr marL="0" indent="0" algn="ctr">
-              <a:buNone/>
-            </a:pPr>
-            <a:r>
-              <a:rPr lang="en-US" sz="1200" dirty="0">
-                <a:solidFill>
-                  <a:srgbClr val="5B6B7A"/>
-                </a:solidFill>
-              </a:rPr>
-              <a:t>R², erreur moyenne (MAE), RMSE</a:t>
-            </a:r>
-            <a:endParaRPr lang="en-US" sz="1200" dirty="0"/>
-          </a:p>
-        </p:txBody>
-      </p:sp>
-      <p:sp>
-        <p:nvSpPr>
-          <p:cNvPr id="15" name="Shape 13"/>
-          <p:cNvSpPr/>
-          <p:nvPr/>
-        </p:nvSpPr>
-        <p:spPr>
-          <a:xfrm>
-            <a:off x="7242048" y="1188720"/>
-            <a:ext cx="1600200" cy="1920240"/>
-          </a:xfrm>
-          <a:prstGeom prst="roundRect">
-            <a:avLst>
-              <a:gd name="adj" fmla="val 5714"/>
-            </a:avLst>
-          </a:prstGeom>
-          <a:solidFill>
-            <a:srgbClr val="E3F0EE"/>
-          </a:solidFill>
-          <a:ln w="9525">
-            <a:solidFill>
-              <a:srgbClr val="CFDDD9"/>
-            </a:solidFill>
-            <a:prstDash val="solid"/>
-          </a:ln>
-        </p:spPr>
-        <p:txBody>
-          <a:bodyPr/>
-          <a:lstStyle/>
-          <a:p>
-            <a:endParaRPr lang="fr-FR"/>
-          </a:p>
-        </p:txBody>
-      </p:sp>
-      <p:sp>
-        <p:nvSpPr>
-          <p:cNvPr id="16" name="Text 14"/>
-          <p:cNvSpPr txBox="1"/>
-          <p:nvPr/>
-        </p:nvSpPr>
-        <p:spPr>
-          <a:xfrm>
-            <a:off x="7315200" y="1280160"/>
-            <a:ext cx="1463040" cy="457200"/>
-          </a:xfrm>
-          <a:prstGeom prst="rect">
-            <a:avLst/>
-          </a:prstGeom>
-          <a:noFill/>
-          <a:ln/>
-        </p:spPr>
-        <p:txBody>
-          <a:bodyPr wrap="square" lIns="0" tIns="0" rIns="0" bIns="0" rtlCol="0" anchor="ctr"/>
-          <a:lstStyle/>
-          <a:p>
-            <a:pPr marL="0" indent="0" algn="ctr">
-              <a:buNone/>
-            </a:pPr>
-            <a:r>
-              <a:rPr lang="en-US" sz="1400" b="1" dirty="0">
-                <a:solidFill>
-                  <a:srgbClr val="1B7F79"/>
-                </a:solidFill>
-              </a:rPr>
-              <a:t>Optimisation</a:t>
-            </a:r>
-            <a:endParaRPr lang="en-US" sz="1400" dirty="0"/>
-          </a:p>
-        </p:txBody>
-      </p:sp>
-      <p:sp>
-        <p:nvSpPr>
-          <p:cNvPr id="17" name="Text 15"/>
-          <p:cNvSpPr txBox="1"/>
-          <p:nvPr/>
-        </p:nvSpPr>
-        <p:spPr>
-          <a:xfrm>
-            <a:off x="7333488" y="1783080"/>
-            <a:ext cx="1417320" cy="1234440"/>
-          </a:xfrm>
-          <a:prstGeom prst="rect">
-            <a:avLst/>
-          </a:prstGeom>
-          <a:noFill/>
-          <a:ln/>
-        </p:spPr>
-        <p:txBody>
-          <a:bodyPr wrap="square" lIns="0" tIns="0" rIns="0" bIns="0" rtlCol="0" anchor="t"/>
-          <a:lstStyle/>
-          <a:p>
-            <a:pPr marL="0" indent="0" algn="ctr">
-              <a:buNone/>
-            </a:pPr>
-            <a:r>
-              <a:rPr lang="en-US" sz="1200" dirty="0">
-                <a:solidFill>
-                  <a:srgbClr val="5B6B7A"/>
-                </a:solidFill>
-              </a:rPr>
-              <a:t>GridSearch : 108 combinaisons, critère MAE</a:t>
-            </a:r>
-            <a:endParaRPr lang="en-US" sz="1200" dirty="0"/>
-          </a:p>
-        </p:txBody>
-      </p:sp>
-      <p:sp>
-        <p:nvSpPr>
-          <p:cNvPr id="18" name="Text 16"/>
-          <p:cNvSpPr txBox="1"/>
-          <p:nvPr/>
-        </p:nvSpPr>
-        <p:spPr>
-          <a:xfrm>
-            <a:off x="457200" y="3383280"/>
-            <a:ext cx="8229600" cy="1188720"/>
-          </a:xfrm>
-          <a:prstGeom prst="rect">
-            <a:avLst/>
-          </a:prstGeom>
-          <a:noFill/>
-          <a:ln/>
-        </p:spPr>
-        <p:txBody>
-          <a:bodyPr wrap="square" lIns="0" tIns="0" rIns="0" bIns="0" rtlCol="0" anchor="t"/>
-          <a:lstStyle/>
-          <a:p>
-            <a:pPr marL="342900" indent="-342900">
-              <a:spcAft>
-                <a:spcPts val="800"/>
-              </a:spcAft>
-              <a:buSzPct val="100000"/>
-              <a:buChar char="•"/>
-            </a:pPr>
-            <a:r>
-              <a:rPr lang="en-US" sz="1400" dirty="0">
-                <a:solidFill>
-                  <a:schemeClr val="tx1"/>
-                </a:solidFill>
-              </a:rPr>
-              <a:t>Le test garde les 7 bâtiments très gros : l'évaluation reste réaliste. Le choix du modèle repose sur la validation croisée, pas sur le test</a:t>
-            </a:r>
-            <a:endParaRPr lang="en-US" sz="1400" dirty="0"/>
-          </a:p>
-          <a:p>
-            <a:pPr marL="342900" indent="-342900">
-              <a:spcAft>
-                <a:spcPts val="800"/>
-              </a:spcAft>
-              <a:buSzPct val="100000"/>
-              <a:buChar char="•"/>
-            </a:pPr>
-            <a:r>
-              <a:rPr lang="en-US" sz="1400" dirty="0">
-                <a:solidFill>
-                  <a:schemeClr val="tx1"/>
-                </a:solidFill>
-              </a:rPr>
-              <a:t>Le modèle de référence (valeur constante) fixe le plancher : un bon modèle doit faire nettement mieux</a:t>
-            </a:r>
-            <a:endParaRPr lang="en-US" sz="1400" dirty="0"/>
-          </a:p>
-        </p:txBody>
-      </p:sp>
-      <p:sp>
-        <p:nvSpPr>
-          <p:cNvPr id="25" name="Slide Number Placeholder 0"/>
-          <p:cNvSpPr>
-            <a:spLocks noGrp="1"/>
-          </p:cNvSpPr>
-          <p:nvPr>
-            <p:ph type="sldNum" sz="quarter" idx="4294967295"/>
-          </p:nvPr>
-        </p:nvSpPr>
-        <p:spPr>
-          <a:xfrm>
-            <a:off x="8321040" y="4828032"/>
-            <a:ext cx="457200" cy="228600"/>
-          </a:xfrm>
-          <a:prstGeom prst="rect">
-            <a:avLst/>
-          </a:prstGeom>
-          <a:extLst>
-            <a:ext uri="{C572A759-6A51-4108-AA02-DFA0A04FC94B}">
-              <ma14:wrappingTextBoxFlag xmlns:ma14="http://schemas.microsoft.com/office/mac/drawingml/2011/main" xmlns="" val="0"/>
+              <ma14:wrappingTextBoxFlag xmlns="" xmlns:ma14="http://schemas.microsoft.com/office/mac/drawingml/2011/main" val="0"/>
             </a:ext>
           </a:extLst>
         </p:spPr>
